--- a/EarthSafe_Final_Presentation.pptx
+++ b/EarthSafe_Final_Presentation.pptx
@@ -2303,14 +2303,14 @@
               <a:buNone/>
             </a:pPr>
             <a:r>
-              <a:rPr lang="en-US" sz="1100" dirty="0">
+              <a:rPr lang="en-US" sz="950" dirty="0">
                 <a:solidFill>
                   <a:srgbClr val="FFFFFF"/>
                 </a:solidFill>
               </a:rPr>
-              <a:t>🔗  App: [link after deploy]</a:t>
-            </a:r>
-            <a:endParaRPr lang="en-US" sz="1100" dirty="0"/>
+              <a:t>🔗  earthsafe-eu9o2sytymwqnls48ppjg7.streamlit.app</a:t>
+            </a:r>
+            <a:endParaRPr lang="en-US" sz="950" dirty="0"/>
           </a:p>
         </p:txBody>
       </p:sp>
@@ -2366,14 +2366,14 @@
               <a:buNone/>
             </a:pPr>
             <a:r>
-              <a:rPr lang="en-US" sz="1100" dirty="0">
+              <a:rPr lang="en-US" sz="950" dirty="0">
                 <a:solidFill>
                   <a:srgbClr val="FFFFFF"/>
                 </a:solidFill>
               </a:rPr>
-              <a:t>⚙️  API: [link after deploy]</a:t>
-            </a:r>
-            <a:endParaRPr lang="en-US" sz="1100" dirty="0"/>
+              <a:t>⚙️  API: Flask · POST /predict  (local / Cloud Run)</a:t>
+            </a:r>
+            <a:endParaRPr lang="en-US" sz="950" dirty="0"/>
           </a:p>
         </p:txBody>
       </p:sp>

--- a/EarthSafe_Final_Presentation.pptx
+++ b/EarthSafe_Final_Presentation.pptx
@@ -155,7 +155,7 @@
             <c:bubble3D val="0"/>
             <c:spPr>
               <a:solidFill>
-                <a:srgbClr val="27AE60"/>
+                <a:srgbClr val="1E8449"/>
               </a:solidFill>
               <a:effectLst/>
             </c:spPr>
@@ -165,7 +165,7 @@
             <c:bubble3D val="0"/>
             <c:spPr>
               <a:solidFill>
-                <a:srgbClr val="F39C12"/>
+                <a:srgbClr val="D4800A"/>
               </a:solidFill>
               <a:effectLst/>
             </c:spPr>
@@ -175,7 +175,7 @@
             <c:bubble3D val="0"/>
             <c:spPr>
               <a:solidFill>
-                <a:srgbClr val="E74C3C"/>
+                <a:srgbClr val="C0392B"/>
               </a:solidFill>
               <a:effectLst/>
             </c:spPr>
@@ -190,7 +190,7 @@
                 <a:lstStyle/>
                 <a:p>
                   <a:pPr>
-                    <a:defRPr sz="1200" b="0" i="0" u="none" strike="noStrike">
+                    <a:defRPr sz="1400" b="0" i="0" u="none" strike="noStrike">
                       <a:solidFill>
                         <a:srgbClr val="FFFFFF"/>
                       </a:solidFill>
@@ -215,7 +215,7 @@
                 <a:lstStyle/>
                 <a:p>
                   <a:pPr>
-                    <a:defRPr sz="1200" b="0" i="0" u="none" strike="noStrike">
+                    <a:defRPr sz="1400" b="0" i="0" u="none" strike="noStrike">
                       <a:solidFill>
                         <a:srgbClr val="FFFFFF"/>
                       </a:solidFill>
@@ -240,7 +240,7 @@
                 <a:lstStyle/>
                 <a:p>
                   <a:pPr>
-                    <a:defRPr sz="1200" b="0" i="0" u="none" strike="noStrike">
+                    <a:defRPr sz="1400" b="0" i="0" u="none" strike="noStrike">
                       <a:solidFill>
                         <a:srgbClr val="FFFFFF"/>
                       </a:solidFill>
@@ -333,7 +333,7 @@
         <a:lstStyle/>
         <a:p>
           <a:pPr>
-            <a:defRPr sz="1100">      </a:defRPr>
+            <a:defRPr sz="1300">      </a:defRPr>
           </a:pPr>
           <a:endParaRPr lang="en-US"/>
         </a:p>
@@ -369,21 +369,21 @@
           <a:lstStyle/>
           <a:p>
             <a:pPr>
-              <a:defRPr sz="1300" b="0" i="0" u="none" strike="noStrike">
-                <a:solidFill>
-                  <a:srgbClr val="1E3A5F"/>
+              <a:defRPr sz="1500" b="0" i="0" u="none" strike="noStrike">
+                <a:solidFill>
+                  <a:srgbClr val="1A5276"/>
                 </a:solidFill>
                 <a:latin typeface="Arial"/>
               </a:defRPr>
             </a:pPr>
             <a:r>
-              <a:rPr sz="1300" b="0" i="0" u="none" strike="noStrike">
-                <a:solidFill>
-                  <a:srgbClr val="1E3A5F"/>
+              <a:rPr sz="1500" b="0" i="0" u="none" strike="noStrike">
+                <a:solidFill>
+                  <a:srgbClr val="1A5276"/>
                 </a:solidFill>
                 <a:latin typeface="Arial"/>
               </a:rPr>
-              <a:t>5-Fold CV Results</a:t>
+              <a:t>5-Fold Cross-Validation Results</a:t>
             </a:r>
           </a:p>
         </c:rich>
@@ -414,21 +414,21 @@
           </c:tx>
           <c:spPr>
             <a:solidFill>
-              <a:srgbClr val="065A82"/>
+              <a:srgbClr val="1A5276"/>
             </a:solidFill>
             <a:effectLst/>
           </c:spPr>
           <c:invertIfNegative val="0"/>
           <c:dLbls>
-            <c:numFmt formatCode="0.0%" sourceLinked="0"/>
+            <c:numFmt formatCode="#,##0" sourceLinked="0"/>
             <c:txPr>
               <a:bodyPr/>
               <a:lstStyle/>
               <a:p>
                 <a:pPr>
-                  <a:defRPr b="0" i="0" strike="noStrike" sz="900" u="none">
+                  <a:defRPr b="0" i="0" strike="noStrike" sz="1200" u="none">
                     <a:solidFill>
-                      <a:srgbClr val="1A1A2A"/>
+                      <a:srgbClr val="000000"/>
                     </a:solidFill>
                     <a:latin typeface="Arial"/>
                   </a:defRPr>
@@ -436,7 +436,7 @@
               </a:p>
             </c:txPr>
             <c:showLegendKey val="0"/>
-            <c:showVal val="1"/>
+            <c:showVal val="0"/>
             <c:showCatName val="0"/>
             <c:showSerName val="0"/>
             <c:showPercent val="0"/>
@@ -503,15 +503,15 @@
           </c:spPr>
           <c:invertIfNegative val="0"/>
           <c:dLbls>
-            <c:numFmt formatCode="0.0%" sourceLinked="0"/>
+            <c:numFmt formatCode="#,##0" sourceLinked="0"/>
             <c:txPr>
               <a:bodyPr/>
               <a:lstStyle/>
               <a:p>
                 <a:pPr>
-                  <a:defRPr b="0" i="0" strike="noStrike" sz="900" u="none">
+                  <a:defRPr b="0" i="0" strike="noStrike" sz="1200" u="none">
                     <a:solidFill>
-                      <a:srgbClr val="1A1A2A"/>
+                      <a:srgbClr val="000000"/>
                     </a:solidFill>
                     <a:latin typeface="Arial"/>
                   </a:defRPr>
@@ -519,7 +519,7 @@
               </a:p>
             </c:txPr>
             <c:showLegendKey val="0"/>
-            <c:showVal val="1"/>
+            <c:showVal val="0"/>
             <c:showCatName val="0"/>
             <c:showSerName val="0"/>
             <c:showPercent val="0"/>
@@ -565,15 +565,15 @@
           </c:val>
         </c:ser>
         <c:dLbls>
-          <c:numFmt formatCode="0.0%" sourceLinked="0"/>
+          <c:numFmt formatCode="#,##0" sourceLinked="0"/>
           <c:txPr>
             <a:bodyPr/>
             <a:lstStyle/>
             <a:p>
               <a:pPr>
-                <a:defRPr b="0" i="0" strike="noStrike" sz="900" u="none">
+                <a:defRPr b="0" i="0" strike="noStrike" sz="1200" u="none">
                   <a:solidFill>
-                    <a:srgbClr val="1A1A2A"/>
+                    <a:srgbClr val="000000"/>
                   </a:solidFill>
                   <a:latin typeface="Arial"/>
                 </a:defRPr>
@@ -581,7 +581,7 @@
             </a:p>
           </c:txPr>
           <c:showLegendKey val="0"/>
-          <c:showVal val="1"/>
+          <c:showVal val="0"/>
           <c:showCatName val="0"/>
           <c:showSerName val="0"/>
           <c:showPercent val="0"/>
@@ -619,7 +619,7 @@
           <a:lstStyle/>
           <a:p>
             <a:pPr>
-              <a:defRPr sz="1200" b="0" i="0" u="none" strike="noStrike">
+              <a:defRPr sz="1300" b="0" i="0" u="none" strike="noStrike">
                 <a:solidFill>
                   <a:srgbClr val="1A1A2A"/>
                 </a:solidFill>
@@ -639,7 +639,7 @@
         <c:axId val="2094734552"/>
         <c:scaling>
           <c:orientation val="minMax"/>
-          <c:max val="1.02"/>
+          <c:max val="1.05"/>
           <c:min val="0.8"/>
         </c:scaling>
         <c:delete val="0"/>
@@ -648,7 +648,7 @@
           <c:spPr>
             <a:ln w="6350" cap="flat">
               <a:solidFill>
-                <a:srgbClr val="E2E8F0"/>
+                <a:srgbClr val="D5E8F0"/>
               </a:solidFill>
               <a:prstDash val="solid"/>
               <a:round/>
@@ -675,7 +675,7 @@
             <a:pPr>
               <a:defRPr sz="1200" b="0" i="0" u="none" strike="noStrike">
                 <a:solidFill>
-                  <a:srgbClr val="64748B"/>
+                  <a:srgbClr val="4A6274"/>
                 </a:solidFill>
                 <a:latin typeface="Arial"/>
               </a:defRPr>
@@ -703,7 +703,7 @@
         <a:lstStyle/>
         <a:p>
           <a:pPr>
-            <a:defRPr sz="1100">      </a:defRPr>
+            <a:defRPr sz="1300">      </a:defRPr>
           </a:pPr>
           <a:endParaRPr lang="en-US"/>
         </a:p>
@@ -2005,7 +2005,7 @@
     <p:bg>
       <p:bgPr>
         <a:solidFill>
-          <a:srgbClr val="1E3A5F"/>
+          <a:srgbClr val="FFFFFF"/>
         </a:solidFill>
       </p:bgPr>
     </p:bg>
@@ -2032,7 +2032,7 @@
         <p:spPr>
           <a:xfrm>
             <a:off x="0" y="0"/>
-            <a:ext cx="201168" cy="5143500"/>
+            <a:ext cx="9144000" cy="201168"/>
           </a:xfrm>
           <a:prstGeom prst="rect">
             <a:avLst/>
@@ -2056,18 +2056,18 @@
         </p:nvSpPr>
         <p:spPr>
           <a:xfrm>
-            <a:off x="1005840" y="640080"/>
-            <a:ext cx="1005840" cy="1005840"/>
-          </a:xfrm>
-          <a:prstGeom prst="ellipse">
-            <a:avLst/>
-          </a:prstGeom>
-          <a:solidFill>
-            <a:srgbClr val="0D9488"/>
+            <a:off x="0" y="4937760"/>
+            <a:ext cx="9144000" cy="205740"/>
+          </a:xfrm>
+          <a:prstGeom prst="rect">
+            <a:avLst/>
+          </a:prstGeom>
+          <a:solidFill>
+            <a:srgbClr val="1A5276"/>
           </a:solidFill>
           <a:ln w="12700">
             <a:solidFill>
-              <a:srgbClr val="0D9488"/>
+              <a:srgbClr val="1A5276"/>
             </a:solidFill>
             <a:prstDash val="solid"/>
           </a:ln>
@@ -2081,8 +2081,8 @@
         </p:nvSpPr>
         <p:spPr>
           <a:xfrm>
-            <a:off x="1005840" y="658368"/>
-            <a:ext cx="1005840" cy="1005840"/>
+            <a:off x="3474720" y="457200"/>
+            <a:ext cx="2194560" cy="1188720"/>
           </a:xfrm>
           <a:prstGeom prst="rect">
             <a:avLst/>
@@ -2098,14 +2098,14 @@
               <a:buNone/>
             </a:pPr>
             <a:r>
-              <a:rPr lang="en-US" sz="3400" dirty="0">
+              <a:rPr lang="en-US" sz="6400" dirty="0">
                 <a:solidFill>
                   <a:srgbClr val="000000"/>
                 </a:solidFill>
               </a:rPr>
               <a:t>🌍</a:t>
             </a:r>
-            <a:endParaRPr lang="en-US" sz="3400" dirty="0"/>
+            <a:endParaRPr lang="en-US" sz="6400" dirty="0"/>
           </a:p>
         </p:txBody>
       </p:sp>
@@ -2117,8 +2117,8 @@
         </p:nvSpPr>
         <p:spPr>
           <a:xfrm>
-            <a:off x="457200" y="1783080"/>
-            <a:ext cx="8229600" cy="1005840"/>
+            <a:off x="457200" y="1600200"/>
+            <a:ext cx="8229600" cy="1051560"/>
           </a:xfrm>
           <a:prstGeom prst="rect">
             <a:avLst/>
@@ -2134,9 +2134,9 @@
               <a:buNone/>
             </a:pPr>
             <a:r>
-              <a:rPr lang="en-US" sz="5800" b="1" dirty="0">
-                <a:solidFill>
-                  <a:srgbClr val="FFFFFF"/>
+              <a:rPr lang="en-US" sz="6400" b="1" dirty="0">
+                <a:solidFill>
+                  <a:srgbClr val="1A5276"/>
                 </a:solidFill>
                 <a:latin typeface="Trebuchet MS" pitchFamily="34" charset="0"/>
                 <a:ea typeface="Trebuchet MS" pitchFamily="34" charset="-122"/>
@@ -2144,7 +2144,7 @@
               </a:rPr>
               <a:t>EarthSafe</a:t>
             </a:r>
-            <a:endParaRPr lang="en-US" sz="5800" dirty="0"/>
+            <a:endParaRPr lang="en-US" sz="6400" dirty="0"/>
           </a:p>
         </p:txBody>
       </p:sp>
@@ -2156,8 +2156,8 @@
         </p:nvSpPr>
         <p:spPr>
           <a:xfrm>
-            <a:off x="457200" y="2834640"/>
-            <a:ext cx="8229600" cy="502920"/>
+            <a:off x="457200" y="2651760"/>
+            <a:ext cx="8229600" cy="548640"/>
           </a:xfrm>
           <a:prstGeom prst="rect">
             <a:avLst/>
@@ -2173,9 +2173,9 @@
               <a:buNone/>
             </a:pPr>
             <a:r>
-              <a:rPr lang="en-US" sz="2200" dirty="0">
-                <a:solidFill>
-                  <a:srgbClr val="A8D8EA"/>
+              <a:rPr lang="en-US" sz="2600" dirty="0">
+                <a:solidFill>
+                  <a:srgbClr val="0D9488"/>
                 </a:solidFill>
                 <a:latin typeface="Calibri" pitchFamily="34" charset="0"/>
                 <a:ea typeface="Calibri" pitchFamily="34" charset="-122"/>
@@ -2183,7 +2183,7 @@
               </a:rPr>
               <a:t>Real-Time Earthquake Hazard Prediction</a:t>
             </a:r>
-            <a:endParaRPr lang="en-US" sz="2200" dirty="0"/>
+            <a:endParaRPr lang="en-US" sz="2600" dirty="0"/>
           </a:p>
         </p:txBody>
       </p:sp>
@@ -2195,18 +2195,18 @@
         </p:nvSpPr>
         <p:spPr>
           <a:xfrm>
-            <a:off x="2926080" y="3456432"/>
-            <a:ext cx="3291840" cy="36576"/>
-          </a:xfrm>
-          <a:prstGeom prst="rect">
-            <a:avLst/>
-          </a:prstGeom>
-          <a:solidFill>
-            <a:srgbClr val="0D9488"/>
+            <a:off x="3200400" y="3310128"/>
+            <a:ext cx="2743200" cy="45720"/>
+          </a:xfrm>
+          <a:prstGeom prst="rect">
+            <a:avLst/>
+          </a:prstGeom>
+          <a:solidFill>
+            <a:srgbClr val="B2D8F0"/>
           </a:solidFill>
           <a:ln w="12700">
             <a:solidFill>
-              <a:srgbClr val="0D9488"/>
+              <a:srgbClr val="B2D8F0"/>
             </a:solidFill>
             <a:prstDash val="solid"/>
           </a:ln>
@@ -2220,8 +2220,8 @@
         </p:nvSpPr>
         <p:spPr>
           <a:xfrm>
-            <a:off x="457200" y="3611880"/>
-            <a:ext cx="8229600" cy="365760"/>
+            <a:off x="457200" y="3456432"/>
+            <a:ext cx="8229600" cy="384048"/>
           </a:xfrm>
           <a:prstGeom prst="rect">
             <a:avLst/>
@@ -2237,9 +2237,9 @@
               <a:buNone/>
             </a:pPr>
             <a:r>
-              <a:rPr lang="en-US" sz="1400" dirty="0">
-                <a:solidFill>
-                  <a:srgbClr val="A0B4C8"/>
+              <a:rPr lang="en-US" sz="1800" dirty="0">
+                <a:solidFill>
+                  <a:srgbClr val="4A6274"/>
                 </a:solidFill>
                 <a:latin typeface="Calibri" pitchFamily="34" charset="0"/>
                 <a:ea typeface="Calibri" pitchFamily="34" charset="-122"/>
@@ -2247,7 +2247,7 @@
               </a:rPr>
               <a:t>STAT 418  ·  UCLA  ·  Spring 2026  ·  Yutong Ma</a:t>
             </a:r>
-            <a:endParaRPr lang="en-US" sz="1400" dirty="0"/>
+            <a:endParaRPr lang="en-US" sz="1800" dirty="0"/>
           </a:p>
         </p:txBody>
       </p:sp>
@@ -2259,12 +2259,12 @@
         </p:nvSpPr>
         <p:spPr>
           <a:xfrm>
-            <a:off x="1645920" y="4206240"/>
-            <a:ext cx="2560320" cy="457200"/>
+            <a:off x="1463040" y="3977640"/>
+            <a:ext cx="2834640" cy="502920"/>
           </a:xfrm>
           <a:prstGeom prst="roundRect">
             <a:avLst>
-              <a:gd name="adj" fmla="val 16000"/>
+              <a:gd name="adj" fmla="val 14545"/>
             </a:avLst>
           </a:prstGeom>
           <a:solidFill>
@@ -2286,8 +2286,8 @@
         </p:nvSpPr>
         <p:spPr>
           <a:xfrm>
-            <a:off x="1645920" y="4206240"/>
-            <a:ext cx="2560320" cy="457200"/>
+            <a:off x="1463040" y="3977640"/>
+            <a:ext cx="2834640" cy="502920"/>
           </a:xfrm>
           <a:prstGeom prst="rect">
             <a:avLst/>
@@ -2303,14 +2303,17 @@
               <a:buNone/>
             </a:pPr>
             <a:r>
-              <a:rPr lang="en-US" sz="950" dirty="0">
+              <a:rPr lang="en-US" sz="1000" dirty="0">
                 <a:solidFill>
                   <a:srgbClr val="FFFFFF"/>
                 </a:solidFill>
+                <a:latin typeface="Calibri" pitchFamily="34" charset="0"/>
+                <a:ea typeface="Calibri" pitchFamily="34" charset="-122"/>
+                <a:cs typeface="Calibri" pitchFamily="34" charset="-120"/>
               </a:rPr>
               <a:t>🔗  earthsafe-eu9o2sytymwqnls48ppjg7.streamlit.app</a:t>
             </a:r>
-            <a:endParaRPr lang="en-US" sz="950" dirty="0"/>
+            <a:endParaRPr lang="en-US" sz="1000" dirty="0"/>
           </a:p>
         </p:txBody>
       </p:sp>
@@ -2322,20 +2325,20 @@
         </p:nvSpPr>
         <p:spPr>
           <a:xfrm>
-            <a:off x="4937760" y="4206240"/>
-            <a:ext cx="2560320" cy="457200"/>
+            <a:off x="4846320" y="3977640"/>
+            <a:ext cx="2834640" cy="502920"/>
           </a:xfrm>
           <a:prstGeom prst="roundRect">
             <a:avLst>
-              <a:gd name="adj" fmla="val 16000"/>
+              <a:gd name="adj" fmla="val 14545"/>
             </a:avLst>
           </a:prstGeom>
           <a:solidFill>
-            <a:srgbClr val="E67E22"/>
+            <a:srgbClr val="D68910"/>
           </a:solidFill>
           <a:ln w="12700">
             <a:solidFill>
-              <a:srgbClr val="E67E22"/>
+              <a:srgbClr val="D68910"/>
             </a:solidFill>
             <a:prstDash val="solid"/>
           </a:ln>
@@ -2349,8 +2352,8 @@
         </p:nvSpPr>
         <p:spPr>
           <a:xfrm>
-            <a:off x="4937760" y="4206240"/>
-            <a:ext cx="2560320" cy="457200"/>
+            <a:off x="4846320" y="3977640"/>
+            <a:ext cx="2834640" cy="502920"/>
           </a:xfrm>
           <a:prstGeom prst="rect">
             <a:avLst/>
@@ -2366,14 +2369,17 @@
               <a:buNone/>
             </a:pPr>
             <a:r>
-              <a:rPr lang="en-US" sz="950" dirty="0">
+              <a:rPr lang="en-US" sz="1000" dirty="0">
                 <a:solidFill>
                   <a:srgbClr val="FFFFFF"/>
                 </a:solidFill>
-              </a:rPr>
-              <a:t>⚙️  API: Flask · POST /predict  (local / Cloud Run)</a:t>
-            </a:r>
-            <a:endParaRPr lang="en-US" sz="950" dirty="0"/>
+                <a:latin typeface="Calibri" pitchFamily="34" charset="0"/>
+                <a:ea typeface="Calibri" pitchFamily="34" charset="-122"/>
+                <a:cs typeface="Calibri" pitchFamily="34" charset="-120"/>
+              </a:rPr>
+              <a:t>⚙️  Flask API  ·  POST /predict  ·  GET /recent</a:t>
+            </a:r>
+            <a:endParaRPr lang="en-US" sz="1000" dirty="0"/>
           </a:p>
         </p:txBody>
       </p:sp>
@@ -2418,17 +2424,17 @@
         <p:spPr>
           <a:xfrm>
             <a:off x="0" y="0"/>
-            <a:ext cx="9144000" cy="713232"/>
-          </a:xfrm>
-          <a:prstGeom prst="rect">
-            <a:avLst/>
-          </a:prstGeom>
-          <a:solidFill>
-            <a:srgbClr val="1E3A5F"/>
+            <a:ext cx="9144000" cy="777240"/>
+          </a:xfrm>
+          <a:prstGeom prst="rect">
+            <a:avLst/>
+          </a:prstGeom>
+          <a:solidFill>
+            <a:srgbClr val="1A5276"/>
           </a:solidFill>
           <a:ln w="12700">
             <a:solidFill>
-              <a:srgbClr val="1E3A5F"/>
+              <a:srgbClr val="1A5276"/>
             </a:solidFill>
             <a:prstDash val="solid"/>
           </a:ln>
@@ -2436,14 +2442,39 @@
       </p:sp>
       <p:sp>
         <p:nvSpPr>
-          <p:cNvPr id="3" name="Text 1"/>
-          <p:cNvSpPr/>
-          <p:nvPr/>
-        </p:nvSpPr>
-        <p:spPr>
-          <a:xfrm>
-            <a:off x="365760" y="0"/>
-            <a:ext cx="8412480" cy="713232"/>
+          <p:cNvPr id="3" name="Shape 1"/>
+          <p:cNvSpPr/>
+          <p:nvPr/>
+        </p:nvSpPr>
+        <p:spPr>
+          <a:xfrm>
+            <a:off x="0" y="0"/>
+            <a:ext cx="164592" cy="777240"/>
+          </a:xfrm>
+          <a:prstGeom prst="rect">
+            <a:avLst/>
+          </a:prstGeom>
+          <a:solidFill>
+            <a:srgbClr val="0D9488"/>
+          </a:solidFill>
+          <a:ln w="12700">
+            <a:solidFill>
+              <a:srgbClr val="0D9488"/>
+            </a:solidFill>
+            <a:prstDash val="solid"/>
+          </a:ln>
+        </p:spPr>
+      </p:sp>
+      <p:sp>
+        <p:nvSpPr>
+          <p:cNvPr id="4" name="Text 2"/>
+          <p:cNvSpPr/>
+          <p:nvPr/>
+        </p:nvSpPr>
+        <p:spPr>
+          <a:xfrm>
+            <a:off x="320040" y="0"/>
+            <a:ext cx="8595360" cy="777240"/>
           </a:xfrm>
           <a:prstGeom prst="rect">
             <a:avLst/>
@@ -2459,7 +2490,7 @@
               <a:buNone/>
             </a:pPr>
             <a:r>
-              <a:rPr lang="en-US" sz="2600" b="1" dirty="0">
+              <a:rPr lang="en-US" sz="3000" b="1" dirty="0">
                 <a:solidFill>
                   <a:srgbClr val="FFFFFF"/>
                 </a:solidFill>
@@ -2469,20 +2500,20 @@
               </a:rPr>
               <a:t>Project Overview &amp; Motivation</a:t>
             </a:r>
-            <a:endParaRPr lang="en-US" sz="2600" dirty="0"/>
-          </a:p>
-        </p:txBody>
-      </p:sp>
-      <p:sp>
-        <p:nvSpPr>
-          <p:cNvPr id="4" name="Text 2"/>
-          <p:cNvSpPr/>
-          <p:nvPr/>
-        </p:nvSpPr>
-        <p:spPr>
-          <a:xfrm>
-            <a:off x="365760" y="960120"/>
-            <a:ext cx="4206240" cy="365760"/>
+            <a:endParaRPr lang="en-US" sz="3000" dirty="0"/>
+          </a:p>
+        </p:txBody>
+      </p:sp>
+      <p:sp>
+        <p:nvSpPr>
+          <p:cNvPr id="5" name="Text 3"/>
+          <p:cNvSpPr/>
+          <p:nvPr/>
+        </p:nvSpPr>
+        <p:spPr>
+          <a:xfrm>
+            <a:off x="365760" y="1005840"/>
+            <a:ext cx="4389120" cy="411480"/>
           </a:xfrm>
           <a:prstGeom prst="rect">
             <a:avLst/>
@@ -2498,9 +2529,9 @@
               <a:buNone/>
             </a:pPr>
             <a:r>
-              <a:rPr lang="en-US" sz="1800" b="1" dirty="0">
-                <a:solidFill>
-                  <a:srgbClr val="1E3A5F"/>
+              <a:rPr lang="en-US" sz="2200" b="1" dirty="0">
+                <a:solidFill>
+                  <a:srgbClr val="1A5276"/>
                 </a:solidFill>
                 <a:latin typeface="Trebuchet MS" pitchFamily="34" charset="0"/>
                 <a:ea typeface="Trebuchet MS" pitchFamily="34" charset="-122"/>
@@ -2508,20 +2539,20 @@
               </a:rPr>
               <a:t>The Problem</a:t>
             </a:r>
-            <a:endParaRPr lang="en-US" sz="1800" dirty="0"/>
-          </a:p>
-        </p:txBody>
-      </p:sp>
-      <p:sp>
-        <p:nvSpPr>
-          <p:cNvPr id="5" name="Text 3"/>
-          <p:cNvSpPr/>
-          <p:nvPr/>
-        </p:nvSpPr>
-        <p:spPr>
-          <a:xfrm>
-            <a:off x="365760" y="1371600"/>
-            <a:ext cx="4114800" cy="1463040"/>
+            <a:endParaRPr lang="en-US" sz="2200" dirty="0"/>
+          </a:p>
+        </p:txBody>
+      </p:sp>
+      <p:sp>
+        <p:nvSpPr>
+          <p:cNvPr id="6" name="Text 4"/>
+          <p:cNvSpPr/>
+          <p:nvPr/>
+        </p:nvSpPr>
+        <p:spPr>
+          <a:xfrm>
+            <a:off x="365760" y="1463040"/>
+            <a:ext cx="4389120" cy="1554480"/>
           </a:xfrm>
           <a:prstGeom prst="rect">
             <a:avLst/>
@@ -2537,7 +2568,7 @@
               <a:buNone/>
             </a:pPr>
             <a:r>
-              <a:rPr lang="en-US" sz="1300" dirty="0">
+              <a:rPr lang="en-US" sz="1700" dirty="0">
                 <a:solidFill>
                   <a:srgbClr val="1A1A2A"/>
                 </a:solidFill>
@@ -2545,22 +2576,22 @@
                 <a:ea typeface="Calibri" pitchFamily="34" charset="-122"/>
                 <a:cs typeface="Calibri" pitchFamily="34" charset="-120"/>
               </a:rPr>
-              <a:t>Earthquakes kill thousands yearly, yet hazard information is buried in raw seismic data — not accessible to the public in real time.</a:t>
-            </a:r>
-            <a:endParaRPr lang="en-US" sz="1300" dirty="0"/>
+              <a:t>Every year ~55,000 earthquakes of M≥2.5 occur globally. USGS publishes the data in real time — but it's raw, technical numbers that most people cannot act on.</a:t>
+            </a:r>
+            <a:endParaRPr lang="en-US" sz="1700" dirty="0"/>
           </a:p>
           <a:p>
             <a:pPr indent="0" marL="0">
               <a:buNone/>
             </a:pPr>
-            <a:endParaRPr lang="en-US" sz="1300" dirty="0"/>
+            <a:endParaRPr lang="en-US" sz="1700" dirty="0"/>
           </a:p>
           <a:p>
             <a:pPr indent="0" marL="0">
               <a:buNone/>
             </a:pPr>
             <a:r>
-              <a:rPr lang="en-US" sz="1300" dirty="0">
+              <a:rPr lang="en-US" sz="1700" dirty="0">
                 <a:solidFill>
                   <a:srgbClr val="1A1A2A"/>
                 </a:solidFill>
@@ -2568,37 +2599,37 @@
                 <a:ea typeface="Calibri" pitchFamily="34" charset="-122"/>
                 <a:cs typeface="Calibri" pitchFamily="34" charset="-120"/>
               </a:rPr>
-              <a:t>EarthSafe bridges that gap with a plain-language hazard indicator anyone can understand.</a:t>
-            </a:r>
-            <a:endParaRPr lang="en-US" sz="1300" dirty="0"/>
-          </a:p>
-        </p:txBody>
-      </p:sp>
-      <p:sp>
-        <p:nvSpPr>
-          <p:cNvPr id="6" name="Shape 4"/>
-          <p:cNvSpPr/>
-          <p:nvPr/>
-        </p:nvSpPr>
-        <p:spPr>
-          <a:xfrm>
-            <a:off x="320040" y="2999232"/>
-            <a:ext cx="1389888" cy="1005840"/>
-          </a:xfrm>
-          <a:prstGeom prst="rect">
-            <a:avLst/>
-          </a:prstGeom>
-          <a:solidFill>
-            <a:srgbClr val="E8F4FD"/>
+              <a:t>EarthSafe translates seismic parameters into a clear hazard level: Low, Moderate, or High.</a:t>
+            </a:r>
+            <a:endParaRPr lang="en-US" sz="1700" dirty="0"/>
+          </a:p>
+        </p:txBody>
+      </p:sp>
+      <p:sp>
+        <p:nvSpPr>
+          <p:cNvPr id="7" name="Shape 5"/>
+          <p:cNvSpPr/>
+          <p:nvPr/>
+        </p:nvSpPr>
+        <p:spPr>
+          <a:xfrm>
+            <a:off x="347472" y="3108960"/>
+            <a:ext cx="1389888" cy="1051560"/>
+          </a:xfrm>
+          <a:prstGeom prst="rect">
+            <a:avLst/>
+          </a:prstGeom>
+          <a:solidFill>
+            <a:srgbClr val="EAF4FB"/>
           </a:solidFill>
           <a:ln w="12700">
             <a:solidFill>
-              <a:srgbClr val="C5DFF0"/>
+              <a:srgbClr val="B2D8F0"/>
             </a:solidFill>
             <a:prstDash val="solid"/>
           </a:ln>
           <a:effectLst>
-            <a:outerShdw sx="100000" sy="100000" kx="0" ky="0" algn="bl" rotWithShape="0" blurRad="101600" dist="25400" dir="8100000">
+            <a:outerShdw sx="100000" sy="100000" kx="0" ky="0" algn="bl" rotWithShape="0" blurRad="127000" dist="38100" dir="8100000">
               <a:srgbClr val="000000">
                 <a:alpha val="10000"/>
               </a:srgbClr>
@@ -2608,14 +2639,14 @@
       </p:sp>
       <p:sp>
         <p:nvSpPr>
-          <p:cNvPr id="7" name="Text 5"/>
-          <p:cNvSpPr/>
-          <p:nvPr/>
-        </p:nvSpPr>
-        <p:spPr>
-          <a:xfrm>
-            <a:off x="320040" y="3017520"/>
-            <a:ext cx="1389888" cy="502920"/>
+          <p:cNvPr id="8" name="Text 6"/>
+          <p:cNvSpPr/>
+          <p:nvPr/>
+        </p:nvSpPr>
+        <p:spPr>
+          <a:xfrm>
+            <a:off x="347472" y="3145536"/>
+            <a:ext cx="1389888" cy="530352"/>
           </a:xfrm>
           <a:prstGeom prst="rect">
             <a:avLst/>
@@ -2633,13 +2664,13 @@
             <a:r>
               <a:rPr lang="en-US" sz="2200" b="1" dirty="0">
                 <a:solidFill>
-                  <a:srgbClr val="065A82"/>
+                  <a:srgbClr val="1A5276"/>
                 </a:solidFill>
                 <a:latin typeface="Trebuchet MS" pitchFamily="34" charset="0"/>
                 <a:ea typeface="Trebuchet MS" pitchFamily="34" charset="-122"/>
                 <a:cs typeface="Trebuchet MS" pitchFamily="34" charset="-120"/>
               </a:rPr>
-              <a:t>~55,000</a:t>
+              <a:t>55,000+</a:t>
             </a:r>
             <a:endParaRPr lang="en-US" sz="2200" dirty="0"/>
           </a:p>
@@ -2647,14 +2678,14 @@
       </p:sp>
       <p:sp>
         <p:nvSpPr>
-          <p:cNvPr id="8" name="Text 6"/>
-          <p:cNvSpPr/>
-          <p:nvPr/>
-        </p:nvSpPr>
-        <p:spPr>
-          <a:xfrm>
-            <a:off x="320040" y="3493008"/>
-            <a:ext cx="1389888" cy="475488"/>
+          <p:cNvPr id="9" name="Text 7"/>
+          <p:cNvSpPr/>
+          <p:nvPr/>
+        </p:nvSpPr>
+        <p:spPr>
+          <a:xfrm>
+            <a:off x="347472" y="3657600"/>
+            <a:ext cx="1389888" cy="438912"/>
           </a:xfrm>
           <a:prstGeom prst="rect">
             <a:avLst/>
@@ -2670,62 +2701,62 @@
               <a:buNone/>
             </a:pPr>
             <a:r>
-              <a:rPr lang="en-US" sz="900" dirty="0">
-                <a:solidFill>
-                  <a:srgbClr val="64748B"/>
+              <a:rPr lang="en-US" sz="1100" dirty="0">
+                <a:solidFill>
+                  <a:srgbClr val="4A6274"/>
                 </a:solidFill>
                 <a:latin typeface="Calibri" pitchFamily="34" charset="0"/>
                 <a:ea typeface="Calibri" pitchFamily="34" charset="-122"/>
                 <a:cs typeface="Calibri" pitchFamily="34" charset="-120"/>
               </a:rPr>
-              <a:t>M&gt;=2.5 earthquakes</a:t>
-            </a:r>
-            <a:endParaRPr lang="en-US" sz="900" dirty="0"/>
+              <a:t>M≥2.5 quakes</a:t>
+            </a:r>
+            <a:endParaRPr lang="en-US" sz="1100" dirty="0"/>
           </a:p>
           <a:p>
             <a:pPr algn="ctr" indent="0" marL="0">
               <a:buNone/>
             </a:pPr>
             <a:r>
-              <a:rPr lang="en-US" sz="900" dirty="0">
-                <a:solidFill>
-                  <a:srgbClr val="64748B"/>
+              <a:rPr lang="en-US" sz="1100" dirty="0">
+                <a:solidFill>
+                  <a:srgbClr val="4A6274"/>
                 </a:solidFill>
                 <a:latin typeface="Calibri" pitchFamily="34" charset="0"/>
                 <a:ea typeface="Calibri" pitchFamily="34" charset="-122"/>
                 <a:cs typeface="Calibri" pitchFamily="34" charset="-120"/>
               </a:rPr>
-              <a:t>per year globally</a:t>
-            </a:r>
-            <a:endParaRPr lang="en-US" sz="900" dirty="0"/>
-          </a:p>
-        </p:txBody>
-      </p:sp>
-      <p:sp>
-        <p:nvSpPr>
-          <p:cNvPr id="9" name="Shape 7"/>
-          <p:cNvSpPr/>
-          <p:nvPr/>
-        </p:nvSpPr>
-        <p:spPr>
-          <a:xfrm>
-            <a:off x="1828800" y="2999232"/>
-            <a:ext cx="1389888" cy="1005840"/>
-          </a:xfrm>
-          <a:prstGeom prst="rect">
-            <a:avLst/>
-          </a:prstGeom>
-          <a:solidFill>
-            <a:srgbClr val="E8F4FD"/>
+              <a:t>per year (global)</a:t>
+            </a:r>
+            <a:endParaRPr lang="en-US" sz="1100" dirty="0"/>
+          </a:p>
+        </p:txBody>
+      </p:sp>
+      <p:sp>
+        <p:nvSpPr>
+          <p:cNvPr id="10" name="Shape 8"/>
+          <p:cNvSpPr/>
+          <p:nvPr/>
+        </p:nvSpPr>
+        <p:spPr>
+          <a:xfrm>
+            <a:off x="1883664" y="3108960"/>
+            <a:ext cx="1389888" cy="1051560"/>
+          </a:xfrm>
+          <a:prstGeom prst="rect">
+            <a:avLst/>
+          </a:prstGeom>
+          <a:solidFill>
+            <a:srgbClr val="EAF4FB"/>
           </a:solidFill>
           <a:ln w="12700">
             <a:solidFill>
-              <a:srgbClr val="C5DFF0"/>
+              <a:srgbClr val="B2D8F0"/>
             </a:solidFill>
             <a:prstDash val="solid"/>
           </a:ln>
           <a:effectLst>
-            <a:outerShdw sx="100000" sy="100000" kx="0" ky="0" algn="bl" rotWithShape="0" blurRad="101600" dist="25400" dir="8100000">
+            <a:outerShdw sx="100000" sy="100000" kx="0" ky="0" algn="bl" rotWithShape="0" blurRad="127000" dist="38100" dir="8100000">
               <a:srgbClr val="000000">
                 <a:alpha val="10000"/>
               </a:srgbClr>
@@ -2735,14 +2766,14 @@
       </p:sp>
       <p:sp>
         <p:nvSpPr>
-          <p:cNvPr id="10" name="Text 8"/>
-          <p:cNvSpPr/>
-          <p:nvPr/>
-        </p:nvSpPr>
-        <p:spPr>
-          <a:xfrm>
-            <a:off x="1828800" y="3017520"/>
-            <a:ext cx="1389888" cy="502920"/>
+          <p:cNvPr id="11" name="Text 9"/>
+          <p:cNvSpPr/>
+          <p:nvPr/>
+        </p:nvSpPr>
+        <p:spPr>
+          <a:xfrm>
+            <a:off x="1883664" y="3145536"/>
+            <a:ext cx="1389888" cy="530352"/>
           </a:xfrm>
           <a:prstGeom prst="rect">
             <a:avLst/>
@@ -2760,7 +2791,7 @@
             <a:r>
               <a:rPr lang="en-US" sz="2200" b="1" dirty="0">
                 <a:solidFill>
-                  <a:srgbClr val="065A82"/>
+                  <a:srgbClr val="1A5276"/>
                 </a:solidFill>
                 <a:latin typeface="Trebuchet MS" pitchFamily="34" charset="0"/>
                 <a:ea typeface="Trebuchet MS" pitchFamily="34" charset="-122"/>
@@ -2774,14 +2805,14 @@
       </p:sp>
       <p:sp>
         <p:nvSpPr>
-          <p:cNvPr id="11" name="Text 9"/>
-          <p:cNvSpPr/>
-          <p:nvPr/>
-        </p:nvSpPr>
-        <p:spPr>
-          <a:xfrm>
-            <a:off x="1828800" y="3493008"/>
-            <a:ext cx="1389888" cy="475488"/>
+          <p:cNvPr id="12" name="Text 10"/>
+          <p:cNvSpPr/>
+          <p:nvPr/>
+        </p:nvSpPr>
+        <p:spPr>
+          <a:xfrm>
+            <a:off x="1883664" y="3657600"/>
+            <a:ext cx="1389888" cy="438912"/>
           </a:xfrm>
           <a:prstGeom prst="rect">
             <a:avLst/>
@@ -2797,9 +2828,9 @@
               <a:buNone/>
             </a:pPr>
             <a:r>
-              <a:rPr lang="en-US" sz="900" dirty="0">
-                <a:solidFill>
-                  <a:srgbClr val="64748B"/>
+              <a:rPr lang="en-US" sz="1100" dirty="0">
+                <a:solidFill>
+                  <a:srgbClr val="4A6274"/>
                 </a:solidFill>
                 <a:latin typeface="Calibri" pitchFamily="34" charset="0"/>
                 <a:ea typeface="Calibri" pitchFamily="34" charset="-122"/>
@@ -2807,52 +2838,52 @@
               </a:rPr>
               <a:t>records collected</a:t>
             </a:r>
-            <a:endParaRPr lang="en-US" sz="900" dirty="0"/>
+            <a:endParaRPr lang="en-US" sz="1100" dirty="0"/>
           </a:p>
           <a:p>
             <a:pPr algn="ctr" indent="0" marL="0">
               <a:buNone/>
             </a:pPr>
             <a:r>
-              <a:rPr lang="en-US" sz="900" dirty="0">
-                <a:solidFill>
-                  <a:srgbClr val="64748B"/>
+              <a:rPr lang="en-US" sz="1100" dirty="0">
+                <a:solidFill>
+                  <a:srgbClr val="4A6274"/>
                 </a:solidFill>
                 <a:latin typeface="Calibri" pitchFamily="34" charset="0"/>
                 <a:ea typeface="Calibri" pitchFamily="34" charset="-122"/>
                 <a:cs typeface="Calibri" pitchFamily="34" charset="-120"/>
               </a:rPr>
-              <a:t>(USGS 2023-2024)</a:t>
-            </a:r>
-            <a:endParaRPr lang="en-US" sz="900" dirty="0"/>
-          </a:p>
-        </p:txBody>
-      </p:sp>
-      <p:sp>
-        <p:nvSpPr>
-          <p:cNvPr id="12" name="Shape 10"/>
-          <p:cNvSpPr/>
-          <p:nvPr/>
-        </p:nvSpPr>
-        <p:spPr>
-          <a:xfrm>
-            <a:off x="3337560" y="2999232"/>
-            <a:ext cx="1389888" cy="1005840"/>
-          </a:xfrm>
-          <a:prstGeom prst="rect">
-            <a:avLst/>
-          </a:prstGeom>
-          <a:solidFill>
-            <a:srgbClr val="E8F4FD"/>
+              <a:t>USGS 2023-2024</a:t>
+            </a:r>
+            <a:endParaRPr lang="en-US" sz="1100" dirty="0"/>
+          </a:p>
+        </p:txBody>
+      </p:sp>
+      <p:sp>
+        <p:nvSpPr>
+          <p:cNvPr id="13" name="Shape 11"/>
+          <p:cNvSpPr/>
+          <p:nvPr/>
+        </p:nvSpPr>
+        <p:spPr>
+          <a:xfrm>
+            <a:off x="3419856" y="3108960"/>
+            <a:ext cx="1389888" cy="1051560"/>
+          </a:xfrm>
+          <a:prstGeom prst="rect">
+            <a:avLst/>
+          </a:prstGeom>
+          <a:solidFill>
+            <a:srgbClr val="EAF4FB"/>
           </a:solidFill>
           <a:ln w="12700">
             <a:solidFill>
-              <a:srgbClr val="C5DFF0"/>
+              <a:srgbClr val="B2D8F0"/>
             </a:solidFill>
             <a:prstDash val="solid"/>
           </a:ln>
           <a:effectLst>
-            <a:outerShdw sx="100000" sy="100000" kx="0" ky="0" algn="bl" rotWithShape="0" blurRad="101600" dist="25400" dir="8100000">
+            <a:outerShdw sx="100000" sy="100000" kx="0" ky="0" algn="bl" rotWithShape="0" blurRad="127000" dist="38100" dir="8100000">
               <a:srgbClr val="000000">
                 <a:alpha val="10000"/>
               </a:srgbClr>
@@ -2862,14 +2893,14 @@
       </p:sp>
       <p:sp>
         <p:nvSpPr>
-          <p:cNvPr id="13" name="Text 11"/>
-          <p:cNvSpPr/>
-          <p:nvPr/>
-        </p:nvSpPr>
-        <p:spPr>
-          <a:xfrm>
-            <a:off x="3337560" y="3017520"/>
-            <a:ext cx="1389888" cy="502920"/>
+          <p:cNvPr id="14" name="Text 12"/>
+          <p:cNvSpPr/>
+          <p:nvPr/>
+        </p:nvSpPr>
+        <p:spPr>
+          <a:xfrm>
+            <a:off x="3419856" y="3145536"/>
+            <a:ext cx="1389888" cy="530352"/>
           </a:xfrm>
           <a:prstGeom prst="rect">
             <a:avLst/>
@@ -2887,7 +2918,7 @@
             <a:r>
               <a:rPr lang="en-US" sz="2200" b="1" dirty="0">
                 <a:solidFill>
-                  <a:srgbClr val="065A82"/>
+                  <a:srgbClr val="1A5276"/>
                 </a:solidFill>
                 <a:latin typeface="Trebuchet MS" pitchFamily="34" charset="0"/>
                 <a:ea typeface="Trebuchet MS" pitchFamily="34" charset="-122"/>
@@ -2901,14 +2932,14 @@
       </p:sp>
       <p:sp>
         <p:nvSpPr>
-          <p:cNvPr id="14" name="Text 12"/>
-          <p:cNvSpPr/>
-          <p:nvPr/>
-        </p:nvSpPr>
-        <p:spPr>
-          <a:xfrm>
-            <a:off x="3337560" y="3493008"/>
-            <a:ext cx="1389888" cy="475488"/>
+          <p:cNvPr id="15" name="Text 13"/>
+          <p:cNvSpPr/>
+          <p:nvPr/>
+        </p:nvSpPr>
+        <p:spPr>
+          <a:xfrm>
+            <a:off x="3419856" y="3657600"/>
+            <a:ext cx="1389888" cy="438912"/>
           </a:xfrm>
           <a:prstGeom prst="rect">
             <a:avLst/>
@@ -2924,9 +2955,9 @@
               <a:buNone/>
             </a:pPr>
             <a:r>
-              <a:rPr lang="en-US" sz="900" dirty="0">
-                <a:solidFill>
-                  <a:srgbClr val="64748B"/>
+              <a:rPr lang="en-US" sz="1100" dirty="0">
+                <a:solidFill>
+                  <a:srgbClr val="4A6274"/>
                 </a:solidFill>
                 <a:latin typeface="Calibri" pitchFamily="34" charset="0"/>
                 <a:ea typeface="Calibri" pitchFamily="34" charset="-122"/>
@@ -2934,16 +2965,16 @@
               </a:rPr>
               <a:t>input features</a:t>
             </a:r>
-            <a:endParaRPr lang="en-US" sz="900" dirty="0"/>
+            <a:endParaRPr lang="en-US" sz="1100" dirty="0"/>
           </a:p>
           <a:p>
             <a:pPr algn="ctr" indent="0" marL="0">
               <a:buNone/>
             </a:pPr>
             <a:r>
-              <a:rPr lang="en-US" sz="900" dirty="0">
-                <a:solidFill>
-                  <a:srgbClr val="64748B"/>
+              <a:rPr lang="en-US" sz="1100" dirty="0">
+                <a:solidFill>
+                  <a:srgbClr val="4A6274"/>
                 </a:solidFill>
                 <a:latin typeface="Calibri" pitchFamily="34" charset="0"/>
                 <a:ea typeface="Calibri" pitchFamily="34" charset="-122"/>
@@ -2951,20 +2982,20 @@
               </a:rPr>
               <a:t>for prediction</a:t>
             </a:r>
-            <a:endParaRPr lang="en-US" sz="900" dirty="0"/>
-          </a:p>
-        </p:txBody>
-      </p:sp>
-      <p:sp>
-        <p:nvSpPr>
-          <p:cNvPr id="15" name="Text 13"/>
-          <p:cNvSpPr/>
-          <p:nvPr/>
-        </p:nvSpPr>
-        <p:spPr>
-          <a:xfrm>
-            <a:off x="5120640" y="960120"/>
-            <a:ext cx="3657600" cy="365760"/>
+            <a:endParaRPr lang="en-US" sz="1100" dirty="0"/>
+          </a:p>
+        </p:txBody>
+      </p:sp>
+      <p:sp>
+        <p:nvSpPr>
+          <p:cNvPr id="16" name="Text 14"/>
+          <p:cNvSpPr/>
+          <p:nvPr/>
+        </p:nvSpPr>
+        <p:spPr>
+          <a:xfrm>
+            <a:off x="5029200" y="1005840"/>
+            <a:ext cx="3749040" cy="411480"/>
           </a:xfrm>
           <a:prstGeom prst="rect">
             <a:avLst/>
@@ -2980,9 +3011,9 @@
               <a:buNone/>
             </a:pPr>
             <a:r>
-              <a:rPr lang="en-US" sz="1800" b="1" dirty="0">
-                <a:solidFill>
-                  <a:srgbClr val="1E3A5F"/>
+              <a:rPr lang="en-US" sz="2200" b="1" dirty="0">
+                <a:solidFill>
+                  <a:srgbClr val="1A5276"/>
                 </a:solidFill>
                 <a:latin typeface="Trebuchet MS" pitchFamily="34" charset="0"/>
                 <a:ea typeface="Trebuchet MS" pitchFamily="34" charset="-122"/>
@@ -2990,35 +3021,35 @@
               </a:rPr>
               <a:t>Hazard Levels</a:t>
             </a:r>
-            <a:endParaRPr lang="en-US" sz="1800" dirty="0"/>
-          </a:p>
-        </p:txBody>
-      </p:sp>
-      <p:sp>
-        <p:nvSpPr>
-          <p:cNvPr id="16" name="Shape 14"/>
-          <p:cNvSpPr/>
-          <p:nvPr/>
-        </p:nvSpPr>
-        <p:spPr>
-          <a:xfrm>
-            <a:off x="5029200" y="1389888"/>
-            <a:ext cx="3749040" cy="1005840"/>
-          </a:xfrm>
-          <a:prstGeom prst="rect">
-            <a:avLst/>
-          </a:prstGeom>
-          <a:solidFill>
-            <a:srgbClr val="EAFAF1"/>
+            <a:endParaRPr lang="en-US" sz="2200" dirty="0"/>
+          </a:p>
+        </p:txBody>
+      </p:sp>
+      <p:sp>
+        <p:nvSpPr>
+          <p:cNvPr id="17" name="Shape 15"/>
+          <p:cNvSpPr/>
+          <p:nvPr/>
+        </p:nvSpPr>
+        <p:spPr>
+          <a:xfrm>
+            <a:off x="4937760" y="1481328"/>
+            <a:ext cx="3840480" cy="1005840"/>
+          </a:xfrm>
+          <a:prstGeom prst="rect">
+            <a:avLst/>
+          </a:prstGeom>
+          <a:solidFill>
+            <a:srgbClr val="E9F7EF"/>
           </a:solidFill>
           <a:ln w="12700">
             <a:solidFill>
-              <a:srgbClr val="27AE60"/>
+              <a:srgbClr val="1E8449"/>
             </a:solidFill>
             <a:prstDash val="solid"/>
           </a:ln>
           <a:effectLst>
-            <a:outerShdw sx="100000" sy="100000" kx="0" ky="0" algn="bl" rotWithShape="0" blurRad="101600" dist="25400" dir="8100000">
+            <a:outerShdw sx="100000" sy="100000" kx="0" ky="0" algn="bl" rotWithShape="0" blurRad="127000" dist="38100" dir="8100000">
               <a:srgbClr val="000000">
                 <a:alpha val="10000"/>
               </a:srgbClr>
@@ -3028,24 +3059,24 @@
       </p:sp>
       <p:sp>
         <p:nvSpPr>
-          <p:cNvPr id="17" name="Shape 15"/>
-          <p:cNvSpPr/>
-          <p:nvPr/>
-        </p:nvSpPr>
-        <p:spPr>
-          <a:xfrm>
-            <a:off x="5029200" y="1389888"/>
-            <a:ext cx="109728" cy="1005840"/>
-          </a:xfrm>
-          <a:prstGeom prst="rect">
-            <a:avLst/>
-          </a:prstGeom>
-          <a:solidFill>
-            <a:srgbClr val="27AE60"/>
+          <p:cNvPr id="18" name="Shape 16"/>
+          <p:cNvSpPr/>
+          <p:nvPr/>
+        </p:nvSpPr>
+        <p:spPr>
+          <a:xfrm>
+            <a:off x="4937760" y="1481328"/>
+            <a:ext cx="128016" cy="1005840"/>
+          </a:xfrm>
+          <a:prstGeom prst="rect">
+            <a:avLst/>
+          </a:prstGeom>
+          <a:solidFill>
+            <a:srgbClr val="1E8449"/>
           </a:solidFill>
           <a:ln w="12700">
             <a:solidFill>
-              <a:srgbClr val="27AE60"/>
+              <a:srgbClr val="1E8449"/>
             </a:solidFill>
             <a:prstDash val="solid"/>
           </a:ln>
@@ -3053,14 +3084,14 @@
       </p:sp>
       <p:sp>
         <p:nvSpPr>
-          <p:cNvPr id="18" name="Text 16"/>
-          <p:cNvSpPr/>
-          <p:nvPr/>
-        </p:nvSpPr>
-        <p:spPr>
-          <a:xfrm>
-            <a:off x="5230368" y="1463040"/>
-            <a:ext cx="3474720" cy="347472"/>
+          <p:cNvPr id="19" name="Text 17"/>
+          <p:cNvSpPr/>
+          <p:nvPr/>
+        </p:nvSpPr>
+        <p:spPr>
+          <a:xfrm>
+            <a:off x="5166360" y="1572768"/>
+            <a:ext cx="3520440" cy="347472"/>
           </a:xfrm>
           <a:prstGeom prst="rect">
             <a:avLst/>
@@ -3076,9 +3107,9 @@
               <a:buNone/>
             </a:pPr>
             <a:r>
-              <a:rPr lang="en-US" sz="1500" b="1" dirty="0">
-                <a:solidFill>
-                  <a:srgbClr val="27AE60"/>
+              <a:rPr lang="en-US" sz="1700" b="1" dirty="0">
+                <a:solidFill>
+                  <a:srgbClr val="1E8449"/>
                 </a:solidFill>
                 <a:latin typeface="Trebuchet MS" pitchFamily="34" charset="0"/>
                 <a:ea typeface="Trebuchet MS" pitchFamily="34" charset="-122"/>
@@ -3086,20 +3117,20 @@
               </a:rPr>
               <a:t>🟢  Low</a:t>
             </a:r>
-            <a:endParaRPr lang="en-US" sz="1500" dirty="0"/>
-          </a:p>
-        </p:txBody>
-      </p:sp>
-      <p:sp>
-        <p:nvSpPr>
-          <p:cNvPr id="19" name="Text 17"/>
-          <p:cNvSpPr/>
-          <p:nvPr/>
-        </p:nvSpPr>
-        <p:spPr>
-          <a:xfrm>
-            <a:off x="5230368" y="1792224"/>
-            <a:ext cx="3474720" cy="256032"/>
+            <a:endParaRPr lang="en-US" sz="1700" dirty="0"/>
+          </a:p>
+        </p:txBody>
+      </p:sp>
+      <p:sp>
+        <p:nvSpPr>
+          <p:cNvPr id="20" name="Text 18"/>
+          <p:cNvSpPr/>
+          <p:nvPr/>
+        </p:nvSpPr>
+        <p:spPr>
+          <a:xfrm>
+            <a:off x="5166360" y="1975104"/>
+            <a:ext cx="3520440" cy="402336"/>
           </a:xfrm>
           <a:prstGeom prst="rect">
             <a:avLst/>
@@ -3115,7 +3146,7 @@
               <a:buNone/>
             </a:pPr>
             <a:r>
-              <a:rPr lang="en-US" sz="1100" dirty="0">
+              <a:rPr lang="en-US" sz="1400" dirty="0">
                 <a:solidFill>
                   <a:srgbClr val="1A1A2A"/>
                 </a:solidFill>
@@ -3123,48 +3154,9 @@
                 <a:ea typeface="Calibri" pitchFamily="34" charset="-122"/>
                 <a:cs typeface="Calibri" pitchFamily="34" charset="-120"/>
               </a:rPr>
-              <a:t>Magnitude &lt; 4.0</a:t>
-            </a:r>
-            <a:endParaRPr lang="en-US" sz="1100" dirty="0"/>
-          </a:p>
-        </p:txBody>
-      </p:sp>
-      <p:sp>
-        <p:nvSpPr>
-          <p:cNvPr id="20" name="Text 18"/>
-          <p:cNvSpPr/>
-          <p:nvPr/>
-        </p:nvSpPr>
-        <p:spPr>
-          <a:xfrm>
-            <a:off x="5230368" y="2029968"/>
-            <a:ext cx="3474720" cy="256032"/>
-          </a:xfrm>
-          <a:prstGeom prst="rect">
-            <a:avLst/>
-          </a:prstGeom>
-          <a:noFill/>
-          <a:ln/>
-        </p:spPr>
-        <p:txBody>
-          <a:bodyPr wrap="square" rtlCol="0" anchor="ctr"/>
-          <a:lstStyle/>
-          <a:p>
-            <a:pPr indent="0" marL="0">
-              <a:buNone/>
-            </a:pPr>
-            <a:r>
-              <a:rPr lang="en-US" sz="1000" i="1" dirty="0">
-                <a:solidFill>
-                  <a:srgbClr val="64748B"/>
-                </a:solidFill>
-                <a:latin typeface="Calibri" pitchFamily="34" charset="0"/>
-                <a:ea typeface="Calibri" pitchFamily="34" charset="-122"/>
-                <a:cs typeface="Calibri" pitchFamily="34" charset="-120"/>
-              </a:rPr>
-              <a:t>Minor shaking, rarely felt</a:t>
-            </a:r>
-            <a:endParaRPr lang="en-US" sz="1000" dirty="0"/>
+              <a:t>Magnitude &lt; 4.0  ·  Minor shaking, rarely felt</a:t>
+            </a:r>
+            <a:endParaRPr lang="en-US" sz="1400" dirty="0"/>
           </a:p>
         </p:txBody>
       </p:sp>
@@ -3176,8 +3168,8 @@
         </p:nvSpPr>
         <p:spPr>
           <a:xfrm>
-            <a:off x="5029200" y="2578608"/>
-            <a:ext cx="3749040" cy="1005840"/>
+            <a:off x="4937760" y="2651760"/>
+            <a:ext cx="3840480" cy="1005840"/>
           </a:xfrm>
           <a:prstGeom prst="rect">
             <a:avLst/>
@@ -3187,12 +3179,12 @@
           </a:solidFill>
           <a:ln w="12700">
             <a:solidFill>
-              <a:srgbClr val="F39C12"/>
+              <a:srgbClr val="D4800A"/>
             </a:solidFill>
             <a:prstDash val="solid"/>
           </a:ln>
           <a:effectLst>
-            <a:outerShdw sx="100000" sy="100000" kx="0" ky="0" algn="bl" rotWithShape="0" blurRad="101600" dist="25400" dir="8100000">
+            <a:outerShdw sx="100000" sy="100000" kx="0" ky="0" algn="bl" rotWithShape="0" blurRad="127000" dist="38100" dir="8100000">
               <a:srgbClr val="000000">
                 <a:alpha val="10000"/>
               </a:srgbClr>
@@ -3208,18 +3200,18 @@
         </p:nvSpPr>
         <p:spPr>
           <a:xfrm>
-            <a:off x="5029200" y="2578608"/>
-            <a:ext cx="109728" cy="1005840"/>
-          </a:xfrm>
-          <a:prstGeom prst="rect">
-            <a:avLst/>
-          </a:prstGeom>
-          <a:solidFill>
-            <a:srgbClr val="F39C12"/>
+            <a:off x="4937760" y="2651760"/>
+            <a:ext cx="128016" cy="1005840"/>
+          </a:xfrm>
+          <a:prstGeom prst="rect">
+            <a:avLst/>
+          </a:prstGeom>
+          <a:solidFill>
+            <a:srgbClr val="D4800A"/>
           </a:solidFill>
           <a:ln w="12700">
             <a:solidFill>
-              <a:srgbClr val="F39C12"/>
+              <a:srgbClr val="D4800A"/>
             </a:solidFill>
             <a:prstDash val="solid"/>
           </a:ln>
@@ -3233,8 +3225,8 @@
         </p:nvSpPr>
         <p:spPr>
           <a:xfrm>
-            <a:off x="5230368" y="2651760"/>
-            <a:ext cx="3474720" cy="347472"/>
+            <a:off x="5166360" y="2743200"/>
+            <a:ext cx="3520440" cy="347472"/>
           </a:xfrm>
           <a:prstGeom prst="rect">
             <a:avLst/>
@@ -3250,9 +3242,9 @@
               <a:buNone/>
             </a:pPr>
             <a:r>
-              <a:rPr lang="en-US" sz="1500" b="1" dirty="0">
-                <a:solidFill>
-                  <a:srgbClr val="F39C12"/>
+              <a:rPr lang="en-US" sz="1700" b="1" dirty="0">
+                <a:solidFill>
+                  <a:srgbClr val="D4800A"/>
                 </a:solidFill>
                 <a:latin typeface="Trebuchet MS" pitchFamily="34" charset="0"/>
                 <a:ea typeface="Trebuchet MS" pitchFamily="34" charset="-122"/>
@@ -3260,7 +3252,7 @@
               </a:rPr>
               <a:t>🟡  Moderate</a:t>
             </a:r>
-            <a:endParaRPr lang="en-US" sz="1500" dirty="0"/>
+            <a:endParaRPr lang="en-US" sz="1700" dirty="0"/>
           </a:p>
         </p:txBody>
       </p:sp>
@@ -3272,8 +3264,8 @@
         </p:nvSpPr>
         <p:spPr>
           <a:xfrm>
-            <a:off x="5230368" y="2980944"/>
-            <a:ext cx="3474720" cy="256032"/>
+            <a:off x="5166360" y="3145536"/>
+            <a:ext cx="3520440" cy="402336"/>
           </a:xfrm>
           <a:prstGeom prst="rect">
             <a:avLst/>
@@ -3289,7 +3281,7 @@
               <a:buNone/>
             </a:pPr>
             <a:r>
-              <a:rPr lang="en-US" sz="1100" dirty="0">
+              <a:rPr lang="en-US" sz="1400" dirty="0">
                 <a:solidFill>
                   <a:srgbClr val="1A1A2A"/>
                 </a:solidFill>
@@ -3297,61 +3289,22 @@
                 <a:ea typeface="Calibri" pitchFamily="34" charset="-122"/>
                 <a:cs typeface="Calibri" pitchFamily="34" charset="-120"/>
               </a:rPr>
-              <a:t>Magnitude 4.0–6.0</a:t>
-            </a:r>
-            <a:endParaRPr lang="en-US" sz="1100" dirty="0"/>
-          </a:p>
-        </p:txBody>
-      </p:sp>
-      <p:sp>
-        <p:nvSpPr>
-          <p:cNvPr id="25" name="Text 23"/>
-          <p:cNvSpPr/>
-          <p:nvPr/>
-        </p:nvSpPr>
-        <p:spPr>
-          <a:xfrm>
-            <a:off x="5230368" y="3218688"/>
-            <a:ext cx="3474720" cy="256032"/>
-          </a:xfrm>
-          <a:prstGeom prst="rect">
-            <a:avLst/>
-          </a:prstGeom>
-          <a:noFill/>
-          <a:ln/>
-        </p:spPr>
-        <p:txBody>
-          <a:bodyPr wrap="square" rtlCol="0" anchor="ctr"/>
-          <a:lstStyle/>
-          <a:p>
-            <a:pPr indent="0" marL="0">
-              <a:buNone/>
-            </a:pPr>
-            <a:r>
-              <a:rPr lang="en-US" sz="1000" i="1" dirty="0">
-                <a:solidFill>
-                  <a:srgbClr val="64748B"/>
-                </a:solidFill>
-                <a:latin typeface="Calibri" pitchFamily="34" charset="0"/>
-                <a:ea typeface="Calibri" pitchFamily="34" charset="-122"/>
-                <a:cs typeface="Calibri" pitchFamily="34" charset="-120"/>
-              </a:rPr>
-              <a:t>Felt widely, possible minor damage</a:t>
-            </a:r>
-            <a:endParaRPr lang="en-US" sz="1000" dirty="0"/>
-          </a:p>
-        </p:txBody>
-      </p:sp>
-      <p:sp>
-        <p:nvSpPr>
-          <p:cNvPr id="26" name="Shape 24"/>
-          <p:cNvSpPr/>
-          <p:nvPr/>
-        </p:nvSpPr>
-        <p:spPr>
-          <a:xfrm>
-            <a:off x="5029200" y="3767328"/>
-            <a:ext cx="3749040" cy="1005840"/>
+              <a:t>Magnitude 4.0–6.0  ·  Widely felt, possible minor damage</a:t>
+            </a:r>
+            <a:endParaRPr lang="en-US" sz="1400" dirty="0"/>
+          </a:p>
+        </p:txBody>
+      </p:sp>
+      <p:sp>
+        <p:nvSpPr>
+          <p:cNvPr id="25" name="Shape 23"/>
+          <p:cNvSpPr/>
+          <p:nvPr/>
+        </p:nvSpPr>
+        <p:spPr>
+          <a:xfrm>
+            <a:off x="4937760" y="3822192"/>
+            <a:ext cx="3840480" cy="1005840"/>
           </a:xfrm>
           <a:prstGeom prst="rect">
             <a:avLst/>
@@ -3361,12 +3314,12 @@
           </a:solidFill>
           <a:ln w="12700">
             <a:solidFill>
-              <a:srgbClr val="E74C3C"/>
+              <a:srgbClr val="C0392B"/>
             </a:solidFill>
             <a:prstDash val="solid"/>
           </a:ln>
           <a:effectLst>
-            <a:outerShdw sx="100000" sy="100000" kx="0" ky="0" algn="bl" rotWithShape="0" blurRad="101600" dist="25400" dir="8100000">
+            <a:outerShdw sx="100000" sy="100000" kx="0" ky="0" algn="bl" rotWithShape="0" blurRad="127000" dist="38100" dir="8100000">
               <a:srgbClr val="000000">
                 <a:alpha val="10000"/>
               </a:srgbClr>
@@ -3376,24 +3329,24 @@
       </p:sp>
       <p:sp>
         <p:nvSpPr>
-          <p:cNvPr id="27" name="Shape 25"/>
-          <p:cNvSpPr/>
-          <p:nvPr/>
-        </p:nvSpPr>
-        <p:spPr>
-          <a:xfrm>
-            <a:off x="5029200" y="3767328"/>
-            <a:ext cx="109728" cy="1005840"/>
-          </a:xfrm>
-          <a:prstGeom prst="rect">
-            <a:avLst/>
-          </a:prstGeom>
-          <a:solidFill>
-            <a:srgbClr val="E74C3C"/>
+          <p:cNvPr id="26" name="Shape 24"/>
+          <p:cNvSpPr/>
+          <p:nvPr/>
+        </p:nvSpPr>
+        <p:spPr>
+          <a:xfrm>
+            <a:off x="4937760" y="3822192"/>
+            <a:ext cx="128016" cy="1005840"/>
+          </a:xfrm>
+          <a:prstGeom prst="rect">
+            <a:avLst/>
+          </a:prstGeom>
+          <a:solidFill>
+            <a:srgbClr val="C0392B"/>
           </a:solidFill>
           <a:ln w="12700">
             <a:solidFill>
-              <a:srgbClr val="E74C3C"/>
+              <a:srgbClr val="C0392B"/>
             </a:solidFill>
             <a:prstDash val="solid"/>
           </a:ln>
@@ -3401,14 +3354,14 @@
       </p:sp>
       <p:sp>
         <p:nvSpPr>
-          <p:cNvPr id="28" name="Text 26"/>
-          <p:cNvSpPr/>
-          <p:nvPr/>
-        </p:nvSpPr>
-        <p:spPr>
-          <a:xfrm>
-            <a:off x="5230368" y="3840480"/>
-            <a:ext cx="3474720" cy="347472"/>
+          <p:cNvPr id="27" name="Text 25"/>
+          <p:cNvSpPr/>
+          <p:nvPr/>
+        </p:nvSpPr>
+        <p:spPr>
+          <a:xfrm>
+            <a:off x="5166360" y="3913632"/>
+            <a:ext cx="3520440" cy="347472"/>
           </a:xfrm>
           <a:prstGeom prst="rect">
             <a:avLst/>
@@ -3424,9 +3377,9 @@
               <a:buNone/>
             </a:pPr>
             <a:r>
-              <a:rPr lang="en-US" sz="1500" b="1" dirty="0">
-                <a:solidFill>
-                  <a:srgbClr val="E74C3C"/>
+              <a:rPr lang="en-US" sz="1700" b="1" dirty="0">
+                <a:solidFill>
+                  <a:srgbClr val="C0392B"/>
                 </a:solidFill>
                 <a:latin typeface="Trebuchet MS" pitchFamily="34" charset="0"/>
                 <a:ea typeface="Trebuchet MS" pitchFamily="34" charset="-122"/>
@@ -3434,20 +3387,20 @@
               </a:rPr>
               <a:t>🔴  High</a:t>
             </a:r>
-            <a:endParaRPr lang="en-US" sz="1500" dirty="0"/>
-          </a:p>
-        </p:txBody>
-      </p:sp>
-      <p:sp>
-        <p:nvSpPr>
-          <p:cNvPr id="29" name="Text 27"/>
-          <p:cNvSpPr/>
-          <p:nvPr/>
-        </p:nvSpPr>
-        <p:spPr>
-          <a:xfrm>
-            <a:off x="5230368" y="4169664"/>
-            <a:ext cx="3474720" cy="256032"/>
+            <a:endParaRPr lang="en-US" sz="1700" dirty="0"/>
+          </a:p>
+        </p:txBody>
+      </p:sp>
+      <p:sp>
+        <p:nvSpPr>
+          <p:cNvPr id="28" name="Text 26"/>
+          <p:cNvSpPr/>
+          <p:nvPr/>
+        </p:nvSpPr>
+        <p:spPr>
+          <a:xfrm>
+            <a:off x="5166360" y="4315968"/>
+            <a:ext cx="3520440" cy="402336"/>
           </a:xfrm>
           <a:prstGeom prst="rect">
             <a:avLst/>
@@ -3463,7 +3416,7 @@
               <a:buNone/>
             </a:pPr>
             <a:r>
-              <a:rPr lang="en-US" sz="1100" dirty="0">
+              <a:rPr lang="en-US" sz="1400" dirty="0">
                 <a:solidFill>
                   <a:srgbClr val="1A1A2A"/>
                 </a:solidFill>
@@ -3471,48 +3424,9 @@
                 <a:ea typeface="Calibri" pitchFamily="34" charset="-122"/>
                 <a:cs typeface="Calibri" pitchFamily="34" charset="-120"/>
               </a:rPr>
-              <a:t>Magnitude ≥ 6.0</a:t>
-            </a:r>
-            <a:endParaRPr lang="en-US" sz="1100" dirty="0"/>
-          </a:p>
-        </p:txBody>
-      </p:sp>
-      <p:sp>
-        <p:nvSpPr>
-          <p:cNvPr id="30" name="Text 28"/>
-          <p:cNvSpPr/>
-          <p:nvPr/>
-        </p:nvSpPr>
-        <p:spPr>
-          <a:xfrm>
-            <a:off x="5230368" y="4407408"/>
-            <a:ext cx="3474720" cy="256032"/>
-          </a:xfrm>
-          <a:prstGeom prst="rect">
-            <a:avLst/>
-          </a:prstGeom>
-          <a:noFill/>
-          <a:ln/>
-        </p:spPr>
-        <p:txBody>
-          <a:bodyPr wrap="square" rtlCol="0" anchor="ctr"/>
-          <a:lstStyle/>
-          <a:p>
-            <a:pPr indent="0" marL="0">
-              <a:buNone/>
-            </a:pPr>
-            <a:r>
-              <a:rPr lang="en-US" sz="1000" i="1" dirty="0">
-                <a:solidFill>
-                  <a:srgbClr val="64748B"/>
-                </a:solidFill>
-                <a:latin typeface="Calibri" pitchFamily="34" charset="0"/>
-                <a:ea typeface="Calibri" pitchFamily="34" charset="-122"/>
-                <a:cs typeface="Calibri" pitchFamily="34" charset="-120"/>
-              </a:rPr>
-              <a:t>Strong shaking, significant damage</a:t>
-            </a:r>
-            <a:endParaRPr lang="en-US" sz="1000" dirty="0"/>
+              <a:t>Magnitude ≥ 6.0  ·  Strong shaking, significant damage</a:t>
+            </a:r>
+            <a:endParaRPr lang="en-US" sz="1400" dirty="0"/>
           </a:p>
         </p:txBody>
       </p:sp>
@@ -3557,17 +3471,17 @@
         <p:spPr>
           <a:xfrm>
             <a:off x="0" y="0"/>
-            <a:ext cx="9144000" cy="713232"/>
-          </a:xfrm>
-          <a:prstGeom prst="rect">
-            <a:avLst/>
-          </a:prstGeom>
-          <a:solidFill>
-            <a:srgbClr val="1E3A5F"/>
+            <a:ext cx="9144000" cy="777240"/>
+          </a:xfrm>
+          <a:prstGeom prst="rect">
+            <a:avLst/>
+          </a:prstGeom>
+          <a:solidFill>
+            <a:srgbClr val="1A5276"/>
           </a:solidFill>
           <a:ln w="12700">
             <a:solidFill>
-              <a:srgbClr val="1E3A5F"/>
+              <a:srgbClr val="1A5276"/>
             </a:solidFill>
             <a:prstDash val="solid"/>
           </a:ln>
@@ -3575,14 +3489,39 @@
       </p:sp>
       <p:sp>
         <p:nvSpPr>
-          <p:cNvPr id="3" name="Text 1"/>
-          <p:cNvSpPr/>
-          <p:nvPr/>
-        </p:nvSpPr>
-        <p:spPr>
-          <a:xfrm>
-            <a:off x="365760" y="0"/>
-            <a:ext cx="8412480" cy="713232"/>
+          <p:cNvPr id="3" name="Shape 1"/>
+          <p:cNvSpPr/>
+          <p:nvPr/>
+        </p:nvSpPr>
+        <p:spPr>
+          <a:xfrm>
+            <a:off x="0" y="0"/>
+            <a:ext cx="164592" cy="777240"/>
+          </a:xfrm>
+          <a:prstGeom prst="rect">
+            <a:avLst/>
+          </a:prstGeom>
+          <a:solidFill>
+            <a:srgbClr val="0D9488"/>
+          </a:solidFill>
+          <a:ln w="12700">
+            <a:solidFill>
+              <a:srgbClr val="0D9488"/>
+            </a:solidFill>
+            <a:prstDash val="solid"/>
+          </a:ln>
+        </p:spPr>
+      </p:sp>
+      <p:sp>
+        <p:nvSpPr>
+          <p:cNvPr id="4" name="Text 2"/>
+          <p:cNvSpPr/>
+          <p:nvPr/>
+        </p:nvSpPr>
+        <p:spPr>
+          <a:xfrm>
+            <a:off x="320040" y="0"/>
+            <a:ext cx="8595360" cy="777240"/>
           </a:xfrm>
           <a:prstGeom prst="rect">
             <a:avLst/>
@@ -3598,7 +3537,7 @@
               <a:buNone/>
             </a:pPr>
             <a:r>
-              <a:rPr lang="en-US" sz="2600" b="1" dirty="0">
+              <a:rPr lang="en-US" sz="3000" b="1" dirty="0">
                 <a:solidFill>
                   <a:srgbClr val="FFFFFF"/>
                 </a:solidFill>
@@ -3608,20 +3547,20 @@
               </a:rPr>
               <a:t>Data Collection &amp; Preprocessing</a:t>
             </a:r>
-            <a:endParaRPr lang="en-US" sz="2600" dirty="0"/>
-          </a:p>
-        </p:txBody>
-      </p:sp>
-      <p:sp>
-        <p:nvSpPr>
-          <p:cNvPr id="4" name="Text 2"/>
+            <a:endParaRPr lang="en-US" sz="3000" dirty="0"/>
+          </a:p>
+        </p:txBody>
+      </p:sp>
+      <p:sp>
+        <p:nvSpPr>
+          <p:cNvPr id="5" name="Text 3"/>
           <p:cNvSpPr/>
           <p:nvPr/>
         </p:nvSpPr>
         <p:spPr>
           <a:xfrm>
             <a:off x="365760" y="914400"/>
-            <a:ext cx="4206240" cy="347472"/>
+            <a:ext cx="4206240" cy="411480"/>
           </a:xfrm>
           <a:prstGeom prst="rect">
             <a:avLst/>
@@ -3637,30 +3576,30 @@
               <a:buNone/>
             </a:pPr>
             <a:r>
-              <a:rPr lang="en-US" sz="1800" b="1" dirty="0">
-                <a:solidFill>
-                  <a:srgbClr val="1E3A5F"/>
+              <a:rPr lang="en-US" sz="2000" b="1" dirty="0">
+                <a:solidFill>
+                  <a:srgbClr val="1A5276"/>
                 </a:solidFill>
                 <a:latin typeface="Trebuchet MS" pitchFamily="34" charset="0"/>
                 <a:ea typeface="Trebuchet MS" pitchFamily="34" charset="-122"/>
                 <a:cs typeface="Trebuchet MS" pitchFamily="34" charset="-120"/>
               </a:rPr>
-              <a:t>Pipeline</a:t>
-            </a:r>
-            <a:endParaRPr lang="en-US" sz="1800" dirty="0"/>
-          </a:p>
-        </p:txBody>
-      </p:sp>
-      <p:sp>
-        <p:nvSpPr>
-          <p:cNvPr id="5" name="Shape 3"/>
-          <p:cNvSpPr/>
-          <p:nvPr/>
-        </p:nvSpPr>
-        <p:spPr>
-          <a:xfrm>
-            <a:off x="320040" y="1353312"/>
-            <a:ext cx="475488" cy="475488"/>
+              <a:t>Data Pipeline</a:t>
+            </a:r>
+            <a:endParaRPr lang="en-US" sz="2000" dirty="0"/>
+          </a:p>
+        </p:txBody>
+      </p:sp>
+      <p:sp>
+        <p:nvSpPr>
+          <p:cNvPr id="6" name="Shape 4"/>
+          <p:cNvSpPr/>
+          <p:nvPr/>
+        </p:nvSpPr>
+        <p:spPr>
+          <a:xfrm>
+            <a:off x="320040" y="1417320"/>
+            <a:ext cx="502920" cy="502920"/>
           </a:xfrm>
           <a:prstGeom prst="ellipse">
             <a:avLst/>
@@ -3678,14 +3617,14 @@
       </p:sp>
       <p:sp>
         <p:nvSpPr>
-          <p:cNvPr id="6" name="Text 4"/>
-          <p:cNvSpPr/>
-          <p:nvPr/>
-        </p:nvSpPr>
-        <p:spPr>
-          <a:xfrm>
-            <a:off x="320040" y="1353312"/>
-            <a:ext cx="475488" cy="475488"/>
+          <p:cNvPr id="7" name="Text 5"/>
+          <p:cNvSpPr/>
+          <p:nvPr/>
+        </p:nvSpPr>
+        <p:spPr>
+          <a:xfrm>
+            <a:off x="320040" y="1417320"/>
+            <a:ext cx="502920" cy="502920"/>
           </a:xfrm>
           <a:prstGeom prst="rect">
             <a:avLst/>
@@ -3701,7 +3640,7 @@
               <a:buNone/>
             </a:pPr>
             <a:r>
-              <a:rPr lang="en-US" sz="1200" b="1" dirty="0">
+              <a:rPr lang="en-US" sz="1400" b="1" dirty="0">
                 <a:solidFill>
                   <a:srgbClr val="FFFFFF"/>
                 </a:solidFill>
@@ -3711,20 +3650,20 @@
               </a:rPr>
               <a:t>01</a:t>
             </a:r>
-            <a:endParaRPr lang="en-US" sz="1200" dirty="0"/>
-          </a:p>
-        </p:txBody>
-      </p:sp>
-      <p:sp>
-        <p:nvSpPr>
-          <p:cNvPr id="7" name="Text 5"/>
-          <p:cNvSpPr/>
-          <p:nvPr/>
-        </p:nvSpPr>
-        <p:spPr>
-          <a:xfrm>
-            <a:off x="914400" y="1353312"/>
-            <a:ext cx="3474720" cy="256032"/>
+            <a:endParaRPr lang="en-US" sz="1400" dirty="0"/>
+          </a:p>
+        </p:txBody>
+      </p:sp>
+      <p:sp>
+        <p:nvSpPr>
+          <p:cNvPr id="8" name="Text 6"/>
+          <p:cNvSpPr/>
+          <p:nvPr/>
+        </p:nvSpPr>
+        <p:spPr>
+          <a:xfrm>
+            <a:off x="969264" y="1435608"/>
+            <a:ext cx="3520440" cy="256032"/>
           </a:xfrm>
           <a:prstGeom prst="rect">
             <a:avLst/>
@@ -3740,9 +3679,9 @@
               <a:buNone/>
             </a:pPr>
             <a:r>
-              <a:rPr lang="en-US" sz="1300" b="1" dirty="0">
-                <a:solidFill>
-                  <a:srgbClr val="1E3A5F"/>
+              <a:rPr lang="en-US" sz="1500" b="1" dirty="0">
+                <a:solidFill>
+                  <a:srgbClr val="1A5276"/>
                 </a:solidFill>
                 <a:latin typeface="Trebuchet MS" pitchFamily="34" charset="0"/>
                 <a:ea typeface="Trebuchet MS" pitchFamily="34" charset="-122"/>
@@ -3750,20 +3689,20 @@
               </a:rPr>
               <a:t>USGS API Fetch</a:t>
             </a:r>
-            <a:endParaRPr lang="en-US" sz="1300" dirty="0"/>
-          </a:p>
-        </p:txBody>
-      </p:sp>
-      <p:sp>
-        <p:nvSpPr>
-          <p:cNvPr id="8" name="Text 6"/>
-          <p:cNvSpPr/>
-          <p:nvPr/>
-        </p:nvSpPr>
-        <p:spPr>
-          <a:xfrm>
-            <a:off x="914400" y="1600200"/>
-            <a:ext cx="3474720" cy="256032"/>
+            <a:endParaRPr lang="en-US" sz="1500" dirty="0"/>
+          </a:p>
+        </p:txBody>
+      </p:sp>
+      <p:sp>
+        <p:nvSpPr>
+          <p:cNvPr id="9" name="Text 7"/>
+          <p:cNvSpPr/>
+          <p:nvPr/>
+        </p:nvSpPr>
+        <p:spPr>
+          <a:xfrm>
+            <a:off x="969264" y="1691640"/>
+            <a:ext cx="3520440" cy="274320"/>
           </a:xfrm>
           <a:prstGeom prst="rect">
             <a:avLst/>
@@ -3779,30 +3718,30 @@
               <a:buNone/>
             </a:pPr>
             <a:r>
-              <a:rPr lang="en-US" sz="1000" dirty="0">
-                <a:solidFill>
-                  <a:srgbClr val="64748B"/>
+              <a:rPr lang="en-US" sz="1300" dirty="0">
+                <a:solidFill>
+                  <a:srgbClr val="4A6274"/>
                 </a:solidFill>
                 <a:latin typeface="Calibri" pitchFamily="34" charset="0"/>
                 <a:ea typeface="Calibri" pitchFamily="34" charset="-122"/>
                 <a:cs typeface="Calibri" pitchFamily="34" charset="-120"/>
               </a:rPr>
-              <a:t>requests library · monthly chunks · M≥2.5 · 2023–2024</a:t>
-            </a:r>
-            <a:endParaRPr lang="en-US" sz="1000" dirty="0"/>
-          </a:p>
-        </p:txBody>
-      </p:sp>
-      <p:sp>
-        <p:nvSpPr>
-          <p:cNvPr id="9" name="Shape 7"/>
-          <p:cNvSpPr/>
-          <p:nvPr/>
-        </p:nvSpPr>
-        <p:spPr>
-          <a:xfrm>
-            <a:off x="320040" y="2240280"/>
-            <a:ext cx="475488" cy="475488"/>
+              <a:t>Monthly chunks · M≥2.5 · 2023–2024 · 2,000 records</a:t>
+            </a:r>
+            <a:endParaRPr lang="en-US" sz="1300" dirty="0"/>
+          </a:p>
+        </p:txBody>
+      </p:sp>
+      <p:sp>
+        <p:nvSpPr>
+          <p:cNvPr id="10" name="Shape 8"/>
+          <p:cNvSpPr/>
+          <p:nvPr/>
+        </p:nvSpPr>
+        <p:spPr>
+          <a:xfrm>
+            <a:off x="320040" y="2276856"/>
+            <a:ext cx="502920" cy="502920"/>
           </a:xfrm>
           <a:prstGeom prst="ellipse">
             <a:avLst/>
@@ -3820,14 +3759,14 @@
       </p:sp>
       <p:sp>
         <p:nvSpPr>
-          <p:cNvPr id="10" name="Text 8"/>
-          <p:cNvSpPr/>
-          <p:nvPr/>
-        </p:nvSpPr>
-        <p:spPr>
-          <a:xfrm>
-            <a:off x="320040" y="2240280"/>
-            <a:ext cx="475488" cy="475488"/>
+          <p:cNvPr id="11" name="Text 9"/>
+          <p:cNvSpPr/>
+          <p:nvPr/>
+        </p:nvSpPr>
+        <p:spPr>
+          <a:xfrm>
+            <a:off x="320040" y="2276856"/>
+            <a:ext cx="502920" cy="502920"/>
           </a:xfrm>
           <a:prstGeom prst="rect">
             <a:avLst/>
@@ -3843,7 +3782,7 @@
               <a:buNone/>
             </a:pPr>
             <a:r>
-              <a:rPr lang="en-US" sz="1200" b="1" dirty="0">
+              <a:rPr lang="en-US" sz="1400" b="1" dirty="0">
                 <a:solidFill>
                   <a:srgbClr val="FFFFFF"/>
                 </a:solidFill>
@@ -3853,20 +3792,20 @@
               </a:rPr>
               <a:t>02</a:t>
             </a:r>
-            <a:endParaRPr lang="en-US" sz="1200" dirty="0"/>
-          </a:p>
-        </p:txBody>
-      </p:sp>
-      <p:sp>
-        <p:nvSpPr>
-          <p:cNvPr id="11" name="Text 9"/>
-          <p:cNvSpPr/>
-          <p:nvPr/>
-        </p:nvSpPr>
-        <p:spPr>
-          <a:xfrm>
-            <a:off x="914400" y="2240280"/>
-            <a:ext cx="3474720" cy="256032"/>
+            <a:endParaRPr lang="en-US" sz="1400" dirty="0"/>
+          </a:p>
+        </p:txBody>
+      </p:sp>
+      <p:sp>
+        <p:nvSpPr>
+          <p:cNvPr id="12" name="Text 10"/>
+          <p:cNvSpPr/>
+          <p:nvPr/>
+        </p:nvSpPr>
+        <p:spPr>
+          <a:xfrm>
+            <a:off x="969264" y="2295144"/>
+            <a:ext cx="3520440" cy="256032"/>
           </a:xfrm>
           <a:prstGeom prst="rect">
             <a:avLst/>
@@ -3882,9 +3821,9 @@
               <a:buNone/>
             </a:pPr>
             <a:r>
-              <a:rPr lang="en-US" sz="1300" b="1" dirty="0">
-                <a:solidFill>
-                  <a:srgbClr val="1E3A5F"/>
+              <a:rPr lang="en-US" sz="1500" b="1" dirty="0">
+                <a:solidFill>
+                  <a:srgbClr val="1A5276"/>
                 </a:solidFill>
                 <a:latin typeface="Trebuchet MS" pitchFamily="34" charset="0"/>
                 <a:ea typeface="Trebuchet MS" pitchFamily="34" charset="-122"/>
@@ -3892,20 +3831,20 @@
               </a:rPr>
               <a:t>Feature Engineering</a:t>
             </a:r>
-            <a:endParaRPr lang="en-US" sz="1300" dirty="0"/>
-          </a:p>
-        </p:txBody>
-      </p:sp>
-      <p:sp>
-        <p:nvSpPr>
-          <p:cNvPr id="12" name="Text 10"/>
-          <p:cNvSpPr/>
-          <p:nvPr/>
-        </p:nvSpPr>
-        <p:spPr>
-          <a:xfrm>
-            <a:off x="914400" y="2487168"/>
-            <a:ext cx="3474720" cy="256032"/>
+            <a:endParaRPr lang="en-US" sz="1500" dirty="0"/>
+          </a:p>
+        </p:txBody>
+      </p:sp>
+      <p:sp>
+        <p:nvSpPr>
+          <p:cNvPr id="13" name="Text 11"/>
+          <p:cNvSpPr/>
+          <p:nvPr/>
+        </p:nvSpPr>
+        <p:spPr>
+          <a:xfrm>
+            <a:off x="969264" y="2551176"/>
+            <a:ext cx="3520440" cy="274320"/>
           </a:xfrm>
           <a:prstGeom prst="rect">
             <a:avLst/>
@@ -3921,30 +3860,30 @@
               <a:buNone/>
             </a:pPr>
             <a:r>
-              <a:rPr lang="en-US" sz="1000" dirty="0">
-                <a:solidFill>
-                  <a:srgbClr val="64748B"/>
+              <a:rPr lang="en-US" sz="1300" dirty="0">
+                <a:solidFill>
+                  <a:srgbClr val="4A6274"/>
                 </a:solidFill>
                 <a:latin typeface="Calibri" pitchFamily="34" charset="0"/>
                 <a:ea typeface="Calibri" pitchFamily="34" charset="-122"/>
                 <a:cs typeface="Calibri" pitchFamily="34" charset="-120"/>
               </a:rPr>
-              <a:t>location_type from place string · median-impute gap (103 nulls)</a:t>
-            </a:r>
-            <a:endParaRPr lang="en-US" sz="1000" dirty="0"/>
-          </a:p>
-        </p:txBody>
-      </p:sp>
-      <p:sp>
-        <p:nvSpPr>
-          <p:cNvPr id="13" name="Shape 11"/>
-          <p:cNvSpPr/>
-          <p:nvPr/>
-        </p:nvSpPr>
-        <p:spPr>
-          <a:xfrm>
-            <a:off x="320040" y="3127248"/>
-            <a:ext cx="475488" cy="475488"/>
+              <a:t>location_type from place text · impute gap (103 nulls with median)</a:t>
+            </a:r>
+            <a:endParaRPr lang="en-US" sz="1300" dirty="0"/>
+          </a:p>
+        </p:txBody>
+      </p:sp>
+      <p:sp>
+        <p:nvSpPr>
+          <p:cNvPr id="14" name="Shape 12"/>
+          <p:cNvSpPr/>
+          <p:nvPr/>
+        </p:nvSpPr>
+        <p:spPr>
+          <a:xfrm>
+            <a:off x="320040" y="3136392"/>
+            <a:ext cx="502920" cy="502920"/>
           </a:xfrm>
           <a:prstGeom prst="ellipse">
             <a:avLst/>
@@ -3962,14 +3901,14 @@
       </p:sp>
       <p:sp>
         <p:nvSpPr>
-          <p:cNvPr id="14" name="Text 12"/>
-          <p:cNvSpPr/>
-          <p:nvPr/>
-        </p:nvSpPr>
-        <p:spPr>
-          <a:xfrm>
-            <a:off x="320040" y="3127248"/>
-            <a:ext cx="475488" cy="475488"/>
+          <p:cNvPr id="15" name="Text 13"/>
+          <p:cNvSpPr/>
+          <p:nvPr/>
+        </p:nvSpPr>
+        <p:spPr>
+          <a:xfrm>
+            <a:off x="320040" y="3136392"/>
+            <a:ext cx="502920" cy="502920"/>
           </a:xfrm>
           <a:prstGeom prst="rect">
             <a:avLst/>
@@ -3985,7 +3924,7 @@
               <a:buNone/>
             </a:pPr>
             <a:r>
-              <a:rPr lang="en-US" sz="1200" b="1" dirty="0">
+              <a:rPr lang="en-US" sz="1400" b="1" dirty="0">
                 <a:solidFill>
                   <a:srgbClr val="FFFFFF"/>
                 </a:solidFill>
@@ -3995,20 +3934,20 @@
               </a:rPr>
               <a:t>03</a:t>
             </a:r>
-            <a:endParaRPr lang="en-US" sz="1200" dirty="0"/>
-          </a:p>
-        </p:txBody>
-      </p:sp>
-      <p:sp>
-        <p:nvSpPr>
-          <p:cNvPr id="15" name="Text 13"/>
-          <p:cNvSpPr/>
-          <p:nvPr/>
-        </p:nvSpPr>
-        <p:spPr>
-          <a:xfrm>
-            <a:off x="914400" y="3127248"/>
-            <a:ext cx="3474720" cy="256032"/>
+            <a:endParaRPr lang="en-US" sz="1400" dirty="0"/>
+          </a:p>
+        </p:txBody>
+      </p:sp>
+      <p:sp>
+        <p:nvSpPr>
+          <p:cNvPr id="16" name="Text 14"/>
+          <p:cNvSpPr/>
+          <p:nvPr/>
+        </p:nvSpPr>
+        <p:spPr>
+          <a:xfrm>
+            <a:off x="969264" y="3154680"/>
+            <a:ext cx="3520440" cy="256032"/>
           </a:xfrm>
           <a:prstGeom prst="rect">
             <a:avLst/>
@@ -4024,9 +3963,9 @@
               <a:buNone/>
             </a:pPr>
             <a:r>
-              <a:rPr lang="en-US" sz="1300" b="1" dirty="0">
-                <a:solidFill>
-                  <a:srgbClr val="1E3A5F"/>
+              <a:rPr lang="en-US" sz="1500" b="1" dirty="0">
+                <a:solidFill>
+                  <a:srgbClr val="1A5276"/>
                 </a:solidFill>
                 <a:latin typeface="Trebuchet MS" pitchFamily="34" charset="0"/>
                 <a:ea typeface="Trebuchet MS" pitchFamily="34" charset="-122"/>
@@ -4034,20 +3973,20 @@
               </a:rPr>
               <a:t>Hazard Labeling</a:t>
             </a:r>
-            <a:endParaRPr lang="en-US" sz="1300" dirty="0"/>
-          </a:p>
-        </p:txBody>
-      </p:sp>
-      <p:sp>
-        <p:nvSpPr>
-          <p:cNvPr id="16" name="Text 14"/>
-          <p:cNvSpPr/>
-          <p:nvPr/>
-        </p:nvSpPr>
-        <p:spPr>
-          <a:xfrm>
-            <a:off x="914400" y="3374136"/>
-            <a:ext cx="3474720" cy="256032"/>
+            <a:endParaRPr lang="en-US" sz="1500" dirty="0"/>
+          </a:p>
+        </p:txBody>
+      </p:sp>
+      <p:sp>
+        <p:nvSpPr>
+          <p:cNvPr id="17" name="Text 15"/>
+          <p:cNvSpPr/>
+          <p:nvPr/>
+        </p:nvSpPr>
+        <p:spPr>
+          <a:xfrm>
+            <a:off x="969264" y="3410712"/>
+            <a:ext cx="3520440" cy="274320"/>
           </a:xfrm>
           <a:prstGeom prst="rect">
             <a:avLst/>
@@ -4063,30 +4002,30 @@
               <a:buNone/>
             </a:pPr>
             <a:r>
-              <a:rPr lang="en-US" sz="1000" dirty="0">
-                <a:solidFill>
-                  <a:srgbClr val="64748B"/>
+              <a:rPr lang="en-US" sz="1300" dirty="0">
+                <a:solidFill>
+                  <a:srgbClr val="4A6274"/>
                 </a:solidFill>
                 <a:latin typeface="Calibri" pitchFamily="34" charset="0"/>
                 <a:ea typeface="Calibri" pitchFamily="34" charset="-122"/>
                 <a:cs typeface="Calibri" pitchFamily="34" charset="-120"/>
               </a:rPr>
-              <a:t>Low &lt;4.0 · Moderate 4–6 · High ≥6 (rule-based)</a:t>
-            </a:r>
-            <a:endParaRPr lang="en-US" sz="1000" dirty="0"/>
-          </a:p>
-        </p:txBody>
-      </p:sp>
-      <p:sp>
-        <p:nvSpPr>
-          <p:cNvPr id="17" name="Shape 15"/>
-          <p:cNvSpPr/>
-          <p:nvPr/>
-        </p:nvSpPr>
-        <p:spPr>
-          <a:xfrm>
-            <a:off x="320040" y="4014216"/>
-            <a:ext cx="475488" cy="475488"/>
+              <a:t>Rule-based: Low &lt;4.0 · Moderate 4–6 · High ≥6.0</a:t>
+            </a:r>
+            <a:endParaRPr lang="en-US" sz="1300" dirty="0"/>
+          </a:p>
+        </p:txBody>
+      </p:sp>
+      <p:sp>
+        <p:nvSpPr>
+          <p:cNvPr id="18" name="Shape 16"/>
+          <p:cNvSpPr/>
+          <p:nvPr/>
+        </p:nvSpPr>
+        <p:spPr>
+          <a:xfrm>
+            <a:off x="320040" y="3995928"/>
+            <a:ext cx="502920" cy="502920"/>
           </a:xfrm>
           <a:prstGeom prst="ellipse">
             <a:avLst/>
@@ -4104,14 +4043,14 @@
       </p:sp>
       <p:sp>
         <p:nvSpPr>
-          <p:cNvPr id="18" name="Text 16"/>
-          <p:cNvSpPr/>
-          <p:nvPr/>
-        </p:nvSpPr>
-        <p:spPr>
-          <a:xfrm>
-            <a:off x="320040" y="4014216"/>
-            <a:ext cx="475488" cy="475488"/>
+          <p:cNvPr id="19" name="Text 17"/>
+          <p:cNvSpPr/>
+          <p:nvPr/>
+        </p:nvSpPr>
+        <p:spPr>
+          <a:xfrm>
+            <a:off x="320040" y="3995928"/>
+            <a:ext cx="502920" cy="502920"/>
           </a:xfrm>
           <a:prstGeom prst="rect">
             <a:avLst/>
@@ -4127,7 +4066,7 @@
               <a:buNone/>
             </a:pPr>
             <a:r>
-              <a:rPr lang="en-US" sz="1200" b="1" dirty="0">
+              <a:rPr lang="en-US" sz="1400" b="1" dirty="0">
                 <a:solidFill>
                   <a:srgbClr val="FFFFFF"/>
                 </a:solidFill>
@@ -4137,20 +4076,20 @@
               </a:rPr>
               <a:t>04</a:t>
             </a:r>
-            <a:endParaRPr lang="en-US" sz="1200" dirty="0"/>
-          </a:p>
-        </p:txBody>
-      </p:sp>
-      <p:sp>
-        <p:nvSpPr>
-          <p:cNvPr id="19" name="Text 17"/>
-          <p:cNvSpPr/>
-          <p:nvPr/>
-        </p:nvSpPr>
-        <p:spPr>
-          <a:xfrm>
-            <a:off x="914400" y="4014216"/>
-            <a:ext cx="3474720" cy="256032"/>
+            <a:endParaRPr lang="en-US" sz="1400" dirty="0"/>
+          </a:p>
+        </p:txBody>
+      </p:sp>
+      <p:sp>
+        <p:nvSpPr>
+          <p:cNvPr id="20" name="Text 18"/>
+          <p:cNvSpPr/>
+          <p:nvPr/>
+        </p:nvSpPr>
+        <p:spPr>
+          <a:xfrm>
+            <a:off x="969264" y="4014216"/>
+            <a:ext cx="3520440" cy="256032"/>
           </a:xfrm>
           <a:prstGeom prst="rect">
             <a:avLst/>
@@ -4166,30 +4105,30 @@
               <a:buNone/>
             </a:pPr>
             <a:r>
-              <a:rPr lang="en-US" sz="1300" b="1" dirty="0">
-                <a:solidFill>
-                  <a:srgbClr val="1E3A5F"/>
+              <a:rPr lang="en-US" sz="1500" b="1" dirty="0">
+                <a:solidFill>
+                  <a:srgbClr val="1A5276"/>
                 </a:solidFill>
                 <a:latin typeface="Trebuchet MS" pitchFamily="34" charset="0"/>
                 <a:ea typeface="Trebuchet MS" pitchFamily="34" charset="-122"/>
                 <a:cs typeface="Trebuchet MS" pitchFamily="34" charset="-120"/>
               </a:rPr>
-              <a:t>Train/Test Split</a:t>
-            </a:r>
-            <a:endParaRPr lang="en-US" sz="1300" dirty="0"/>
-          </a:p>
-        </p:txBody>
-      </p:sp>
-      <p:sp>
-        <p:nvSpPr>
-          <p:cNvPr id="20" name="Text 18"/>
-          <p:cNvSpPr/>
-          <p:nvPr/>
-        </p:nvSpPr>
-        <p:spPr>
-          <a:xfrm>
-            <a:off x="914400" y="4261104"/>
-            <a:ext cx="3474720" cy="256032"/>
+              <a:t>Stratified CV Split</a:t>
+            </a:r>
+            <a:endParaRPr lang="en-US" sz="1500" dirty="0"/>
+          </a:p>
+        </p:txBody>
+      </p:sp>
+      <p:sp>
+        <p:nvSpPr>
+          <p:cNvPr id="21" name="Text 19"/>
+          <p:cNvSpPr/>
+          <p:nvPr/>
+        </p:nvSpPr>
+        <p:spPr>
+          <a:xfrm>
+            <a:off x="969264" y="4270248"/>
+            <a:ext cx="3520440" cy="274320"/>
           </a:xfrm>
           <a:prstGeom prst="rect">
             <a:avLst/>
@@ -4205,30 +4144,30 @@
               <a:buNone/>
             </a:pPr>
             <a:r>
-              <a:rPr lang="en-US" sz="1000" dirty="0">
-                <a:solidFill>
-                  <a:srgbClr val="64748B"/>
+              <a:rPr lang="en-US" sz="1300" dirty="0">
+                <a:solidFill>
+                  <a:srgbClr val="4A6274"/>
                 </a:solidFill>
                 <a:latin typeface="Calibri" pitchFamily="34" charset="0"/>
                 <a:ea typeface="Calibri" pitchFamily="34" charset="-122"/>
                 <a:cs typeface="Calibri" pitchFamily="34" charset="-120"/>
               </a:rPr>
-              <a:t>Stratified 80/20 · 5-fold cross-validation</a:t>
-            </a:r>
-            <a:endParaRPr lang="en-US" sz="1000" dirty="0"/>
-          </a:p>
-        </p:txBody>
-      </p:sp>
-      <p:sp>
-        <p:nvSpPr>
-          <p:cNvPr id="21" name="Text 19"/>
+              <a:t>5-fold cross-validation, stratified by hazard class</a:t>
+            </a:r>
+            <a:endParaRPr lang="en-US" sz="1300" dirty="0"/>
+          </a:p>
+        </p:txBody>
+      </p:sp>
+      <p:sp>
+        <p:nvSpPr>
+          <p:cNvPr id="22" name="Text 20"/>
           <p:cNvSpPr/>
           <p:nvPr/>
         </p:nvSpPr>
         <p:spPr>
           <a:xfrm>
             <a:off x="5029200" y="914400"/>
-            <a:ext cx="3749040" cy="347472"/>
+            <a:ext cx="3749040" cy="411480"/>
           </a:xfrm>
           <a:prstGeom prst="rect">
             <a:avLst/>
@@ -4244,9 +4183,9 @@
               <a:buNone/>
             </a:pPr>
             <a:r>
-              <a:rPr lang="en-US" sz="1800" b="1" dirty="0">
-                <a:solidFill>
-                  <a:srgbClr val="1E3A5F"/>
+              <a:rPr lang="en-US" sz="2000" b="1" dirty="0">
+                <a:solidFill>
+                  <a:srgbClr val="1A5276"/>
                 </a:solidFill>
                 <a:latin typeface="Trebuchet MS" pitchFamily="34" charset="0"/>
                 <a:ea typeface="Trebuchet MS" pitchFamily="34" charset="-122"/>
@@ -4254,19 +4193,19 @@
               </a:rPr>
               <a:t>Class Distribution</a:t>
             </a:r>
-            <a:endParaRPr lang="en-US" sz="1800" dirty="0"/>
+            <a:endParaRPr lang="en-US" sz="2000" dirty="0"/>
           </a:p>
         </p:txBody>
       </p:sp>
       <p:graphicFrame>
         <p:nvGraphicFramePr>
-          <p:cNvPr id="22" name="Chart 0" descr=""/>
+          <p:cNvPr id="23" name="Chart 0" descr=""/>
           <p:cNvGraphicFramePr/>
           <p:nvPr/>
         </p:nvGraphicFramePr>
         <p:xfrm>
-          <a:off x="4754880" y="1325880"/>
-          <a:ext cx="4114800" cy="2926080"/>
+          <a:off x="4663440" y="1353312"/>
+          <a:ext cx="4206240" cy="2834640"/>
         </p:xfrm>
         <a:graphic xmlns:a="http://schemas.openxmlformats.org/drawingml/2006/main">
           <a:graphicData uri="http://schemas.openxmlformats.org/drawingml/2006/chart">
@@ -4276,14 +4215,14 @@
       </p:graphicFrame>
       <p:sp>
         <p:nvSpPr>
-          <p:cNvPr id="23" name="Shape 20"/>
-          <p:cNvSpPr/>
-          <p:nvPr/>
-        </p:nvSpPr>
-        <p:spPr>
-          <a:xfrm>
-            <a:off x="4754880" y="4389120"/>
-            <a:ext cx="4114800" cy="502920"/>
+          <p:cNvPr id="24" name="Shape 21"/>
+          <p:cNvSpPr/>
+          <p:nvPr/>
+        </p:nvSpPr>
+        <p:spPr>
+          <a:xfrm>
+            <a:off x="4663440" y="4315968"/>
+            <a:ext cx="4206240" cy="512064"/>
           </a:xfrm>
           <a:prstGeom prst="rect">
             <a:avLst/>
@@ -4293,7 +4232,7 @@
           </a:solidFill>
           <a:ln w="12700">
             <a:solidFill>
-              <a:srgbClr val="F39C12"/>
+              <a:srgbClr val="D4800A"/>
             </a:solidFill>
             <a:prstDash val="solid"/>
           </a:ln>
@@ -4301,14 +4240,14 @@
       </p:sp>
       <p:sp>
         <p:nvSpPr>
-          <p:cNvPr id="24" name="Text 21"/>
-          <p:cNvSpPr/>
-          <p:nvPr/>
-        </p:nvSpPr>
-        <p:spPr>
-          <a:xfrm>
-            <a:off x="4846320" y="4416552"/>
-            <a:ext cx="3931920" cy="438912"/>
+          <p:cNvPr id="25" name="Text 22"/>
+          <p:cNvSpPr/>
+          <p:nvPr/>
+        </p:nvSpPr>
+        <p:spPr>
+          <a:xfrm>
+            <a:off x="4754880" y="4343400"/>
+            <a:ext cx="4023360" cy="457200"/>
           </a:xfrm>
           <a:prstGeom prst="rect">
             <a:avLst/>
@@ -4324,7 +4263,7 @@
               <a:buNone/>
             </a:pPr>
             <a:r>
-              <a:rPr lang="en-US" sz="950" dirty="0">
+              <a:rPr lang="en-US" sz="1200" dirty="0">
                 <a:solidFill>
                   <a:srgbClr val="7D6608"/>
                 </a:solidFill>
@@ -4332,9 +4271,9 @@
                 <a:ea typeface="Calibri" pitchFamily="34" charset="-122"/>
                 <a:cs typeface="Calibri" pitchFamily="34" charset="-120"/>
               </a:rPr>
-              <a:t>⚠️  High class has only 7 records (M≥6.0 events are rare). Addressed with class_weight balancing in training.</a:t>
-            </a:r>
-            <a:endParaRPr lang="en-US" sz="950" dirty="0"/>
+              <a:t>⚠️  High class: only 7 records (M≥6.0 events are rare). Handled with balanced sample weights in training.</a:t>
+            </a:r>
+            <a:endParaRPr lang="en-US" sz="1200" dirty="0"/>
           </a:p>
         </p:txBody>
       </p:sp>
@@ -4379,17 +4318,17 @@
         <p:spPr>
           <a:xfrm>
             <a:off x="0" y="0"/>
-            <a:ext cx="9144000" cy="713232"/>
-          </a:xfrm>
-          <a:prstGeom prst="rect">
-            <a:avLst/>
-          </a:prstGeom>
-          <a:solidFill>
-            <a:srgbClr val="1E3A5F"/>
+            <a:ext cx="9144000" cy="777240"/>
+          </a:xfrm>
+          <a:prstGeom prst="rect">
+            <a:avLst/>
+          </a:prstGeom>
+          <a:solidFill>
+            <a:srgbClr val="1A5276"/>
           </a:solidFill>
           <a:ln w="12700">
             <a:solidFill>
-              <a:srgbClr val="1E3A5F"/>
+              <a:srgbClr val="1A5276"/>
             </a:solidFill>
             <a:prstDash val="solid"/>
           </a:ln>
@@ -4397,14 +4336,39 @@
       </p:sp>
       <p:sp>
         <p:nvSpPr>
-          <p:cNvPr id="3" name="Text 1"/>
-          <p:cNvSpPr/>
-          <p:nvPr/>
-        </p:nvSpPr>
-        <p:spPr>
-          <a:xfrm>
-            <a:off x="365760" y="0"/>
-            <a:ext cx="8412480" cy="713232"/>
+          <p:cNvPr id="3" name="Shape 1"/>
+          <p:cNvSpPr/>
+          <p:nvPr/>
+        </p:nvSpPr>
+        <p:spPr>
+          <a:xfrm>
+            <a:off x="0" y="0"/>
+            <a:ext cx="164592" cy="777240"/>
+          </a:xfrm>
+          <a:prstGeom prst="rect">
+            <a:avLst/>
+          </a:prstGeom>
+          <a:solidFill>
+            <a:srgbClr val="0D9488"/>
+          </a:solidFill>
+          <a:ln w="12700">
+            <a:solidFill>
+              <a:srgbClr val="0D9488"/>
+            </a:solidFill>
+            <a:prstDash val="solid"/>
+          </a:ln>
+        </p:spPr>
+      </p:sp>
+      <p:sp>
+        <p:nvSpPr>
+          <p:cNvPr id="4" name="Text 2"/>
+          <p:cNvSpPr/>
+          <p:nvPr/>
+        </p:nvSpPr>
+        <p:spPr>
+          <a:xfrm>
+            <a:off x="320040" y="0"/>
+            <a:ext cx="8595360" cy="777240"/>
           </a:xfrm>
           <a:prstGeom prst="rect">
             <a:avLst/>
@@ -4420,7 +4384,7 @@
               <a:buNone/>
             </a:pPr>
             <a:r>
-              <a:rPr lang="en-US" sz="2600" b="1" dirty="0">
+              <a:rPr lang="en-US" sz="3000" b="1" dirty="0">
                 <a:solidFill>
                   <a:srgbClr val="FFFFFF"/>
                 </a:solidFill>
@@ -4430,19 +4394,19 @@
               </a:rPr>
               <a:t>Model Development &amp; Evaluation</a:t>
             </a:r>
-            <a:endParaRPr lang="en-US" sz="2600" dirty="0"/>
+            <a:endParaRPr lang="en-US" sz="3000" dirty="0"/>
           </a:p>
         </p:txBody>
       </p:sp>
       <p:graphicFrame>
         <p:nvGraphicFramePr>
-          <p:cNvPr id="4" name="Chart 0" descr=""/>
+          <p:cNvPr id="5" name="Chart 0" descr=""/>
           <p:cNvGraphicFramePr/>
           <p:nvPr/>
         </p:nvGraphicFramePr>
         <p:xfrm>
-          <a:off x="320040" y="822960"/>
-          <a:ext cx="5303520" cy="3474720"/>
+          <a:off x="274320" y="868680"/>
+          <a:ext cx="5394960" cy="3520440"/>
         </p:xfrm>
         <a:graphic xmlns:a="http://schemas.openxmlformats.org/drawingml/2006/main">
           <a:graphicData uri="http://schemas.openxmlformats.org/drawingml/2006/chart">
@@ -4452,29 +4416,29 @@
       </p:graphicFrame>
       <p:sp>
         <p:nvSpPr>
-          <p:cNvPr id="5" name="Shape 2"/>
-          <p:cNvSpPr/>
-          <p:nvPr/>
-        </p:nvSpPr>
-        <p:spPr>
-          <a:xfrm>
-            <a:off x="5852160" y="822960"/>
-            <a:ext cx="2971800" cy="1645920"/>
-          </a:xfrm>
-          <a:prstGeom prst="rect">
-            <a:avLst/>
-          </a:prstGeom>
-          <a:solidFill>
-            <a:srgbClr val="E8F4FD"/>
+          <p:cNvPr id="6" name="Shape 3"/>
+          <p:cNvSpPr/>
+          <p:nvPr/>
+        </p:nvSpPr>
+        <p:spPr>
+          <a:xfrm>
+            <a:off x="5897880" y="868680"/>
+            <a:ext cx="2926080" cy="1737360"/>
+          </a:xfrm>
+          <a:prstGeom prst="rect">
+            <a:avLst/>
+          </a:prstGeom>
+          <a:solidFill>
+            <a:srgbClr val="EAF4FB"/>
           </a:solidFill>
           <a:ln w="12700">
             <a:solidFill>
-              <a:srgbClr val="C5DFF0"/>
+              <a:srgbClr val="B2D8F0"/>
             </a:solidFill>
             <a:prstDash val="solid"/>
           </a:ln>
           <a:effectLst>
-            <a:outerShdw sx="100000" sy="100000" kx="0" ky="0" algn="bl" rotWithShape="0" blurRad="101600" dist="25400" dir="8100000">
+            <a:outerShdw sx="100000" sy="100000" kx="0" ky="0" algn="bl" rotWithShape="0" blurRad="127000" dist="38100" dir="8100000">
               <a:srgbClr val="000000">
                 <a:alpha val="10000"/>
               </a:srgbClr>
@@ -4484,14 +4448,14 @@
       </p:sp>
       <p:sp>
         <p:nvSpPr>
-          <p:cNvPr id="6" name="Text 3"/>
-          <p:cNvSpPr/>
-          <p:nvPr/>
-        </p:nvSpPr>
-        <p:spPr>
-          <a:xfrm>
-            <a:off x="5943600" y="868680"/>
-            <a:ext cx="2743200" cy="347472"/>
+          <p:cNvPr id="7" name="Text 4"/>
+          <p:cNvSpPr/>
+          <p:nvPr/>
+        </p:nvSpPr>
+        <p:spPr>
+          <a:xfrm>
+            <a:off x="5989320" y="914400"/>
+            <a:ext cx="2743200" cy="384048"/>
           </a:xfrm>
           <a:prstGeom prst="rect">
             <a:avLst/>
@@ -4507,9 +4471,9 @@
               <a:buNone/>
             </a:pPr>
             <a:r>
-              <a:rPr lang="en-US" sz="1400" b="1" dirty="0">
-                <a:solidFill>
-                  <a:srgbClr val="1E3A5F"/>
+              <a:rPr lang="en-US" sz="1600" b="1" dirty="0">
+                <a:solidFill>
+                  <a:srgbClr val="1A5276"/>
                 </a:solidFill>
                 <a:latin typeface="Trebuchet MS" pitchFamily="34" charset="0"/>
                 <a:ea typeface="Trebuchet MS" pitchFamily="34" charset="-122"/>
@@ -4517,20 +4481,20 @@
               </a:rPr>
               <a:t>🏆  Best Model</a:t>
             </a:r>
-            <a:endParaRPr lang="en-US" sz="1400" dirty="0"/>
-          </a:p>
-        </p:txBody>
-      </p:sp>
-      <p:sp>
-        <p:nvSpPr>
-          <p:cNvPr id="7" name="Text 4"/>
-          <p:cNvSpPr/>
-          <p:nvPr/>
-        </p:nvSpPr>
-        <p:spPr>
-          <a:xfrm>
-            <a:off x="5943600" y="1207008"/>
-            <a:ext cx="2743200" cy="475488"/>
+            <a:endParaRPr lang="en-US" sz="1600" dirty="0"/>
+          </a:p>
+        </p:txBody>
+      </p:sp>
+      <p:sp>
+        <p:nvSpPr>
+          <p:cNvPr id="8" name="Text 5"/>
+          <p:cNvSpPr/>
+          <p:nvPr/>
+        </p:nvSpPr>
+        <p:spPr>
+          <a:xfrm>
+            <a:off x="5989320" y="1280160"/>
+            <a:ext cx="2743200" cy="530352"/>
           </a:xfrm>
           <a:prstGeom prst="rect">
             <a:avLst/>
@@ -4546,7 +4510,7 @@
               <a:buNone/>
             </a:pPr>
             <a:r>
-              <a:rPr lang="en-US" sz="3000" b="1" dirty="0">
+              <a:rPr lang="en-US" sz="3400" b="1" dirty="0">
                 <a:solidFill>
                   <a:srgbClr val="0D9488"/>
                 </a:solidFill>
@@ -4556,20 +4520,20 @@
               </a:rPr>
               <a:t>XGBoost</a:t>
             </a:r>
-            <a:endParaRPr lang="en-US" sz="3000" dirty="0"/>
-          </a:p>
-        </p:txBody>
-      </p:sp>
-      <p:sp>
-        <p:nvSpPr>
-          <p:cNvPr id="8" name="Text 5"/>
-          <p:cNvSpPr/>
-          <p:nvPr/>
-        </p:nvSpPr>
-        <p:spPr>
-          <a:xfrm>
-            <a:off x="5943600" y="1664208"/>
-            <a:ext cx="2743200" cy="256032"/>
+            <a:endParaRPr lang="en-US" sz="3400" dirty="0"/>
+          </a:p>
+        </p:txBody>
+      </p:sp>
+      <p:sp>
+        <p:nvSpPr>
+          <p:cNvPr id="9" name="Text 6"/>
+          <p:cNvSpPr/>
+          <p:nvPr/>
+        </p:nvSpPr>
+        <p:spPr>
+          <a:xfrm>
+            <a:off x="5989320" y="1792224"/>
+            <a:ext cx="2743200" cy="310896"/>
           </a:xfrm>
           <a:prstGeom prst="rect">
             <a:avLst/>
@@ -4585,9 +4549,9 @@
               <a:buNone/>
             </a:pPr>
             <a:r>
-              <a:rPr lang="en-US" sz="1000" dirty="0">
-                <a:solidFill>
-                  <a:srgbClr val="64748B"/>
+              <a:rPr lang="en-US" sz="1200" dirty="0">
+                <a:solidFill>
+                  <a:srgbClr val="4A6274"/>
                 </a:solidFill>
                 <a:latin typeface="Calibri" pitchFamily="34" charset="0"/>
                 <a:ea typeface="Calibri" pitchFamily="34" charset="-122"/>
@@ -4595,20 +4559,20 @@
               </a:rPr>
               <a:t>Accuracy 99.95%  ·  Macro F1 1.00</a:t>
             </a:r>
-            <a:endParaRPr lang="en-US" sz="1000" dirty="0"/>
-          </a:p>
-        </p:txBody>
-      </p:sp>
-      <p:sp>
-        <p:nvSpPr>
-          <p:cNvPr id="9" name="Text 6"/>
-          <p:cNvSpPr/>
-          <p:nvPr/>
-        </p:nvSpPr>
-        <p:spPr>
-          <a:xfrm>
-            <a:off x="5943600" y="1920240"/>
-            <a:ext cx="2743200" cy="384048"/>
+            <a:endParaRPr lang="en-US" sz="1200" dirty="0"/>
+          </a:p>
+        </p:txBody>
+      </p:sp>
+      <p:sp>
+        <p:nvSpPr>
+          <p:cNvPr id="10" name="Text 7"/>
+          <p:cNvSpPr/>
+          <p:nvPr/>
+        </p:nvSpPr>
+        <p:spPr>
+          <a:xfrm>
+            <a:off x="5989320" y="2084832"/>
+            <a:ext cx="2743200" cy="402336"/>
           </a:xfrm>
           <a:prstGeom prst="rect">
             <a:avLst/>
@@ -4624,47 +4588,133 @@
               <a:buNone/>
             </a:pPr>
             <a:r>
-              <a:rPr lang="en-US" sz="950" i="1" dirty="0">
-                <a:solidFill>
-                  <a:srgbClr val="64748B"/>
+              <a:rPr lang="en-US" sz="1100" i="1" dirty="0">
+                <a:solidFill>
+                  <a:srgbClr val="4A6274"/>
                 </a:solidFill>
                 <a:latin typeface="Calibri" pitchFamily="34" charset="0"/>
                 <a:ea typeface="Calibri" pitchFamily="34" charset="-122"/>
                 <a:cs typeface="Calibri" pitchFamily="34" charset="-120"/>
               </a:rPr>
-              <a:t>300 trees · depth 6 · LR 0.05</a:t>
-            </a:r>
-            <a:endParaRPr lang="en-US" sz="950" dirty="0"/>
-          </a:p>
-          <a:p>
-            <a:pPr algn="ctr" indent="0" marL="0">
-              <a:buNone/>
-            </a:pPr>
-            <a:r>
-              <a:rPr lang="en-US" sz="950" i="1" dirty="0">
-                <a:solidFill>
-                  <a:srgbClr val="64748B"/>
+              <a:t>300 trees · depth 6 · lr 0.05 · sample_weight balanced</a:t>
+            </a:r>
+            <a:endParaRPr lang="en-US" sz="1100" dirty="0"/>
+          </a:p>
+        </p:txBody>
+      </p:sp>
+      <p:sp>
+        <p:nvSpPr>
+          <p:cNvPr id="11" name="Text 8"/>
+          <p:cNvSpPr/>
+          <p:nvPr/>
+        </p:nvSpPr>
+        <p:spPr>
+          <a:xfrm>
+            <a:off x="5897880" y="2788920"/>
+            <a:ext cx="2926080" cy="365760"/>
+          </a:xfrm>
+          <a:prstGeom prst="rect">
+            <a:avLst/>
+          </a:prstGeom>
+          <a:noFill/>
+          <a:ln/>
+        </p:spPr>
+        <p:txBody>
+          <a:bodyPr wrap="square" rtlCol="0" anchor="ctr"/>
+          <a:lstStyle/>
+          <a:p>
+            <a:pPr indent="0" marL="0">
+              <a:buNone/>
+            </a:pPr>
+            <a:r>
+              <a:rPr lang="en-US" sz="1600" b="1" dirty="0">
+                <a:solidFill>
+                  <a:srgbClr val="1A5276"/>
+                </a:solidFill>
+                <a:latin typeface="Trebuchet MS" pitchFamily="34" charset="0"/>
+                <a:ea typeface="Trebuchet MS" pitchFamily="34" charset="-122"/>
+                <a:cs typeface="Trebuchet MS" pitchFamily="34" charset="-120"/>
+              </a:rPr>
+              <a:t>Feature Importance</a:t>
+            </a:r>
+            <a:endParaRPr lang="en-US" sz="1600" dirty="0"/>
+          </a:p>
+        </p:txBody>
+      </p:sp>
+      <p:sp>
+        <p:nvSpPr>
+          <p:cNvPr id="12" name="Text 9"/>
+          <p:cNvSpPr/>
+          <p:nvPr/>
+        </p:nvSpPr>
+        <p:spPr>
+          <a:xfrm>
+            <a:off x="5897880" y="3218688"/>
+            <a:ext cx="1234440" cy="274320"/>
+          </a:xfrm>
+          <a:prstGeom prst="rect">
+            <a:avLst/>
+          </a:prstGeom>
+          <a:noFill/>
+          <a:ln/>
+        </p:spPr>
+        <p:txBody>
+          <a:bodyPr wrap="square" rtlCol="0" anchor="ctr"/>
+          <a:lstStyle/>
+          <a:p>
+            <a:pPr algn="r" indent="0" marL="0">
+              <a:buNone/>
+            </a:pPr>
+            <a:r>
+              <a:rPr lang="en-US" sz="1200" dirty="0">
+                <a:solidFill>
+                  <a:srgbClr val="1A1A2A"/>
                 </a:solidFill>
                 <a:latin typeface="Calibri" pitchFamily="34" charset="0"/>
                 <a:ea typeface="Calibri" pitchFamily="34" charset="-122"/>
                 <a:cs typeface="Calibri" pitchFamily="34" charset="-120"/>
               </a:rPr>
-              <a:t>sample_weight balanced</a:t>
-            </a:r>
-            <a:endParaRPr lang="en-US" sz="950" dirty="0"/>
-          </a:p>
-        </p:txBody>
-      </p:sp>
-      <p:sp>
-        <p:nvSpPr>
-          <p:cNvPr id="10" name="Text 7"/>
-          <p:cNvSpPr/>
-          <p:nvPr/>
-        </p:nvSpPr>
-        <p:spPr>
-          <a:xfrm>
-            <a:off x="5852160" y="2724912"/>
-            <a:ext cx="2971800" cy="320040"/>
+              <a:t>magnitude</a:t>
+            </a:r>
+            <a:endParaRPr lang="en-US" sz="1200" dirty="0"/>
+          </a:p>
+        </p:txBody>
+      </p:sp>
+      <p:sp>
+        <p:nvSpPr>
+          <p:cNvPr id="13" name="Shape 10"/>
+          <p:cNvSpPr/>
+          <p:nvPr/>
+        </p:nvSpPr>
+        <p:spPr>
+          <a:xfrm>
+            <a:off x="7205472" y="3273552"/>
+            <a:ext cx="1139708" cy="182880"/>
+          </a:xfrm>
+          <a:prstGeom prst="rect">
+            <a:avLst/>
+          </a:prstGeom>
+          <a:solidFill>
+            <a:srgbClr val="0D9488"/>
+          </a:solidFill>
+          <a:ln w="12700">
+            <a:solidFill>
+              <a:srgbClr val="0D9488"/>
+            </a:solidFill>
+            <a:prstDash val="solid"/>
+          </a:ln>
+        </p:spPr>
+      </p:sp>
+      <p:sp>
+        <p:nvSpPr>
+          <p:cNvPr id="14" name="Text 11"/>
+          <p:cNvSpPr/>
+          <p:nvPr/>
+        </p:nvSpPr>
+        <p:spPr>
+          <a:xfrm>
+            <a:off x="8400044" y="3218688"/>
+            <a:ext cx="365760" cy="274320"/>
           </a:xfrm>
           <a:prstGeom prst="rect">
             <a:avLst/>
@@ -4680,94 +4730,30 @@
               <a:buNone/>
             </a:pPr>
             <a:r>
-              <a:rPr lang="en-US" sz="1200" b="1" dirty="0">
-                <a:solidFill>
-                  <a:srgbClr val="1E3A5F"/>
-                </a:solidFill>
-                <a:latin typeface="Trebuchet MS" pitchFamily="34" charset="0"/>
-                <a:ea typeface="Trebuchet MS" pitchFamily="34" charset="-122"/>
-                <a:cs typeface="Trebuchet MS" pitchFamily="34" charset="-120"/>
-              </a:rPr>
-              <a:t>Feature Importance (XGBoost)</a:t>
-            </a:r>
-            <a:endParaRPr lang="en-US" sz="1200" dirty="0"/>
-          </a:p>
-        </p:txBody>
-      </p:sp>
-      <p:sp>
-        <p:nvSpPr>
-          <p:cNvPr id="11" name="Text 8"/>
-          <p:cNvSpPr/>
-          <p:nvPr/>
-        </p:nvSpPr>
-        <p:spPr>
-          <a:xfrm>
-            <a:off x="5852160" y="3090672"/>
-            <a:ext cx="1188720" cy="274320"/>
-          </a:xfrm>
-          <a:prstGeom prst="rect">
-            <a:avLst/>
-          </a:prstGeom>
-          <a:noFill/>
-          <a:ln/>
-        </p:spPr>
-        <p:txBody>
-          <a:bodyPr wrap="square" rtlCol="0" anchor="ctr"/>
-          <a:lstStyle/>
-          <a:p>
-            <a:pPr algn="r" indent="0" marL="0">
-              <a:buNone/>
-            </a:pPr>
-            <a:r>
-              <a:rPr lang="en-US" sz="900" dirty="0">
-                <a:solidFill>
-                  <a:srgbClr val="1A1A2A"/>
+              <a:rPr lang="en-US" sz="1100" dirty="0">
+                <a:solidFill>
+                  <a:srgbClr val="4A6274"/>
                 </a:solidFill>
                 <a:latin typeface="Calibri" pitchFamily="34" charset="0"/>
                 <a:ea typeface="Calibri" pitchFamily="34" charset="-122"/>
                 <a:cs typeface="Calibri" pitchFamily="34" charset="-120"/>
               </a:rPr>
-              <a:t>magnitude</a:t>
-            </a:r>
-            <a:endParaRPr lang="en-US" sz="900" dirty="0"/>
-          </a:p>
-        </p:txBody>
-      </p:sp>
-      <p:sp>
-        <p:nvSpPr>
-          <p:cNvPr id="12" name="Shape 9"/>
-          <p:cNvSpPr/>
-          <p:nvPr/>
-        </p:nvSpPr>
-        <p:spPr>
-          <a:xfrm>
-            <a:off x="7114032" y="3136392"/>
-            <a:ext cx="1274674" cy="182880"/>
-          </a:xfrm>
-          <a:prstGeom prst="rect">
-            <a:avLst/>
-          </a:prstGeom>
-          <a:solidFill>
-            <a:srgbClr val="0D9488"/>
-          </a:solidFill>
-          <a:ln w="12700">
-            <a:solidFill>
-              <a:srgbClr val="0D9488"/>
-            </a:solidFill>
-            <a:prstDash val="solid"/>
-          </a:ln>
-        </p:spPr>
-      </p:sp>
-      <p:sp>
-        <p:nvSpPr>
-          <p:cNvPr id="13" name="Text 10"/>
-          <p:cNvSpPr/>
-          <p:nvPr/>
-        </p:nvSpPr>
-        <p:spPr>
-          <a:xfrm>
-            <a:off x="8434426" y="3090672"/>
-            <a:ext cx="411480" cy="274320"/>
+              <a:t>82%</a:t>
+            </a:r>
+            <a:endParaRPr lang="en-US" sz="1100" dirty="0"/>
+          </a:p>
+        </p:txBody>
+      </p:sp>
+      <p:sp>
+        <p:nvSpPr>
+          <p:cNvPr id="15" name="Text 12"/>
+          <p:cNvSpPr/>
+          <p:nvPr/>
+        </p:nvSpPr>
+        <p:spPr>
+          <a:xfrm>
+            <a:off x="5897880" y="3566160"/>
+            <a:ext cx="1234440" cy="274320"/>
           </a:xfrm>
           <a:prstGeom prst="rect">
             <a:avLst/>
@@ -4779,47 +4765,11 @@
           <a:bodyPr wrap="square" rtlCol="0" anchor="ctr"/>
           <a:lstStyle/>
           <a:p>
-            <a:pPr indent="0" marL="0">
-              <a:buNone/>
-            </a:pPr>
-            <a:r>
-              <a:rPr lang="en-US" sz="900" dirty="0">
-                <a:solidFill>
-                  <a:srgbClr val="64748B"/>
-                </a:solidFill>
-              </a:rPr>
-              <a:t>82%</a:t>
-            </a:r>
-            <a:endParaRPr lang="en-US" sz="900" dirty="0"/>
-          </a:p>
-        </p:txBody>
-      </p:sp>
-      <p:sp>
-        <p:nvSpPr>
-          <p:cNvPr id="14" name="Text 11"/>
-          <p:cNvSpPr/>
-          <p:nvPr/>
-        </p:nvSpPr>
-        <p:spPr>
-          <a:xfrm>
-            <a:off x="5852160" y="3438144"/>
-            <a:ext cx="1188720" cy="274320"/>
-          </a:xfrm>
-          <a:prstGeom prst="rect">
-            <a:avLst/>
-          </a:prstGeom>
-          <a:noFill/>
-          <a:ln/>
-        </p:spPr>
-        <p:txBody>
-          <a:bodyPr wrap="square" rtlCol="0" anchor="ctr"/>
-          <a:lstStyle/>
-          <a:p>
             <a:pPr algn="r" indent="0" marL="0">
               <a:buNone/>
             </a:pPr>
             <a:r>
-              <a:rPr lang="en-US" sz="900" dirty="0">
+              <a:rPr lang="en-US" sz="1200" dirty="0">
                 <a:solidFill>
                   <a:srgbClr val="1A1A2A"/>
                 </a:solidFill>
@@ -4829,20 +4779,20 @@
               </a:rPr>
               <a:t>depth</a:t>
             </a:r>
-            <a:endParaRPr lang="en-US" sz="900" dirty="0"/>
-          </a:p>
-        </p:txBody>
-      </p:sp>
-      <p:sp>
-        <p:nvSpPr>
-          <p:cNvPr id="15" name="Shape 12"/>
-          <p:cNvSpPr/>
-          <p:nvPr/>
-        </p:nvSpPr>
-        <p:spPr>
-          <a:xfrm>
-            <a:off x="7114032" y="3483864"/>
-            <a:ext cx="108814" cy="182880"/>
+            <a:endParaRPr lang="en-US" sz="1200" dirty="0"/>
+          </a:p>
+        </p:txBody>
+      </p:sp>
+      <p:sp>
+        <p:nvSpPr>
+          <p:cNvPr id="16" name="Shape 13"/>
+          <p:cNvSpPr/>
+          <p:nvPr/>
+        </p:nvSpPr>
+        <p:spPr>
+          <a:xfrm>
+            <a:off x="7205472" y="3621024"/>
+            <a:ext cx="97292" cy="182880"/>
           </a:xfrm>
           <a:prstGeom prst="rect">
             <a:avLst/>
@@ -4860,14 +4810,14 @@
       </p:sp>
       <p:sp>
         <p:nvSpPr>
-          <p:cNvPr id="16" name="Text 13"/>
-          <p:cNvSpPr/>
-          <p:nvPr/>
-        </p:nvSpPr>
-        <p:spPr>
-          <a:xfrm>
-            <a:off x="7268566" y="3438144"/>
-            <a:ext cx="411480" cy="274320"/>
+          <p:cNvPr id="17" name="Text 14"/>
+          <p:cNvSpPr/>
+          <p:nvPr/>
+        </p:nvSpPr>
+        <p:spPr>
+          <a:xfrm>
+            <a:off x="7357628" y="3566160"/>
+            <a:ext cx="365760" cy="274320"/>
           </a:xfrm>
           <a:prstGeom prst="rect">
             <a:avLst/>
@@ -4883,91 +4833,30 @@
               <a:buNone/>
             </a:pPr>
             <a:r>
-              <a:rPr lang="en-US" sz="900" dirty="0">
-                <a:solidFill>
-                  <a:srgbClr val="64748B"/>
-                </a:solidFill>
-              </a:rPr>
-              <a:t>7%</a:t>
-            </a:r>
-            <a:endParaRPr lang="en-US" sz="900" dirty="0"/>
-          </a:p>
-        </p:txBody>
-      </p:sp>
-      <p:sp>
-        <p:nvSpPr>
-          <p:cNvPr id="17" name="Text 14"/>
-          <p:cNvSpPr/>
-          <p:nvPr/>
-        </p:nvSpPr>
-        <p:spPr>
-          <a:xfrm>
-            <a:off x="5852160" y="3785616"/>
-            <a:ext cx="1188720" cy="274320"/>
-          </a:xfrm>
-          <a:prstGeom prst="rect">
-            <a:avLst/>
-          </a:prstGeom>
-          <a:noFill/>
-          <a:ln/>
-        </p:spPr>
-        <p:txBody>
-          <a:bodyPr wrap="square" rtlCol="0" anchor="ctr"/>
-          <a:lstStyle/>
-          <a:p>
-            <a:pPr algn="r" indent="0" marL="0">
-              <a:buNone/>
-            </a:pPr>
-            <a:r>
-              <a:rPr lang="en-US" sz="900" dirty="0">
-                <a:solidFill>
-                  <a:srgbClr val="1A1A2A"/>
+              <a:rPr lang="en-US" sz="1100" dirty="0">
+                <a:solidFill>
+                  <a:srgbClr val="4A6274"/>
                 </a:solidFill>
                 <a:latin typeface="Calibri" pitchFamily="34" charset="0"/>
                 <a:ea typeface="Calibri" pitchFamily="34" charset="-122"/>
                 <a:cs typeface="Calibri" pitchFamily="34" charset="-120"/>
               </a:rPr>
-              <a:t>gap</a:t>
-            </a:r>
-            <a:endParaRPr lang="en-US" sz="900" dirty="0"/>
-          </a:p>
-        </p:txBody>
-      </p:sp>
-      <p:sp>
-        <p:nvSpPr>
-          <p:cNvPr id="18" name="Shape 15"/>
-          <p:cNvSpPr/>
-          <p:nvPr/>
-        </p:nvSpPr>
-        <p:spPr>
-          <a:xfrm>
-            <a:off x="7114032" y="3831336"/>
-            <a:ext cx="77724" cy="182880"/>
-          </a:xfrm>
-          <a:prstGeom prst="rect">
-            <a:avLst/>
-          </a:prstGeom>
-          <a:solidFill>
-            <a:srgbClr val="0D9488"/>
-          </a:solidFill>
-          <a:ln w="12700">
-            <a:solidFill>
-              <a:srgbClr val="0D9488"/>
-            </a:solidFill>
-            <a:prstDash val="solid"/>
-          </a:ln>
-        </p:spPr>
-      </p:sp>
-      <p:sp>
-        <p:nvSpPr>
-          <p:cNvPr id="19" name="Text 16"/>
-          <p:cNvSpPr/>
-          <p:nvPr/>
-        </p:nvSpPr>
-        <p:spPr>
-          <a:xfrm>
-            <a:off x="7237476" y="3785616"/>
-            <a:ext cx="411480" cy="274320"/>
+              <a:t>7%</a:t>
+            </a:r>
+            <a:endParaRPr lang="en-US" sz="1100" dirty="0"/>
+          </a:p>
+        </p:txBody>
+      </p:sp>
+      <p:sp>
+        <p:nvSpPr>
+          <p:cNvPr id="18" name="Text 15"/>
+          <p:cNvSpPr/>
+          <p:nvPr/>
+        </p:nvSpPr>
+        <p:spPr>
+          <a:xfrm>
+            <a:off x="5897880" y="3913632"/>
+            <a:ext cx="1234440" cy="274320"/>
           </a:xfrm>
           <a:prstGeom prst="rect">
             <a:avLst/>
@@ -4979,47 +4868,11 @@
           <a:bodyPr wrap="square" rtlCol="0" anchor="ctr"/>
           <a:lstStyle/>
           <a:p>
-            <a:pPr indent="0" marL="0">
-              <a:buNone/>
-            </a:pPr>
-            <a:r>
-              <a:rPr lang="en-US" sz="900" dirty="0">
-                <a:solidFill>
-                  <a:srgbClr val="64748B"/>
-                </a:solidFill>
-              </a:rPr>
-              <a:t>5%</a:t>
-            </a:r>
-            <a:endParaRPr lang="en-US" sz="900" dirty="0"/>
-          </a:p>
-        </p:txBody>
-      </p:sp>
-      <p:sp>
-        <p:nvSpPr>
-          <p:cNvPr id="20" name="Text 17"/>
-          <p:cNvSpPr/>
-          <p:nvPr/>
-        </p:nvSpPr>
-        <p:spPr>
-          <a:xfrm>
-            <a:off x="5852160" y="4133088"/>
-            <a:ext cx="1188720" cy="274320"/>
-          </a:xfrm>
-          <a:prstGeom prst="rect">
-            <a:avLst/>
-          </a:prstGeom>
-          <a:noFill/>
-          <a:ln/>
-        </p:spPr>
-        <p:txBody>
-          <a:bodyPr wrap="square" rtlCol="0" anchor="ctr"/>
-          <a:lstStyle/>
-          <a:p>
             <a:pPr algn="r" indent="0" marL="0">
               <a:buNone/>
             </a:pPr>
             <a:r>
-              <a:rPr lang="en-US" sz="900" dirty="0">
+              <a:rPr lang="en-US" sz="1200" dirty="0">
                 <a:solidFill>
                   <a:srgbClr val="1A1A2A"/>
                 </a:solidFill>
@@ -5027,22 +4880,22 @@
                 <a:ea typeface="Calibri" pitchFamily="34" charset="-122"/>
                 <a:cs typeface="Calibri" pitchFamily="34" charset="-120"/>
               </a:rPr>
-              <a:t>rms</a:t>
-            </a:r>
-            <a:endParaRPr lang="en-US" sz="900" dirty="0"/>
-          </a:p>
-        </p:txBody>
-      </p:sp>
-      <p:sp>
-        <p:nvSpPr>
-          <p:cNvPr id="21" name="Shape 18"/>
-          <p:cNvSpPr/>
-          <p:nvPr/>
-        </p:nvSpPr>
-        <p:spPr>
-          <a:xfrm>
-            <a:off x="7114032" y="4178808"/>
-            <a:ext cx="62179" cy="182880"/>
+              <a:t>gap</a:t>
+            </a:r>
+            <a:endParaRPr lang="en-US" sz="1200" dirty="0"/>
+          </a:p>
+        </p:txBody>
+      </p:sp>
+      <p:sp>
+        <p:nvSpPr>
+          <p:cNvPr id="19" name="Shape 16"/>
+          <p:cNvSpPr/>
+          <p:nvPr/>
+        </p:nvSpPr>
+        <p:spPr>
+          <a:xfrm>
+            <a:off x="7205472" y="3968496"/>
+            <a:ext cx="69494" cy="182880"/>
           </a:xfrm>
           <a:prstGeom prst="rect">
             <a:avLst/>
@@ -5060,14 +4913,14 @@
       </p:sp>
       <p:sp>
         <p:nvSpPr>
-          <p:cNvPr id="22" name="Text 19"/>
-          <p:cNvSpPr/>
-          <p:nvPr/>
-        </p:nvSpPr>
-        <p:spPr>
-          <a:xfrm>
-            <a:off x="7221931" y="4133088"/>
-            <a:ext cx="411480" cy="274320"/>
+          <p:cNvPr id="20" name="Text 17"/>
+          <p:cNvSpPr/>
+          <p:nvPr/>
+        </p:nvSpPr>
+        <p:spPr>
+          <a:xfrm>
+            <a:off x="7329830" y="3913632"/>
+            <a:ext cx="365760" cy="274320"/>
           </a:xfrm>
           <a:prstGeom prst="rect">
             <a:avLst/>
@@ -5083,66 +4936,69 @@
               <a:buNone/>
             </a:pPr>
             <a:r>
-              <a:rPr lang="en-US" sz="900" dirty="0">
-                <a:solidFill>
-                  <a:srgbClr val="64748B"/>
-                </a:solidFill>
-              </a:rPr>
-              <a:t>4%</a:t>
-            </a:r>
-            <a:endParaRPr lang="en-US" sz="900" dirty="0"/>
-          </a:p>
-        </p:txBody>
-      </p:sp>
-      <p:sp>
-        <p:nvSpPr>
-          <p:cNvPr id="23" name="Text 20"/>
-          <p:cNvSpPr/>
-          <p:nvPr/>
-        </p:nvSpPr>
-        <p:spPr>
-          <a:xfrm>
-            <a:off x="5852160" y="4480560"/>
-            <a:ext cx="1188720" cy="274320"/>
-          </a:xfrm>
-          <a:prstGeom prst="rect">
-            <a:avLst/>
-          </a:prstGeom>
-          <a:noFill/>
-          <a:ln/>
-        </p:spPr>
-        <p:txBody>
-          <a:bodyPr wrap="square" rtlCol="0" anchor="ctr"/>
-          <a:lstStyle/>
-          <a:p>
-            <a:pPr algn="r" indent="0" marL="0">
-              <a:buNone/>
-            </a:pPr>
-            <a:r>
-              <a:rPr lang="en-US" sz="900" dirty="0">
-                <a:solidFill>
-                  <a:srgbClr val="1A1A2A"/>
+              <a:rPr lang="en-US" sz="1100" dirty="0">
+                <a:solidFill>
+                  <a:srgbClr val="4A6274"/>
                 </a:solidFill>
                 <a:latin typeface="Calibri" pitchFamily="34" charset="0"/>
                 <a:ea typeface="Calibri" pitchFamily="34" charset="-122"/>
                 <a:cs typeface="Calibri" pitchFamily="34" charset="-120"/>
               </a:rPr>
-              <a:t>location_type</a:t>
-            </a:r>
-            <a:endParaRPr lang="en-US" sz="900" dirty="0"/>
-          </a:p>
-        </p:txBody>
-      </p:sp>
-      <p:sp>
-        <p:nvSpPr>
-          <p:cNvPr id="24" name="Shape 21"/>
-          <p:cNvSpPr/>
-          <p:nvPr/>
-        </p:nvSpPr>
-        <p:spPr>
-          <a:xfrm>
-            <a:off x="7114032" y="4526280"/>
-            <a:ext cx="31090" cy="182880"/>
+              <a:t>5%</a:t>
+            </a:r>
+            <a:endParaRPr lang="en-US" sz="1100" dirty="0"/>
+          </a:p>
+        </p:txBody>
+      </p:sp>
+      <p:sp>
+        <p:nvSpPr>
+          <p:cNvPr id="21" name="Text 18"/>
+          <p:cNvSpPr/>
+          <p:nvPr/>
+        </p:nvSpPr>
+        <p:spPr>
+          <a:xfrm>
+            <a:off x="5897880" y="4261104"/>
+            <a:ext cx="1234440" cy="274320"/>
+          </a:xfrm>
+          <a:prstGeom prst="rect">
+            <a:avLst/>
+          </a:prstGeom>
+          <a:noFill/>
+          <a:ln/>
+        </p:spPr>
+        <p:txBody>
+          <a:bodyPr wrap="square" rtlCol="0" anchor="ctr"/>
+          <a:lstStyle/>
+          <a:p>
+            <a:pPr algn="r" indent="0" marL="0">
+              <a:buNone/>
+            </a:pPr>
+            <a:r>
+              <a:rPr lang="en-US" sz="1200" dirty="0">
+                <a:solidFill>
+                  <a:srgbClr val="1A1A2A"/>
+                </a:solidFill>
+                <a:latin typeface="Calibri" pitchFamily="34" charset="0"/>
+                <a:ea typeface="Calibri" pitchFamily="34" charset="-122"/>
+                <a:cs typeface="Calibri" pitchFamily="34" charset="-120"/>
+              </a:rPr>
+              <a:t>rms</a:t>
+            </a:r>
+            <a:endParaRPr lang="en-US" sz="1200" dirty="0"/>
+          </a:p>
+        </p:txBody>
+      </p:sp>
+      <p:sp>
+        <p:nvSpPr>
+          <p:cNvPr id="22" name="Shape 19"/>
+          <p:cNvSpPr/>
+          <p:nvPr/>
+        </p:nvSpPr>
+        <p:spPr>
+          <a:xfrm>
+            <a:off x="7205472" y="4315968"/>
+            <a:ext cx="55596" cy="182880"/>
           </a:xfrm>
           <a:prstGeom prst="rect">
             <a:avLst/>
@@ -5160,14 +5016,14 @@
       </p:sp>
       <p:sp>
         <p:nvSpPr>
-          <p:cNvPr id="25" name="Text 22"/>
-          <p:cNvSpPr/>
-          <p:nvPr/>
-        </p:nvSpPr>
-        <p:spPr>
-          <a:xfrm>
-            <a:off x="7190842" y="4480560"/>
-            <a:ext cx="411480" cy="274320"/>
+          <p:cNvPr id="23" name="Text 20"/>
+          <p:cNvSpPr/>
+          <p:nvPr/>
+        </p:nvSpPr>
+        <p:spPr>
+          <a:xfrm>
+            <a:off x="7315932" y="4261104"/>
+            <a:ext cx="365760" cy="274320"/>
           </a:xfrm>
           <a:prstGeom prst="rect">
             <a:avLst/>
@@ -5183,14 +5039,120 @@
               <a:buNone/>
             </a:pPr>
             <a:r>
-              <a:rPr lang="en-US" sz="900" dirty="0">
-                <a:solidFill>
-                  <a:srgbClr val="64748B"/>
-                </a:solidFill>
+              <a:rPr lang="en-US" sz="1100" dirty="0">
+                <a:solidFill>
+                  <a:srgbClr val="4A6274"/>
+                </a:solidFill>
+                <a:latin typeface="Calibri" pitchFamily="34" charset="0"/>
+                <a:ea typeface="Calibri" pitchFamily="34" charset="-122"/>
+                <a:cs typeface="Calibri" pitchFamily="34" charset="-120"/>
+              </a:rPr>
+              <a:t>4%</a:t>
+            </a:r>
+            <a:endParaRPr lang="en-US" sz="1100" dirty="0"/>
+          </a:p>
+        </p:txBody>
+      </p:sp>
+      <p:sp>
+        <p:nvSpPr>
+          <p:cNvPr id="24" name="Text 21"/>
+          <p:cNvSpPr/>
+          <p:nvPr/>
+        </p:nvSpPr>
+        <p:spPr>
+          <a:xfrm>
+            <a:off x="5897880" y="4608576"/>
+            <a:ext cx="1234440" cy="274320"/>
+          </a:xfrm>
+          <a:prstGeom prst="rect">
+            <a:avLst/>
+          </a:prstGeom>
+          <a:noFill/>
+          <a:ln/>
+        </p:spPr>
+        <p:txBody>
+          <a:bodyPr wrap="square" rtlCol="0" anchor="ctr"/>
+          <a:lstStyle/>
+          <a:p>
+            <a:pPr algn="r" indent="0" marL="0">
+              <a:buNone/>
+            </a:pPr>
+            <a:r>
+              <a:rPr lang="en-US" sz="1200" dirty="0">
+                <a:solidFill>
+                  <a:srgbClr val="1A1A2A"/>
+                </a:solidFill>
+                <a:latin typeface="Calibri" pitchFamily="34" charset="0"/>
+                <a:ea typeface="Calibri" pitchFamily="34" charset="-122"/>
+                <a:cs typeface="Calibri" pitchFamily="34" charset="-120"/>
+              </a:rPr>
+              <a:t>location_type</a:t>
+            </a:r>
+            <a:endParaRPr lang="en-US" sz="1200" dirty="0"/>
+          </a:p>
+        </p:txBody>
+      </p:sp>
+      <p:sp>
+        <p:nvSpPr>
+          <p:cNvPr id="25" name="Shape 22"/>
+          <p:cNvSpPr/>
+          <p:nvPr/>
+        </p:nvSpPr>
+        <p:spPr>
+          <a:xfrm>
+            <a:off x="7205472" y="4663440"/>
+            <a:ext cx="27798" cy="182880"/>
+          </a:xfrm>
+          <a:prstGeom prst="rect">
+            <a:avLst/>
+          </a:prstGeom>
+          <a:solidFill>
+            <a:srgbClr val="0D9488"/>
+          </a:solidFill>
+          <a:ln w="12700">
+            <a:solidFill>
+              <a:srgbClr val="0D9488"/>
+            </a:solidFill>
+            <a:prstDash val="solid"/>
+          </a:ln>
+        </p:spPr>
+      </p:sp>
+      <p:sp>
+        <p:nvSpPr>
+          <p:cNvPr id="26" name="Text 23"/>
+          <p:cNvSpPr/>
+          <p:nvPr/>
+        </p:nvSpPr>
+        <p:spPr>
+          <a:xfrm>
+            <a:off x="7288134" y="4608576"/>
+            <a:ext cx="365760" cy="274320"/>
+          </a:xfrm>
+          <a:prstGeom prst="rect">
+            <a:avLst/>
+          </a:prstGeom>
+          <a:noFill/>
+          <a:ln/>
+        </p:spPr>
+        <p:txBody>
+          <a:bodyPr wrap="square" rtlCol="0" anchor="ctr"/>
+          <a:lstStyle/>
+          <a:p>
+            <a:pPr indent="0" marL="0">
+              <a:buNone/>
+            </a:pPr>
+            <a:r>
+              <a:rPr lang="en-US" sz="1100" dirty="0">
+                <a:solidFill>
+                  <a:srgbClr val="4A6274"/>
+                </a:solidFill>
+                <a:latin typeface="Calibri" pitchFamily="34" charset="0"/>
+                <a:ea typeface="Calibri" pitchFamily="34" charset="-122"/>
+                <a:cs typeface="Calibri" pitchFamily="34" charset="-120"/>
               </a:rPr>
               <a:t>2%</a:t>
             </a:r>
-            <a:endParaRPr lang="en-US" sz="900" dirty="0"/>
+            <a:endParaRPr lang="en-US" sz="1100" dirty="0"/>
           </a:p>
         </p:txBody>
       </p:sp>
@@ -5208,7 +5170,7 @@
     <p:bg>
       <p:bgPr>
         <a:solidFill>
-          <a:srgbClr val="F4F8FB"/>
+          <a:srgbClr val="FFFFFF"/>
         </a:solidFill>
       </p:bgPr>
     </p:bg>
@@ -5235,17 +5197,17 @@
         <p:spPr>
           <a:xfrm>
             <a:off x="0" y="0"/>
-            <a:ext cx="9144000" cy="713232"/>
-          </a:xfrm>
-          <a:prstGeom prst="rect">
-            <a:avLst/>
-          </a:prstGeom>
-          <a:solidFill>
-            <a:srgbClr val="1E3A5F"/>
+            <a:ext cx="9144000" cy="777240"/>
+          </a:xfrm>
+          <a:prstGeom prst="rect">
+            <a:avLst/>
+          </a:prstGeom>
+          <a:solidFill>
+            <a:srgbClr val="1A5276"/>
           </a:solidFill>
           <a:ln w="12700">
             <a:solidFill>
-              <a:srgbClr val="1E3A5F"/>
+              <a:srgbClr val="1A5276"/>
             </a:solidFill>
             <a:prstDash val="solid"/>
           </a:ln>
@@ -5253,14 +5215,39 @@
       </p:sp>
       <p:sp>
         <p:nvSpPr>
-          <p:cNvPr id="3" name="Text 1"/>
-          <p:cNvSpPr/>
-          <p:nvPr/>
-        </p:nvSpPr>
-        <p:spPr>
-          <a:xfrm>
-            <a:off x="365760" y="0"/>
-            <a:ext cx="8412480" cy="713232"/>
+          <p:cNvPr id="3" name="Shape 1"/>
+          <p:cNvSpPr/>
+          <p:nvPr/>
+        </p:nvSpPr>
+        <p:spPr>
+          <a:xfrm>
+            <a:off x="0" y="0"/>
+            <a:ext cx="164592" cy="777240"/>
+          </a:xfrm>
+          <a:prstGeom prst="rect">
+            <a:avLst/>
+          </a:prstGeom>
+          <a:solidFill>
+            <a:srgbClr val="0D9488"/>
+          </a:solidFill>
+          <a:ln w="12700">
+            <a:solidFill>
+              <a:srgbClr val="0D9488"/>
+            </a:solidFill>
+            <a:prstDash val="solid"/>
+          </a:ln>
+        </p:spPr>
+      </p:sp>
+      <p:sp>
+        <p:nvSpPr>
+          <p:cNvPr id="4" name="Text 2"/>
+          <p:cNvSpPr/>
+          <p:nvPr/>
+        </p:nvSpPr>
+        <p:spPr>
+          <a:xfrm>
+            <a:off x="320040" y="0"/>
+            <a:ext cx="8595360" cy="777240"/>
           </a:xfrm>
           <a:prstGeom prst="rect">
             <a:avLst/>
@@ -5276,7 +5263,7 @@
               <a:buNone/>
             </a:pPr>
             <a:r>
-              <a:rPr lang="en-US" sz="2600" b="1" dirty="0">
+              <a:rPr lang="en-US" sz="3000" b="1" dirty="0">
                 <a:solidFill>
                   <a:srgbClr val="FFFFFF"/>
                 </a:solidFill>
@@ -5286,13 +5273,13 @@
               </a:rPr>
               <a:t>Solution Architecture</a:t>
             </a:r>
-            <a:endParaRPr lang="en-US" sz="2600" dirty="0"/>
+            <a:endParaRPr lang="en-US" sz="3000" dirty="0"/>
           </a:p>
         </p:txBody>
       </p:sp>
       <p:pic>
         <p:nvPicPr>
-          <p:cNvPr id="4" name="Image 0" descr="/Users/biubiu/Desktop/EarthSafe/data/processed/fig_architecture.png">    </p:cNvPr>
+          <p:cNvPr id="5" name="Image 0" descr="/Users/biubiu/Desktop/EarthSafe/data/processed/fig_architecture.png">    </p:cNvPr>
           <p:cNvPicPr>
             <a:picLocks noChangeAspect="1"/>
           </p:cNvPicPr>
@@ -5306,8 +5293,8 @@
         </p:blipFill>
         <p:spPr>
           <a:xfrm>
-            <a:off x="274320" y="822960"/>
-            <a:ext cx="8595360" cy="3291840"/>
+            <a:off x="228600" y="868680"/>
+            <a:ext cx="8686800" cy="3337560"/>
           </a:xfrm>
           <a:prstGeom prst="rect">
             <a:avLst/>
@@ -5316,26 +5303,26 @@
       </p:pic>
       <p:sp>
         <p:nvSpPr>
-          <p:cNvPr id="5" name="Shape 2"/>
-          <p:cNvSpPr/>
-          <p:nvPr/>
-        </p:nvSpPr>
-        <p:spPr>
-          <a:xfrm>
-            <a:off x="402336" y="4370832"/>
-            <a:ext cx="1097280" cy="347472"/>
+          <p:cNvPr id="6" name="Shape 3"/>
+          <p:cNvSpPr/>
+          <p:nvPr/>
+        </p:nvSpPr>
+        <p:spPr>
+          <a:xfrm>
+            <a:off x="393192" y="4407408"/>
+            <a:ext cx="1115568" cy="384048"/>
           </a:xfrm>
           <a:prstGeom prst="roundRect">
             <a:avLst>
-              <a:gd name="adj" fmla="val 15789"/>
+              <a:gd name="adj" fmla="val 14286"/>
             </a:avLst>
           </a:prstGeom>
           <a:solidFill>
-            <a:srgbClr val="1E3A5F"/>
+            <a:srgbClr val="1A5276"/>
           </a:solidFill>
           <a:ln w="12700">
             <a:solidFill>
-              <a:srgbClr val="1E3A5F"/>
+              <a:srgbClr val="1A5276"/>
             </a:solidFill>
             <a:prstDash val="solid"/>
           </a:ln>
@@ -5343,14 +5330,14 @@
       </p:sp>
       <p:sp>
         <p:nvSpPr>
-          <p:cNvPr id="6" name="Text 3"/>
-          <p:cNvSpPr/>
-          <p:nvPr/>
-        </p:nvSpPr>
-        <p:spPr>
-          <a:xfrm>
-            <a:off x="402336" y="4370832"/>
-            <a:ext cx="1097280" cy="347472"/>
+          <p:cNvPr id="7" name="Text 4"/>
+          <p:cNvSpPr/>
+          <p:nvPr/>
+        </p:nvSpPr>
+        <p:spPr>
+          <a:xfrm>
+            <a:off x="393192" y="4407408"/>
+            <a:ext cx="1115568" cy="384048"/>
           </a:xfrm>
           <a:prstGeom prst="rect">
             <a:avLst/>
@@ -5366,7 +5353,7 @@
               <a:buNone/>
             </a:pPr>
             <a:r>
-              <a:rPr lang="en-US" sz="900" dirty="0">
+              <a:rPr lang="en-US" sz="1100" dirty="0">
                 <a:solidFill>
                   <a:srgbClr val="FFFFFF"/>
                 </a:solidFill>
@@ -5376,32 +5363,32 @@
               </a:rPr>
               <a:t>Python 3.11</a:t>
             </a:r>
-            <a:endParaRPr lang="en-US" sz="900" dirty="0"/>
-          </a:p>
-        </p:txBody>
-      </p:sp>
-      <p:sp>
-        <p:nvSpPr>
-          <p:cNvPr id="7" name="Shape 4"/>
-          <p:cNvSpPr/>
-          <p:nvPr/>
-        </p:nvSpPr>
-        <p:spPr>
-          <a:xfrm>
-            <a:off x="1609344" y="4370832"/>
-            <a:ext cx="1097280" cy="347472"/>
+            <a:endParaRPr lang="en-US" sz="1100" dirty="0"/>
+          </a:p>
+        </p:txBody>
+      </p:sp>
+      <p:sp>
+        <p:nvSpPr>
+          <p:cNvPr id="8" name="Shape 5"/>
+          <p:cNvSpPr/>
+          <p:nvPr/>
+        </p:nvSpPr>
+        <p:spPr>
+          <a:xfrm>
+            <a:off x="1600200" y="4407408"/>
+            <a:ext cx="1115568" cy="384048"/>
           </a:xfrm>
           <a:prstGeom prst="roundRect">
             <a:avLst>
-              <a:gd name="adj" fmla="val 15789"/>
+              <a:gd name="adj" fmla="val 14286"/>
             </a:avLst>
           </a:prstGeom>
           <a:solidFill>
-            <a:srgbClr val="1E3A5F"/>
+            <a:srgbClr val="1A5276"/>
           </a:solidFill>
           <a:ln w="12700">
             <a:solidFill>
-              <a:srgbClr val="1E3A5F"/>
+              <a:srgbClr val="1A5276"/>
             </a:solidFill>
             <a:prstDash val="solid"/>
           </a:ln>
@@ -5409,14 +5396,14 @@
       </p:sp>
       <p:sp>
         <p:nvSpPr>
-          <p:cNvPr id="8" name="Text 5"/>
-          <p:cNvSpPr/>
-          <p:nvPr/>
-        </p:nvSpPr>
-        <p:spPr>
-          <a:xfrm>
-            <a:off x="1609344" y="4370832"/>
-            <a:ext cx="1097280" cy="347472"/>
+          <p:cNvPr id="9" name="Text 6"/>
+          <p:cNvSpPr/>
+          <p:nvPr/>
+        </p:nvSpPr>
+        <p:spPr>
+          <a:xfrm>
+            <a:off x="1600200" y="4407408"/>
+            <a:ext cx="1115568" cy="384048"/>
           </a:xfrm>
           <a:prstGeom prst="rect">
             <a:avLst/>
@@ -5432,7 +5419,7 @@
               <a:buNone/>
             </a:pPr>
             <a:r>
-              <a:rPr lang="en-US" sz="900" dirty="0">
+              <a:rPr lang="en-US" sz="1100" dirty="0">
                 <a:solidFill>
                   <a:srgbClr val="FFFFFF"/>
                 </a:solidFill>
@@ -5442,32 +5429,32 @@
               </a:rPr>
               <a:t>XGBoost 2.0</a:t>
             </a:r>
-            <a:endParaRPr lang="en-US" sz="900" dirty="0"/>
-          </a:p>
-        </p:txBody>
-      </p:sp>
-      <p:sp>
-        <p:nvSpPr>
-          <p:cNvPr id="9" name="Shape 6"/>
-          <p:cNvSpPr/>
-          <p:nvPr/>
-        </p:nvSpPr>
-        <p:spPr>
-          <a:xfrm>
-            <a:off x="2816352" y="4370832"/>
-            <a:ext cx="1097280" cy="347472"/>
+            <a:endParaRPr lang="en-US" sz="1100" dirty="0"/>
+          </a:p>
+        </p:txBody>
+      </p:sp>
+      <p:sp>
+        <p:nvSpPr>
+          <p:cNvPr id="10" name="Shape 7"/>
+          <p:cNvSpPr/>
+          <p:nvPr/>
+        </p:nvSpPr>
+        <p:spPr>
+          <a:xfrm>
+            <a:off x="2807208" y="4407408"/>
+            <a:ext cx="1115568" cy="384048"/>
           </a:xfrm>
           <a:prstGeom prst="roundRect">
             <a:avLst>
-              <a:gd name="adj" fmla="val 15789"/>
+              <a:gd name="adj" fmla="val 14286"/>
             </a:avLst>
           </a:prstGeom>
           <a:solidFill>
-            <a:srgbClr val="1E3A5F"/>
+            <a:srgbClr val="1A5276"/>
           </a:solidFill>
           <a:ln w="12700">
             <a:solidFill>
-              <a:srgbClr val="1E3A5F"/>
+              <a:srgbClr val="1A5276"/>
             </a:solidFill>
             <a:prstDash val="solid"/>
           </a:ln>
@@ -5475,14 +5462,14 @@
       </p:sp>
       <p:sp>
         <p:nvSpPr>
-          <p:cNvPr id="10" name="Text 7"/>
-          <p:cNvSpPr/>
-          <p:nvPr/>
-        </p:nvSpPr>
-        <p:spPr>
-          <a:xfrm>
-            <a:off x="2816352" y="4370832"/>
-            <a:ext cx="1097280" cy="347472"/>
+          <p:cNvPr id="11" name="Text 8"/>
+          <p:cNvSpPr/>
+          <p:nvPr/>
+        </p:nvSpPr>
+        <p:spPr>
+          <a:xfrm>
+            <a:off x="2807208" y="4407408"/>
+            <a:ext cx="1115568" cy="384048"/>
           </a:xfrm>
           <a:prstGeom prst="rect">
             <a:avLst/>
@@ -5498,7 +5485,7 @@
               <a:buNone/>
             </a:pPr>
             <a:r>
-              <a:rPr lang="en-US" sz="900" dirty="0">
+              <a:rPr lang="en-US" sz="1100" dirty="0">
                 <a:solidFill>
                   <a:srgbClr val="FFFFFF"/>
                 </a:solidFill>
@@ -5508,32 +5495,32 @@
               </a:rPr>
               <a:t>Flask 3.0</a:t>
             </a:r>
-            <a:endParaRPr lang="en-US" sz="900" dirty="0"/>
-          </a:p>
-        </p:txBody>
-      </p:sp>
-      <p:sp>
-        <p:nvSpPr>
-          <p:cNvPr id="11" name="Shape 8"/>
-          <p:cNvSpPr/>
-          <p:nvPr/>
-        </p:nvSpPr>
-        <p:spPr>
-          <a:xfrm>
-            <a:off x="4023360" y="4370832"/>
-            <a:ext cx="1097280" cy="347472"/>
+            <a:endParaRPr lang="en-US" sz="1100" dirty="0"/>
+          </a:p>
+        </p:txBody>
+      </p:sp>
+      <p:sp>
+        <p:nvSpPr>
+          <p:cNvPr id="12" name="Shape 9"/>
+          <p:cNvSpPr/>
+          <p:nvPr/>
+        </p:nvSpPr>
+        <p:spPr>
+          <a:xfrm>
+            <a:off x="4014216" y="4407408"/>
+            <a:ext cx="1115568" cy="384048"/>
           </a:xfrm>
           <a:prstGeom prst="roundRect">
             <a:avLst>
-              <a:gd name="adj" fmla="val 15789"/>
+              <a:gd name="adj" fmla="val 14286"/>
             </a:avLst>
           </a:prstGeom>
           <a:solidFill>
-            <a:srgbClr val="1E3A5F"/>
+            <a:srgbClr val="1A5276"/>
           </a:solidFill>
           <a:ln w="12700">
             <a:solidFill>
-              <a:srgbClr val="1E3A5F"/>
+              <a:srgbClr val="1A5276"/>
             </a:solidFill>
             <a:prstDash val="solid"/>
           </a:ln>
@@ -5541,14 +5528,14 @@
       </p:sp>
       <p:sp>
         <p:nvSpPr>
-          <p:cNvPr id="12" name="Text 9"/>
-          <p:cNvSpPr/>
-          <p:nvPr/>
-        </p:nvSpPr>
-        <p:spPr>
-          <a:xfrm>
-            <a:off x="4023360" y="4370832"/>
-            <a:ext cx="1097280" cy="347472"/>
+          <p:cNvPr id="13" name="Text 10"/>
+          <p:cNvSpPr/>
+          <p:nvPr/>
+        </p:nvSpPr>
+        <p:spPr>
+          <a:xfrm>
+            <a:off x="4014216" y="4407408"/>
+            <a:ext cx="1115568" cy="384048"/>
           </a:xfrm>
           <a:prstGeom prst="rect">
             <a:avLst/>
@@ -5564,7 +5551,7 @@
               <a:buNone/>
             </a:pPr>
             <a:r>
-              <a:rPr lang="en-US" sz="900" dirty="0">
+              <a:rPr lang="en-US" sz="1100" dirty="0">
                 <a:solidFill>
                   <a:srgbClr val="FFFFFF"/>
                 </a:solidFill>
@@ -5574,32 +5561,32 @@
               </a:rPr>
               <a:t>Streamlit 1.35</a:t>
             </a:r>
-            <a:endParaRPr lang="en-US" sz="900" dirty="0"/>
-          </a:p>
-        </p:txBody>
-      </p:sp>
-      <p:sp>
-        <p:nvSpPr>
-          <p:cNvPr id="13" name="Shape 10"/>
-          <p:cNvSpPr/>
-          <p:nvPr/>
-        </p:nvSpPr>
-        <p:spPr>
-          <a:xfrm>
-            <a:off x="5230368" y="4370832"/>
-            <a:ext cx="1097280" cy="347472"/>
+            <a:endParaRPr lang="en-US" sz="1100" dirty="0"/>
+          </a:p>
+        </p:txBody>
+      </p:sp>
+      <p:sp>
+        <p:nvSpPr>
+          <p:cNvPr id="14" name="Shape 11"/>
+          <p:cNvSpPr/>
+          <p:nvPr/>
+        </p:nvSpPr>
+        <p:spPr>
+          <a:xfrm>
+            <a:off x="5221224" y="4407408"/>
+            <a:ext cx="1115568" cy="384048"/>
           </a:xfrm>
           <a:prstGeom prst="roundRect">
             <a:avLst>
-              <a:gd name="adj" fmla="val 15789"/>
+              <a:gd name="adj" fmla="val 14286"/>
             </a:avLst>
           </a:prstGeom>
           <a:solidFill>
-            <a:srgbClr val="1E3A5F"/>
+            <a:srgbClr val="1A5276"/>
           </a:solidFill>
           <a:ln w="12700">
             <a:solidFill>
-              <a:srgbClr val="1E3A5F"/>
+              <a:srgbClr val="1A5276"/>
             </a:solidFill>
             <a:prstDash val="solid"/>
           </a:ln>
@@ -5607,14 +5594,14 @@
       </p:sp>
       <p:sp>
         <p:nvSpPr>
-          <p:cNvPr id="14" name="Text 11"/>
-          <p:cNvSpPr/>
-          <p:nvPr/>
-        </p:nvSpPr>
-        <p:spPr>
-          <a:xfrm>
-            <a:off x="5230368" y="4370832"/>
-            <a:ext cx="1097280" cy="347472"/>
+          <p:cNvPr id="15" name="Text 12"/>
+          <p:cNvSpPr/>
+          <p:nvPr/>
+        </p:nvSpPr>
+        <p:spPr>
+          <a:xfrm>
+            <a:off x="5221224" y="4407408"/>
+            <a:ext cx="1115568" cy="384048"/>
           </a:xfrm>
           <a:prstGeom prst="rect">
             <a:avLst/>
@@ -5630,7 +5617,7 @@
               <a:buNone/>
             </a:pPr>
             <a:r>
-              <a:rPr lang="en-US" sz="900" dirty="0">
+              <a:rPr lang="en-US" sz="1100" dirty="0">
                 <a:solidFill>
                   <a:srgbClr val="FFFFFF"/>
                 </a:solidFill>
@@ -5640,32 +5627,32 @@
               </a:rPr>
               <a:t>Plotly 5.20</a:t>
             </a:r>
-            <a:endParaRPr lang="en-US" sz="900" dirty="0"/>
-          </a:p>
-        </p:txBody>
-      </p:sp>
-      <p:sp>
-        <p:nvSpPr>
-          <p:cNvPr id="15" name="Shape 12"/>
-          <p:cNvSpPr/>
-          <p:nvPr/>
-        </p:nvSpPr>
-        <p:spPr>
-          <a:xfrm>
-            <a:off x="6437376" y="4370832"/>
-            <a:ext cx="1097280" cy="347472"/>
+            <a:endParaRPr lang="en-US" sz="1100" dirty="0"/>
+          </a:p>
+        </p:txBody>
+      </p:sp>
+      <p:sp>
+        <p:nvSpPr>
+          <p:cNvPr id="16" name="Shape 13"/>
+          <p:cNvSpPr/>
+          <p:nvPr/>
+        </p:nvSpPr>
+        <p:spPr>
+          <a:xfrm>
+            <a:off x="6428232" y="4407408"/>
+            <a:ext cx="1115568" cy="384048"/>
           </a:xfrm>
           <a:prstGeom prst="roundRect">
             <a:avLst>
-              <a:gd name="adj" fmla="val 15789"/>
+              <a:gd name="adj" fmla="val 14286"/>
             </a:avLst>
           </a:prstGeom>
           <a:solidFill>
-            <a:srgbClr val="1E3A5F"/>
+            <a:srgbClr val="1A5276"/>
           </a:solidFill>
           <a:ln w="12700">
             <a:solidFill>
-              <a:srgbClr val="1E3A5F"/>
+              <a:srgbClr val="1A5276"/>
             </a:solidFill>
             <a:prstDash val="solid"/>
           </a:ln>
@@ -5673,14 +5660,14 @@
       </p:sp>
       <p:sp>
         <p:nvSpPr>
-          <p:cNvPr id="16" name="Text 13"/>
-          <p:cNvSpPr/>
-          <p:nvPr/>
-        </p:nvSpPr>
-        <p:spPr>
-          <a:xfrm>
-            <a:off x="6437376" y="4370832"/>
-            <a:ext cx="1097280" cy="347472"/>
+          <p:cNvPr id="17" name="Text 14"/>
+          <p:cNvSpPr/>
+          <p:nvPr/>
+        </p:nvSpPr>
+        <p:spPr>
+          <a:xfrm>
+            <a:off x="6428232" y="4407408"/>
+            <a:ext cx="1115568" cy="384048"/>
           </a:xfrm>
           <a:prstGeom prst="rect">
             <a:avLst/>
@@ -5696,7 +5683,7 @@
               <a:buNone/>
             </a:pPr>
             <a:r>
-              <a:rPr lang="en-US" sz="900" dirty="0">
+              <a:rPr lang="en-US" sz="1100" dirty="0">
                 <a:solidFill>
                   <a:srgbClr val="FFFFFF"/>
                 </a:solidFill>
@@ -5706,32 +5693,32 @@
               </a:rPr>
               <a:t>Docker</a:t>
             </a:r>
-            <a:endParaRPr lang="en-US" sz="900" dirty="0"/>
-          </a:p>
-        </p:txBody>
-      </p:sp>
-      <p:sp>
-        <p:nvSpPr>
-          <p:cNvPr id="17" name="Shape 14"/>
-          <p:cNvSpPr/>
-          <p:nvPr/>
-        </p:nvSpPr>
-        <p:spPr>
-          <a:xfrm>
-            <a:off x="7644384" y="4370832"/>
-            <a:ext cx="1097280" cy="347472"/>
+            <a:endParaRPr lang="en-US" sz="1100" dirty="0"/>
+          </a:p>
+        </p:txBody>
+      </p:sp>
+      <p:sp>
+        <p:nvSpPr>
+          <p:cNvPr id="18" name="Shape 15"/>
+          <p:cNvSpPr/>
+          <p:nvPr/>
+        </p:nvSpPr>
+        <p:spPr>
+          <a:xfrm>
+            <a:off x="7635240" y="4407408"/>
+            <a:ext cx="1115568" cy="384048"/>
           </a:xfrm>
           <a:prstGeom prst="roundRect">
             <a:avLst>
-              <a:gd name="adj" fmla="val 15789"/>
+              <a:gd name="adj" fmla="val 14286"/>
             </a:avLst>
           </a:prstGeom>
           <a:solidFill>
-            <a:srgbClr val="1E3A5F"/>
+            <a:srgbClr val="1A5276"/>
           </a:solidFill>
           <a:ln w="12700">
             <a:solidFill>
-              <a:srgbClr val="1E3A5F"/>
+              <a:srgbClr val="1A5276"/>
             </a:solidFill>
             <a:prstDash val="solid"/>
           </a:ln>
@@ -5739,14 +5726,14 @@
       </p:sp>
       <p:sp>
         <p:nvSpPr>
-          <p:cNvPr id="18" name="Text 15"/>
-          <p:cNvSpPr/>
-          <p:nvPr/>
-        </p:nvSpPr>
-        <p:spPr>
-          <a:xfrm>
-            <a:off x="7644384" y="4370832"/>
-            <a:ext cx="1097280" cy="347472"/>
+          <p:cNvPr id="19" name="Text 16"/>
+          <p:cNvSpPr/>
+          <p:nvPr/>
+        </p:nvSpPr>
+        <p:spPr>
+          <a:xfrm>
+            <a:off x="7635240" y="4407408"/>
+            <a:ext cx="1115568" cy="384048"/>
           </a:xfrm>
           <a:prstGeom prst="rect">
             <a:avLst/>
@@ -5762,7 +5749,7 @@
               <a:buNone/>
             </a:pPr>
             <a:r>
-              <a:rPr lang="en-US" sz="900" dirty="0">
+              <a:rPr lang="en-US" sz="1100" dirty="0">
                 <a:solidFill>
                   <a:srgbClr val="FFFFFF"/>
                 </a:solidFill>
@@ -5770,9 +5757,9 @@
                 <a:ea typeface="Calibri" pitchFamily="34" charset="-122"/>
                 <a:cs typeface="Calibri" pitchFamily="34" charset="-120"/>
               </a:rPr>
-              <a:t>Google Cloud Run</a:t>
-            </a:r>
-            <a:endParaRPr lang="en-US" sz="900" dirty="0"/>
+              <a:t>Cloud Run</a:t>
+            </a:r>
+            <a:endParaRPr lang="en-US" sz="1100" dirty="0"/>
           </a:p>
         </p:txBody>
       </p:sp>
@@ -5817,17 +5804,17 @@
         <p:spPr>
           <a:xfrm>
             <a:off x="0" y="0"/>
-            <a:ext cx="9144000" cy="713232"/>
-          </a:xfrm>
-          <a:prstGeom prst="rect">
-            <a:avLst/>
-          </a:prstGeom>
-          <a:solidFill>
-            <a:srgbClr val="1E3A5F"/>
+            <a:ext cx="9144000" cy="777240"/>
+          </a:xfrm>
+          <a:prstGeom prst="rect">
+            <a:avLst/>
+          </a:prstGeom>
+          <a:solidFill>
+            <a:srgbClr val="1A5276"/>
           </a:solidFill>
           <a:ln w="12700">
             <a:solidFill>
-              <a:srgbClr val="1E3A5F"/>
+              <a:srgbClr val="1A5276"/>
             </a:solidFill>
             <a:prstDash val="solid"/>
           </a:ln>
@@ -5835,14 +5822,39 @@
       </p:sp>
       <p:sp>
         <p:nvSpPr>
-          <p:cNvPr id="3" name="Text 1"/>
-          <p:cNvSpPr/>
-          <p:nvPr/>
-        </p:nvSpPr>
-        <p:spPr>
-          <a:xfrm>
-            <a:off x="365760" y="0"/>
-            <a:ext cx="8412480" cy="713232"/>
+          <p:cNvPr id="3" name="Shape 1"/>
+          <p:cNvSpPr/>
+          <p:nvPr/>
+        </p:nvSpPr>
+        <p:spPr>
+          <a:xfrm>
+            <a:off x="0" y="0"/>
+            <a:ext cx="164592" cy="777240"/>
+          </a:xfrm>
+          <a:prstGeom prst="rect">
+            <a:avLst/>
+          </a:prstGeom>
+          <a:solidFill>
+            <a:srgbClr val="0D9488"/>
+          </a:solidFill>
+          <a:ln w="12700">
+            <a:solidFill>
+              <a:srgbClr val="0D9488"/>
+            </a:solidFill>
+            <a:prstDash val="solid"/>
+          </a:ln>
+        </p:spPr>
+      </p:sp>
+      <p:sp>
+        <p:nvSpPr>
+          <p:cNvPr id="4" name="Text 2"/>
+          <p:cNvSpPr/>
+          <p:nvPr/>
+        </p:nvSpPr>
+        <p:spPr>
+          <a:xfrm>
+            <a:off x="320040" y="0"/>
+            <a:ext cx="8595360" cy="777240"/>
           </a:xfrm>
           <a:prstGeom prst="rect">
             <a:avLst/>
@@ -5858,7 +5870,7 @@
               <a:buNone/>
             </a:pPr>
             <a:r>
-              <a:rPr lang="en-US" sz="2600" b="1" dirty="0">
+              <a:rPr lang="en-US" sz="3000" b="1" dirty="0">
                 <a:solidFill>
                   <a:srgbClr val="FFFFFF"/>
                 </a:solidFill>
@@ -5868,26 +5880,26 @@
               </a:rPr>
               <a:t>App Features &amp; Live Demo</a:t>
             </a:r>
-            <a:endParaRPr lang="en-US" sz="2600" dirty="0"/>
-          </a:p>
-        </p:txBody>
-      </p:sp>
-      <p:sp>
-        <p:nvSpPr>
-          <p:cNvPr id="4" name="Shape 2"/>
-          <p:cNvSpPr/>
-          <p:nvPr/>
-        </p:nvSpPr>
-        <p:spPr>
-          <a:xfrm>
-            <a:off x="274320" y="914400"/>
-            <a:ext cx="2743200" cy="1828800"/>
-          </a:xfrm>
-          <a:prstGeom prst="rect">
-            <a:avLst/>
-          </a:prstGeom>
-          <a:solidFill>
-            <a:srgbClr val="E8F8F5"/>
+            <a:endParaRPr lang="en-US" sz="3000" dirty="0"/>
+          </a:p>
+        </p:txBody>
+      </p:sp>
+      <p:sp>
+        <p:nvSpPr>
+          <p:cNvPr id="5" name="Shape 3"/>
+          <p:cNvSpPr/>
+          <p:nvPr/>
+        </p:nvSpPr>
+        <p:spPr>
+          <a:xfrm>
+            <a:off x="256032" y="932688"/>
+            <a:ext cx="2816352" cy="1828800"/>
+          </a:xfrm>
+          <a:prstGeom prst="rect">
+            <a:avLst/>
+          </a:prstGeom>
+          <a:solidFill>
+            <a:srgbClr val="E0F5F2"/>
           </a:solidFill>
           <a:ln w="12700">
             <a:solidFill>
@@ -5896,7 +5908,7 @@
             <a:prstDash val="solid"/>
           </a:ln>
           <a:effectLst>
-            <a:outerShdw sx="100000" sy="100000" kx="0" ky="0" algn="bl" rotWithShape="0" blurRad="101600" dist="25400" dir="8100000">
+            <a:outerShdw sx="100000" sy="100000" kx="0" ky="0" algn="bl" rotWithShape="0" blurRad="127000" dist="38100" dir="8100000">
               <a:srgbClr val="000000">
                 <a:alpha val="10000"/>
               </a:srgbClr>
@@ -5906,14 +5918,14 @@
       </p:sp>
       <p:sp>
         <p:nvSpPr>
-          <p:cNvPr id="5" name="Shape 3"/>
-          <p:cNvSpPr/>
-          <p:nvPr/>
-        </p:nvSpPr>
-        <p:spPr>
-          <a:xfrm>
-            <a:off x="274320" y="914400"/>
-            <a:ext cx="2743200" cy="73152"/>
+          <p:cNvPr id="6" name="Shape 4"/>
+          <p:cNvSpPr/>
+          <p:nvPr/>
+        </p:nvSpPr>
+        <p:spPr>
+          <a:xfrm>
+            <a:off x="256032" y="932688"/>
+            <a:ext cx="2816352" cy="82296"/>
           </a:xfrm>
           <a:prstGeom prst="rect">
             <a:avLst/>
@@ -5931,14 +5943,14 @@
       </p:sp>
       <p:sp>
         <p:nvSpPr>
-          <p:cNvPr id="6" name="Text 4"/>
-          <p:cNvSpPr/>
-          <p:nvPr/>
-        </p:nvSpPr>
-        <p:spPr>
-          <a:xfrm>
-            <a:off x="274320" y="1042416"/>
-            <a:ext cx="731520" cy="512064"/>
+          <p:cNvPr id="7" name="Text 5"/>
+          <p:cNvSpPr/>
+          <p:nvPr/>
+        </p:nvSpPr>
+        <p:spPr>
+          <a:xfrm>
+            <a:off x="329184" y="1078992"/>
+            <a:ext cx="640080" cy="548640"/>
           </a:xfrm>
           <a:prstGeom prst="rect">
             <a:avLst/>
@@ -5954,27 +5966,27 @@
               <a:buNone/>
             </a:pPr>
             <a:r>
-              <a:rPr lang="en-US" sz="2200" dirty="0">
+              <a:rPr lang="en-US" sz="2400" dirty="0">
                 <a:solidFill>
                   <a:srgbClr val="000000"/>
                 </a:solidFill>
               </a:rPr>
               <a:t>🎚️</a:t>
             </a:r>
-            <a:endParaRPr lang="en-US" sz="2200" dirty="0"/>
-          </a:p>
-        </p:txBody>
-      </p:sp>
-      <p:sp>
-        <p:nvSpPr>
-          <p:cNvPr id="7" name="Text 5"/>
-          <p:cNvSpPr/>
-          <p:nvPr/>
-        </p:nvSpPr>
-        <p:spPr>
-          <a:xfrm>
-            <a:off x="987552" y="1042416"/>
-            <a:ext cx="1920240" cy="512064"/>
+            <a:endParaRPr lang="en-US" sz="2400" dirty="0"/>
+          </a:p>
+        </p:txBody>
+      </p:sp>
+      <p:sp>
+        <p:nvSpPr>
+          <p:cNvPr id="8" name="Text 6"/>
+          <p:cNvSpPr/>
+          <p:nvPr/>
+        </p:nvSpPr>
+        <p:spPr>
+          <a:xfrm>
+            <a:off x="1005840" y="1078992"/>
+            <a:ext cx="1956816" cy="548640"/>
           </a:xfrm>
           <a:prstGeom prst="rect">
             <a:avLst/>
@@ -5990,7 +6002,7 @@
               <a:buNone/>
             </a:pPr>
             <a:r>
-              <a:rPr lang="en-US" sz="1300" b="1" dirty="0">
+              <a:rPr lang="en-US" sz="1500" b="1" dirty="0">
                 <a:solidFill>
                   <a:srgbClr val="0D9488"/>
                 </a:solidFill>
@@ -6000,20 +6012,20 @@
               </a:rPr>
               <a:t>Interactive Sliders</a:t>
             </a:r>
-            <a:endParaRPr lang="en-US" sz="1300" dirty="0"/>
-          </a:p>
-        </p:txBody>
-      </p:sp>
-      <p:sp>
-        <p:nvSpPr>
-          <p:cNvPr id="8" name="Text 6"/>
-          <p:cNvSpPr/>
-          <p:nvPr/>
-        </p:nvSpPr>
-        <p:spPr>
-          <a:xfrm>
-            <a:off x="384048" y="1609344"/>
-            <a:ext cx="2514600" cy="1042416"/>
+            <a:endParaRPr lang="en-US" sz="1500" dirty="0"/>
+          </a:p>
+        </p:txBody>
+      </p:sp>
+      <p:sp>
+        <p:nvSpPr>
+          <p:cNvPr id="9" name="Text 7"/>
+          <p:cNvSpPr/>
+          <p:nvPr/>
+        </p:nvSpPr>
+        <p:spPr>
+          <a:xfrm>
+            <a:off x="384048" y="1682496"/>
+            <a:ext cx="2578608" cy="987552"/>
           </a:xfrm>
           <a:prstGeom prst="rect">
             <a:avLst/>
@@ -6029,7 +6041,7 @@
               <a:buNone/>
             </a:pPr>
             <a:r>
-              <a:rPr lang="en-US" sz="1000" dirty="0">
+              <a:rPr lang="en-US" sz="1300" dirty="0">
                 <a:solidFill>
                   <a:srgbClr val="1A1A2A"/>
                 </a:solidFill>
@@ -6037,37 +6049,37 @@
                 <a:ea typeface="Calibri" pitchFamily="34" charset="-122"/>
                 <a:cs typeface="Calibri" pitchFamily="34" charset="-120"/>
               </a:rPr>
-              <a:t>Drag magnitude, depth, gap, RMS, location type — hazard level updates instantly without page reload</a:t>
-            </a:r>
-            <a:endParaRPr lang="en-US" sz="1000" dirty="0"/>
-          </a:p>
-        </p:txBody>
-      </p:sp>
-      <p:sp>
-        <p:nvSpPr>
-          <p:cNvPr id="9" name="Shape 7"/>
-          <p:cNvSpPr/>
-          <p:nvPr/>
-        </p:nvSpPr>
-        <p:spPr>
-          <a:xfrm>
-            <a:off x="3218688" y="914400"/>
-            <a:ext cx="2743200" cy="1828800"/>
-          </a:xfrm>
-          <a:prstGeom prst="rect">
-            <a:avLst/>
-          </a:prstGeom>
-          <a:solidFill>
-            <a:srgbClr val="EBF5FB"/>
+              <a:t>Drag magnitude, depth, gap, RMS, location type — hazard level updates instantly</a:t>
+            </a:r>
+            <a:endParaRPr lang="en-US" sz="1300" dirty="0"/>
+          </a:p>
+        </p:txBody>
+      </p:sp>
+      <p:sp>
+        <p:nvSpPr>
+          <p:cNvPr id="10" name="Shape 8"/>
+          <p:cNvSpPr/>
+          <p:nvPr/>
+        </p:nvSpPr>
+        <p:spPr>
+          <a:xfrm>
+            <a:off x="3218688" y="932688"/>
+            <a:ext cx="2816352" cy="1828800"/>
+          </a:xfrm>
+          <a:prstGeom prst="rect">
+            <a:avLst/>
+          </a:prstGeom>
+          <a:solidFill>
+            <a:srgbClr val="EAF4FB"/>
           </a:solidFill>
           <a:ln w="12700">
             <a:solidFill>
-              <a:srgbClr val="065A82"/>
+              <a:srgbClr val="1A5276"/>
             </a:solidFill>
             <a:prstDash val="solid"/>
           </a:ln>
           <a:effectLst>
-            <a:outerShdw sx="100000" sy="100000" kx="0" ky="0" algn="bl" rotWithShape="0" blurRad="101600" dist="25400" dir="8100000">
+            <a:outerShdw sx="100000" sy="100000" kx="0" ky="0" algn="bl" rotWithShape="0" blurRad="127000" dist="38100" dir="8100000">
               <a:srgbClr val="000000">
                 <a:alpha val="10000"/>
               </a:srgbClr>
@@ -6077,24 +6089,24 @@
       </p:sp>
       <p:sp>
         <p:nvSpPr>
-          <p:cNvPr id="10" name="Shape 8"/>
-          <p:cNvSpPr/>
-          <p:nvPr/>
-        </p:nvSpPr>
-        <p:spPr>
-          <a:xfrm>
-            <a:off x="3218688" y="914400"/>
-            <a:ext cx="2743200" cy="73152"/>
-          </a:xfrm>
-          <a:prstGeom prst="rect">
-            <a:avLst/>
-          </a:prstGeom>
-          <a:solidFill>
-            <a:srgbClr val="065A82"/>
+          <p:cNvPr id="11" name="Shape 9"/>
+          <p:cNvSpPr/>
+          <p:nvPr/>
+        </p:nvSpPr>
+        <p:spPr>
+          <a:xfrm>
+            <a:off x="3218688" y="932688"/>
+            <a:ext cx="2816352" cy="82296"/>
+          </a:xfrm>
+          <a:prstGeom prst="rect">
+            <a:avLst/>
+          </a:prstGeom>
+          <a:solidFill>
+            <a:srgbClr val="1A5276"/>
           </a:solidFill>
           <a:ln w="12700">
             <a:solidFill>
-              <a:srgbClr val="065A82"/>
+              <a:srgbClr val="1A5276"/>
             </a:solidFill>
             <a:prstDash val="solid"/>
           </a:ln>
@@ -6102,14 +6114,14 @@
       </p:sp>
       <p:sp>
         <p:nvSpPr>
-          <p:cNvPr id="11" name="Text 9"/>
-          <p:cNvSpPr/>
-          <p:nvPr/>
-        </p:nvSpPr>
-        <p:spPr>
-          <a:xfrm>
-            <a:off x="3218688" y="1042416"/>
-            <a:ext cx="731520" cy="512064"/>
+          <p:cNvPr id="12" name="Text 10"/>
+          <p:cNvSpPr/>
+          <p:nvPr/>
+        </p:nvSpPr>
+        <p:spPr>
+          <a:xfrm>
+            <a:off x="3291840" y="1078992"/>
+            <a:ext cx="640080" cy="548640"/>
           </a:xfrm>
           <a:prstGeom prst="rect">
             <a:avLst/>
@@ -6125,27 +6137,27 @@
               <a:buNone/>
             </a:pPr>
             <a:r>
-              <a:rPr lang="en-US" sz="2200" dirty="0">
+              <a:rPr lang="en-US" sz="2400" dirty="0">
                 <a:solidFill>
                   <a:srgbClr val="000000"/>
                 </a:solidFill>
               </a:rPr>
               <a:t>🗺️</a:t>
             </a:r>
-            <a:endParaRPr lang="en-US" sz="2200" dirty="0"/>
-          </a:p>
-        </p:txBody>
-      </p:sp>
-      <p:sp>
-        <p:nvSpPr>
-          <p:cNvPr id="12" name="Text 10"/>
-          <p:cNvSpPr/>
-          <p:nvPr/>
-        </p:nvSpPr>
-        <p:spPr>
-          <a:xfrm>
-            <a:off x="3931920" y="1042416"/>
-            <a:ext cx="1920240" cy="512064"/>
+            <a:endParaRPr lang="en-US" sz="2400" dirty="0"/>
+          </a:p>
+        </p:txBody>
+      </p:sp>
+      <p:sp>
+        <p:nvSpPr>
+          <p:cNvPr id="13" name="Text 11"/>
+          <p:cNvSpPr/>
+          <p:nvPr/>
+        </p:nvSpPr>
+        <p:spPr>
+          <a:xfrm>
+            <a:off x="3968496" y="1078992"/>
+            <a:ext cx="1956816" cy="548640"/>
           </a:xfrm>
           <a:prstGeom prst="rect">
             <a:avLst/>
@@ -6161,9 +6173,9 @@
               <a:buNone/>
             </a:pPr>
             <a:r>
-              <a:rPr lang="en-US" sz="1300" b="1" dirty="0">
-                <a:solidFill>
-                  <a:srgbClr val="065A82"/>
+              <a:rPr lang="en-US" sz="1500" b="1" dirty="0">
+                <a:solidFill>
+                  <a:srgbClr val="1A5276"/>
                 </a:solidFill>
                 <a:latin typeface="Trebuchet MS" pitchFamily="34" charset="0"/>
                 <a:ea typeface="Trebuchet MS" pitchFamily="34" charset="-122"/>
@@ -6171,20 +6183,20 @@
               </a:rPr>
               <a:t>Live Earthquake Map</a:t>
             </a:r>
-            <a:endParaRPr lang="en-US" sz="1300" dirty="0"/>
-          </a:p>
-        </p:txBody>
-      </p:sp>
-      <p:sp>
-        <p:nvSpPr>
-          <p:cNvPr id="13" name="Text 11"/>
-          <p:cNvSpPr/>
-          <p:nvPr/>
-        </p:nvSpPr>
-        <p:spPr>
-          <a:xfrm>
-            <a:off x="3328416" y="1609344"/>
-            <a:ext cx="2514600" cy="1042416"/>
+            <a:endParaRPr lang="en-US" sz="1500" dirty="0"/>
+          </a:p>
+        </p:txBody>
+      </p:sp>
+      <p:sp>
+        <p:nvSpPr>
+          <p:cNvPr id="14" name="Text 12"/>
+          <p:cNvSpPr/>
+          <p:nvPr/>
+        </p:nvSpPr>
+        <p:spPr>
+          <a:xfrm>
+            <a:off x="3346704" y="1682496"/>
+            <a:ext cx="2578608" cy="987552"/>
           </a:xfrm>
           <a:prstGeom prst="rect">
             <a:avLst/>
@@ -6200,7 +6212,7 @@
               <a:buNone/>
             </a:pPr>
             <a:r>
-              <a:rPr lang="en-US" sz="1000" dirty="0">
+              <a:rPr lang="en-US" sz="1300" dirty="0">
                 <a:solidFill>
                   <a:srgbClr val="1A1A2A"/>
                 </a:solidFill>
@@ -6208,22 +6220,22 @@
                 <a:ea typeface="Calibri" pitchFamily="34" charset="-122"/>
                 <a:cs typeface="Calibri" pitchFamily="34" charset="-120"/>
               </a:rPr>
-              <a:t>Plotly world map with live USGS data — color-coded by hazard level, auto-refreshes every 5 min</a:t>
-            </a:r>
-            <a:endParaRPr lang="en-US" sz="1000" dirty="0"/>
-          </a:p>
-        </p:txBody>
-      </p:sp>
-      <p:sp>
-        <p:nvSpPr>
-          <p:cNvPr id="14" name="Shape 12"/>
-          <p:cNvSpPr/>
-          <p:nvPr/>
-        </p:nvSpPr>
-        <p:spPr>
-          <a:xfrm>
-            <a:off x="6163056" y="914400"/>
-            <a:ext cx="2743200" cy="1828800"/>
+              <a:t>Plotly globe with live USGS data, color-coded by hazard, auto-refreshes every 5 min</a:t>
+            </a:r>
+            <a:endParaRPr lang="en-US" sz="1300" dirty="0"/>
+          </a:p>
+        </p:txBody>
+      </p:sp>
+      <p:sp>
+        <p:nvSpPr>
+          <p:cNvPr id="15" name="Shape 13"/>
+          <p:cNvSpPr/>
+          <p:nvPr/>
+        </p:nvSpPr>
+        <p:spPr>
+          <a:xfrm>
+            <a:off x="6181344" y="932688"/>
+            <a:ext cx="2816352" cy="1828800"/>
           </a:xfrm>
           <a:prstGeom prst="rect">
             <a:avLst/>
@@ -6233,12 +6245,12 @@
           </a:solidFill>
           <a:ln w="12700">
             <a:solidFill>
-              <a:srgbClr val="E67E22"/>
+              <a:srgbClr val="D68910"/>
             </a:solidFill>
             <a:prstDash val="solid"/>
           </a:ln>
           <a:effectLst>
-            <a:outerShdw sx="100000" sy="100000" kx="0" ky="0" algn="bl" rotWithShape="0" blurRad="101600" dist="25400" dir="8100000">
+            <a:outerShdw sx="100000" sy="100000" kx="0" ky="0" algn="bl" rotWithShape="0" blurRad="127000" dist="38100" dir="8100000">
               <a:srgbClr val="000000">
                 <a:alpha val="10000"/>
               </a:srgbClr>
@@ -6248,24 +6260,24 @@
       </p:sp>
       <p:sp>
         <p:nvSpPr>
-          <p:cNvPr id="15" name="Shape 13"/>
-          <p:cNvSpPr/>
-          <p:nvPr/>
-        </p:nvSpPr>
-        <p:spPr>
-          <a:xfrm>
-            <a:off x="6163056" y="914400"/>
-            <a:ext cx="2743200" cy="73152"/>
-          </a:xfrm>
-          <a:prstGeom prst="rect">
-            <a:avLst/>
-          </a:prstGeom>
-          <a:solidFill>
-            <a:srgbClr val="E67E22"/>
+          <p:cNvPr id="16" name="Shape 14"/>
+          <p:cNvSpPr/>
+          <p:nvPr/>
+        </p:nvSpPr>
+        <p:spPr>
+          <a:xfrm>
+            <a:off x="6181344" y="932688"/>
+            <a:ext cx="2816352" cy="82296"/>
+          </a:xfrm>
+          <a:prstGeom prst="rect">
+            <a:avLst/>
+          </a:prstGeom>
+          <a:solidFill>
+            <a:srgbClr val="D68910"/>
           </a:solidFill>
           <a:ln w="12700">
             <a:solidFill>
-              <a:srgbClr val="E67E22"/>
+              <a:srgbClr val="D68910"/>
             </a:solidFill>
             <a:prstDash val="solid"/>
           </a:ln>
@@ -6273,14 +6285,14 @@
       </p:sp>
       <p:sp>
         <p:nvSpPr>
-          <p:cNvPr id="16" name="Text 14"/>
-          <p:cNvSpPr/>
-          <p:nvPr/>
-        </p:nvSpPr>
-        <p:spPr>
-          <a:xfrm>
-            <a:off x="6163056" y="1042416"/>
-            <a:ext cx="731520" cy="512064"/>
+          <p:cNvPr id="17" name="Text 15"/>
+          <p:cNvSpPr/>
+          <p:nvPr/>
+        </p:nvSpPr>
+        <p:spPr>
+          <a:xfrm>
+            <a:off x="6254496" y="1078992"/>
+            <a:ext cx="640080" cy="548640"/>
           </a:xfrm>
           <a:prstGeom prst="rect">
             <a:avLst/>
@@ -6296,27 +6308,27 @@
               <a:buNone/>
             </a:pPr>
             <a:r>
-              <a:rPr lang="en-US" sz="2200" dirty="0">
+              <a:rPr lang="en-US" sz="2400" dirty="0">
                 <a:solidFill>
                   <a:srgbClr val="000000"/>
                 </a:solidFill>
               </a:rPr>
               <a:t>📊</a:t>
             </a:r>
-            <a:endParaRPr lang="en-US" sz="2200" dirty="0"/>
-          </a:p>
-        </p:txBody>
-      </p:sp>
-      <p:sp>
-        <p:nvSpPr>
-          <p:cNvPr id="17" name="Text 15"/>
-          <p:cNvSpPr/>
-          <p:nvPr/>
-        </p:nvSpPr>
-        <p:spPr>
-          <a:xfrm>
-            <a:off x="6876288" y="1042416"/>
-            <a:ext cx="1920240" cy="512064"/>
+            <a:endParaRPr lang="en-US" sz="2400" dirty="0"/>
+          </a:p>
+        </p:txBody>
+      </p:sp>
+      <p:sp>
+        <p:nvSpPr>
+          <p:cNvPr id="18" name="Text 16"/>
+          <p:cNvSpPr/>
+          <p:nvPr/>
+        </p:nvSpPr>
+        <p:spPr>
+          <a:xfrm>
+            <a:off x="6931152" y="1078992"/>
+            <a:ext cx="1956816" cy="548640"/>
           </a:xfrm>
           <a:prstGeom prst="rect">
             <a:avLst/>
@@ -6332,9 +6344,9 @@
               <a:buNone/>
             </a:pPr>
             <a:r>
-              <a:rPr lang="en-US" sz="1300" b="1" dirty="0">
-                <a:solidFill>
-                  <a:srgbClr val="E67E22"/>
+              <a:rPr lang="en-US" sz="1500" b="1" dirty="0">
+                <a:solidFill>
+                  <a:srgbClr val="D68910"/>
                 </a:solidFill>
                 <a:latin typeface="Trebuchet MS" pitchFamily="34" charset="0"/>
                 <a:ea typeface="Trebuchet MS" pitchFamily="34" charset="-122"/>
@@ -6342,20 +6354,20 @@
               </a:rPr>
               <a:t>Probability Display</a:t>
             </a:r>
-            <a:endParaRPr lang="en-US" sz="1300" dirty="0"/>
-          </a:p>
-        </p:txBody>
-      </p:sp>
-      <p:sp>
-        <p:nvSpPr>
-          <p:cNvPr id="18" name="Text 16"/>
-          <p:cNvSpPr/>
-          <p:nvPr/>
-        </p:nvSpPr>
-        <p:spPr>
-          <a:xfrm>
-            <a:off x="6272784" y="1609344"/>
-            <a:ext cx="2514600" cy="1042416"/>
+            <a:endParaRPr lang="en-US" sz="1500" dirty="0"/>
+          </a:p>
+        </p:txBody>
+      </p:sp>
+      <p:sp>
+        <p:nvSpPr>
+          <p:cNvPr id="19" name="Text 17"/>
+          <p:cNvSpPr/>
+          <p:nvPr/>
+        </p:nvSpPr>
+        <p:spPr>
+          <a:xfrm>
+            <a:off x="6309360" y="1682496"/>
+            <a:ext cx="2578608" cy="987552"/>
           </a:xfrm>
           <a:prstGeom prst="rect">
             <a:avLst/>
@@ -6371,7 +6383,7 @@
               <a:buNone/>
             </a:pPr>
             <a:r>
-              <a:rPr lang="en-US" sz="1000" dirty="0">
+              <a:rPr lang="en-US" sz="1300" dirty="0">
                 <a:solidFill>
                   <a:srgbClr val="1A1A2A"/>
                 </a:solidFill>
@@ -6379,22 +6391,22 @@
                 <a:ea typeface="Calibri" pitchFamily="34" charset="-122"/>
                 <a:cs typeface="Calibri" pitchFamily="34" charset="-120"/>
               </a:rPr>
-              <a:t>Shows confidence scores for each class with visual progress bars and a magnitude gauge chart</a:t>
-            </a:r>
-            <a:endParaRPr lang="en-US" sz="1000" dirty="0"/>
-          </a:p>
-        </p:txBody>
-      </p:sp>
-      <p:sp>
-        <p:nvSpPr>
-          <p:cNvPr id="19" name="Shape 17"/>
-          <p:cNvSpPr/>
-          <p:nvPr/>
-        </p:nvSpPr>
-        <p:spPr>
-          <a:xfrm>
-            <a:off x="274320" y="2907792"/>
-            <a:ext cx="2743200" cy="1828800"/>
+              <a:t>Confidence scores for each class, progress bars, magnitude gauge chart</a:t>
+            </a:r>
+            <a:endParaRPr lang="en-US" sz="1300" dirty="0"/>
+          </a:p>
+        </p:txBody>
+      </p:sp>
+      <p:sp>
+        <p:nvSpPr>
+          <p:cNvPr id="20" name="Shape 18"/>
+          <p:cNvSpPr/>
+          <p:nvPr/>
+        </p:nvSpPr>
+        <p:spPr>
+          <a:xfrm>
+            <a:off x="256032" y="2944368"/>
+            <a:ext cx="2816352" cy="1828800"/>
           </a:xfrm>
           <a:prstGeom prst="rect">
             <a:avLst/>
@@ -6404,12 +6416,12 @@
           </a:solidFill>
           <a:ln w="12700">
             <a:solidFill>
-              <a:srgbClr val="8E44AD"/>
+              <a:srgbClr val="7D3C98"/>
             </a:solidFill>
             <a:prstDash val="solid"/>
           </a:ln>
           <a:effectLst>
-            <a:outerShdw sx="100000" sy="100000" kx="0" ky="0" algn="bl" rotWithShape="0" blurRad="101600" dist="25400" dir="8100000">
+            <a:outerShdw sx="100000" sy="100000" kx="0" ky="0" algn="bl" rotWithShape="0" blurRad="127000" dist="38100" dir="8100000">
               <a:srgbClr val="000000">
                 <a:alpha val="10000"/>
               </a:srgbClr>
@@ -6419,24 +6431,24 @@
       </p:sp>
       <p:sp>
         <p:nvSpPr>
-          <p:cNvPr id="20" name="Shape 18"/>
-          <p:cNvSpPr/>
-          <p:nvPr/>
-        </p:nvSpPr>
-        <p:spPr>
-          <a:xfrm>
-            <a:off x="274320" y="2907792"/>
-            <a:ext cx="2743200" cy="73152"/>
-          </a:xfrm>
-          <a:prstGeom prst="rect">
-            <a:avLst/>
-          </a:prstGeom>
-          <a:solidFill>
-            <a:srgbClr val="8E44AD"/>
+          <p:cNvPr id="21" name="Shape 19"/>
+          <p:cNvSpPr/>
+          <p:nvPr/>
+        </p:nvSpPr>
+        <p:spPr>
+          <a:xfrm>
+            <a:off x="256032" y="2944368"/>
+            <a:ext cx="2816352" cy="82296"/>
+          </a:xfrm>
+          <a:prstGeom prst="rect">
+            <a:avLst/>
+          </a:prstGeom>
+          <a:solidFill>
+            <a:srgbClr val="7D3C98"/>
           </a:solidFill>
           <a:ln w="12700">
             <a:solidFill>
-              <a:srgbClr val="8E44AD"/>
+              <a:srgbClr val="7D3C98"/>
             </a:solidFill>
             <a:prstDash val="solid"/>
           </a:ln>
@@ -6444,14 +6456,14 @@
       </p:sp>
       <p:sp>
         <p:nvSpPr>
-          <p:cNvPr id="21" name="Text 19"/>
-          <p:cNvSpPr/>
-          <p:nvPr/>
-        </p:nvSpPr>
-        <p:spPr>
-          <a:xfrm>
-            <a:off x="274320" y="3035808"/>
-            <a:ext cx="731520" cy="512064"/>
+          <p:cNvPr id="22" name="Text 20"/>
+          <p:cNvSpPr/>
+          <p:nvPr/>
+        </p:nvSpPr>
+        <p:spPr>
+          <a:xfrm>
+            <a:off x="329184" y="3090672"/>
+            <a:ext cx="640080" cy="548640"/>
           </a:xfrm>
           <a:prstGeom prst="rect">
             <a:avLst/>
@@ -6467,27 +6479,27 @@
               <a:buNone/>
             </a:pPr>
             <a:r>
-              <a:rPr lang="en-US" sz="2200" dirty="0">
+              <a:rPr lang="en-US" sz="2400" dirty="0">
                 <a:solidFill>
                   <a:srgbClr val="000000"/>
                 </a:solidFill>
               </a:rPr>
               <a:t>⚡</a:t>
             </a:r>
-            <a:endParaRPr lang="en-US" sz="2200" dirty="0"/>
-          </a:p>
-        </p:txBody>
-      </p:sp>
-      <p:sp>
-        <p:nvSpPr>
-          <p:cNvPr id="22" name="Text 20"/>
-          <p:cNvSpPr/>
-          <p:nvPr/>
-        </p:nvSpPr>
-        <p:spPr>
-          <a:xfrm>
-            <a:off x="987552" y="3035808"/>
-            <a:ext cx="1920240" cy="512064"/>
+            <a:endParaRPr lang="en-US" sz="2400" dirty="0"/>
+          </a:p>
+        </p:txBody>
+      </p:sp>
+      <p:sp>
+        <p:nvSpPr>
+          <p:cNvPr id="23" name="Text 21"/>
+          <p:cNvSpPr/>
+          <p:nvPr/>
+        </p:nvSpPr>
+        <p:spPr>
+          <a:xfrm>
+            <a:off x="1005840" y="3090672"/>
+            <a:ext cx="1956816" cy="548640"/>
           </a:xfrm>
           <a:prstGeom prst="rect">
             <a:avLst/>
@@ -6503,9 +6515,9 @@
               <a:buNone/>
             </a:pPr>
             <a:r>
-              <a:rPr lang="en-US" sz="1300" b="1" dirty="0">
-                <a:solidFill>
-                  <a:srgbClr val="8E44AD"/>
+              <a:rPr lang="en-US" sz="1500" b="1" dirty="0">
+                <a:solidFill>
+                  <a:srgbClr val="7D3C98"/>
                 </a:solidFill>
                 <a:latin typeface="Trebuchet MS" pitchFamily="34" charset="0"/>
                 <a:ea typeface="Trebuchet MS" pitchFamily="34" charset="-122"/>
@@ -6513,20 +6525,20 @@
               </a:rPr>
               <a:t>Flask REST API</a:t>
             </a:r>
-            <a:endParaRPr lang="en-US" sz="1300" dirty="0"/>
-          </a:p>
-        </p:txBody>
-      </p:sp>
-      <p:sp>
-        <p:nvSpPr>
-          <p:cNvPr id="23" name="Text 21"/>
-          <p:cNvSpPr/>
-          <p:nvPr/>
-        </p:nvSpPr>
-        <p:spPr>
-          <a:xfrm>
-            <a:off x="384048" y="3602736"/>
-            <a:ext cx="2514600" cy="1042416"/>
+            <a:endParaRPr lang="en-US" sz="1500" dirty="0"/>
+          </a:p>
+        </p:txBody>
+      </p:sp>
+      <p:sp>
+        <p:nvSpPr>
+          <p:cNvPr id="24" name="Text 22"/>
+          <p:cNvSpPr/>
+          <p:nvPr/>
+        </p:nvSpPr>
+        <p:spPr>
+          <a:xfrm>
+            <a:off x="384048" y="3694176"/>
+            <a:ext cx="2578608" cy="987552"/>
           </a:xfrm>
           <a:prstGeom prst="rect">
             <a:avLst/>
@@ -6542,7 +6554,7 @@
               <a:buNone/>
             </a:pPr>
             <a:r>
-              <a:rPr lang="en-US" sz="1000" dirty="0">
+              <a:rPr lang="en-US" sz="1300" dirty="0">
                 <a:solidFill>
                   <a:srgbClr val="1A1A2A"/>
                 </a:solidFill>
@@ -6550,37 +6562,37 @@
                 <a:ea typeface="Calibri" pitchFamily="34" charset="-122"/>
                 <a:cs typeface="Calibri" pitchFamily="34" charset="-120"/>
               </a:rPr>
-              <a:t>POST /predict endpoint returns JSON with hazard_label, probabilities, and hex color — ready for integration</a:t>
-            </a:r>
-            <a:endParaRPr lang="en-US" sz="1000" dirty="0"/>
-          </a:p>
-        </p:txBody>
-      </p:sp>
-      <p:sp>
-        <p:nvSpPr>
-          <p:cNvPr id="24" name="Shape 22"/>
-          <p:cNvSpPr/>
-          <p:nvPr/>
-        </p:nvSpPr>
-        <p:spPr>
-          <a:xfrm>
-            <a:off x="3218688" y="2907792"/>
-            <a:ext cx="2743200" cy="1828800"/>
-          </a:xfrm>
-          <a:prstGeom prst="rect">
-            <a:avLst/>
-          </a:prstGeom>
-          <a:solidFill>
-            <a:srgbClr val="EAFAF1"/>
+              <a:t>POST /predict returns hazard_label, probabilities, hex color in JSON</a:t>
+            </a:r>
+            <a:endParaRPr lang="en-US" sz="1300" dirty="0"/>
+          </a:p>
+        </p:txBody>
+      </p:sp>
+      <p:sp>
+        <p:nvSpPr>
+          <p:cNvPr id="25" name="Shape 23"/>
+          <p:cNvSpPr/>
+          <p:nvPr/>
+        </p:nvSpPr>
+        <p:spPr>
+          <a:xfrm>
+            <a:off x="3218688" y="2944368"/>
+            <a:ext cx="2816352" cy="1828800"/>
+          </a:xfrm>
+          <a:prstGeom prst="rect">
+            <a:avLst/>
+          </a:prstGeom>
+          <a:solidFill>
+            <a:srgbClr val="E9F7EF"/>
           </a:solidFill>
           <a:ln w="12700">
             <a:solidFill>
-              <a:srgbClr val="27AE60"/>
+              <a:srgbClr val="1E8449"/>
             </a:solidFill>
             <a:prstDash val="solid"/>
           </a:ln>
           <a:effectLst>
-            <a:outerShdw sx="100000" sy="100000" kx="0" ky="0" algn="bl" rotWithShape="0" blurRad="101600" dist="25400" dir="8100000">
+            <a:outerShdw sx="100000" sy="100000" kx="0" ky="0" algn="bl" rotWithShape="0" blurRad="127000" dist="38100" dir="8100000">
               <a:srgbClr val="000000">
                 <a:alpha val="10000"/>
               </a:srgbClr>
@@ -6590,24 +6602,24 @@
       </p:sp>
       <p:sp>
         <p:nvSpPr>
-          <p:cNvPr id="25" name="Shape 23"/>
-          <p:cNvSpPr/>
-          <p:nvPr/>
-        </p:nvSpPr>
-        <p:spPr>
-          <a:xfrm>
-            <a:off x="3218688" y="2907792"/>
-            <a:ext cx="2743200" cy="73152"/>
-          </a:xfrm>
-          <a:prstGeom prst="rect">
-            <a:avLst/>
-          </a:prstGeom>
-          <a:solidFill>
-            <a:srgbClr val="27AE60"/>
+          <p:cNvPr id="26" name="Shape 24"/>
+          <p:cNvSpPr/>
+          <p:nvPr/>
+        </p:nvSpPr>
+        <p:spPr>
+          <a:xfrm>
+            <a:off x="3218688" y="2944368"/>
+            <a:ext cx="2816352" cy="82296"/>
+          </a:xfrm>
+          <a:prstGeom prst="rect">
+            <a:avLst/>
+          </a:prstGeom>
+          <a:solidFill>
+            <a:srgbClr val="1E8449"/>
           </a:solidFill>
           <a:ln w="12700">
             <a:solidFill>
-              <a:srgbClr val="27AE60"/>
+              <a:srgbClr val="1E8449"/>
             </a:solidFill>
             <a:prstDash val="solid"/>
           </a:ln>
@@ -6615,14 +6627,14 @@
       </p:sp>
       <p:sp>
         <p:nvSpPr>
-          <p:cNvPr id="26" name="Text 24"/>
-          <p:cNvSpPr/>
-          <p:nvPr/>
-        </p:nvSpPr>
-        <p:spPr>
-          <a:xfrm>
-            <a:off x="3218688" y="3035808"/>
-            <a:ext cx="731520" cy="512064"/>
+          <p:cNvPr id="27" name="Text 25"/>
+          <p:cNvSpPr/>
+          <p:nvPr/>
+        </p:nvSpPr>
+        <p:spPr>
+          <a:xfrm>
+            <a:off x="3291840" y="3090672"/>
+            <a:ext cx="640080" cy="548640"/>
           </a:xfrm>
           <a:prstGeom prst="rect">
             <a:avLst/>
@@ -6638,27 +6650,27 @@
               <a:buNone/>
             </a:pPr>
             <a:r>
-              <a:rPr lang="en-US" sz="2200" dirty="0">
+              <a:rPr lang="en-US" sz="2400" dirty="0">
                 <a:solidFill>
                   <a:srgbClr val="000000"/>
                 </a:solidFill>
               </a:rPr>
               <a:t>🌐</a:t>
             </a:r>
-            <a:endParaRPr lang="en-US" sz="2200" dirty="0"/>
-          </a:p>
-        </p:txBody>
-      </p:sp>
-      <p:sp>
-        <p:nvSpPr>
-          <p:cNvPr id="27" name="Text 25"/>
-          <p:cNvSpPr/>
-          <p:nvPr/>
-        </p:nvSpPr>
-        <p:spPr>
-          <a:xfrm>
-            <a:off x="3931920" y="3035808"/>
-            <a:ext cx="1920240" cy="512064"/>
+            <a:endParaRPr lang="en-US" sz="2400" dirty="0"/>
+          </a:p>
+        </p:txBody>
+      </p:sp>
+      <p:sp>
+        <p:nvSpPr>
+          <p:cNvPr id="28" name="Text 26"/>
+          <p:cNvSpPr/>
+          <p:nvPr/>
+        </p:nvSpPr>
+        <p:spPr>
+          <a:xfrm>
+            <a:off x="3968496" y="3090672"/>
+            <a:ext cx="1956816" cy="548640"/>
           </a:xfrm>
           <a:prstGeom prst="rect">
             <a:avLst/>
@@ -6674,30 +6686,30 @@
               <a:buNone/>
             </a:pPr>
             <a:r>
-              <a:rPr lang="en-US" sz="1300" b="1" dirty="0">
-                <a:solidFill>
-                  <a:srgbClr val="27AE60"/>
+              <a:rPr lang="en-US" sz="1500" b="1" dirty="0">
+                <a:solidFill>
+                  <a:srgbClr val="1E8449"/>
                 </a:solidFill>
                 <a:latin typeface="Trebuchet MS" pitchFamily="34" charset="0"/>
                 <a:ea typeface="Trebuchet MS" pitchFamily="34" charset="-122"/>
                 <a:cs typeface="Trebuchet MS" pitchFamily="34" charset="-120"/>
               </a:rPr>
-              <a:t>Live USGS Proxy</a:t>
-            </a:r>
-            <a:endParaRPr lang="en-US" sz="1300" dirty="0"/>
-          </a:p>
-        </p:txBody>
-      </p:sp>
-      <p:sp>
-        <p:nvSpPr>
-          <p:cNvPr id="28" name="Text 26"/>
-          <p:cNvSpPr/>
-          <p:nvPr/>
-        </p:nvSpPr>
-        <p:spPr>
-          <a:xfrm>
-            <a:off x="3328416" y="3602736"/>
-            <a:ext cx="2514600" cy="1042416"/>
+              <a:t>USGS Live Proxy</a:t>
+            </a:r>
+            <a:endParaRPr lang="en-US" sz="1500" dirty="0"/>
+          </a:p>
+        </p:txBody>
+      </p:sp>
+      <p:sp>
+        <p:nvSpPr>
+          <p:cNvPr id="29" name="Text 27"/>
+          <p:cNvSpPr/>
+          <p:nvPr/>
+        </p:nvSpPr>
+        <p:spPr>
+          <a:xfrm>
+            <a:off x="3346704" y="3694176"/>
+            <a:ext cx="2578608" cy="987552"/>
           </a:xfrm>
           <a:prstGeom prst="rect">
             <a:avLst/>
@@ -6713,7 +6725,7 @@
               <a:buNone/>
             </a:pPr>
             <a:r>
-              <a:rPr lang="en-US" sz="1000" dirty="0">
+              <a:rPr lang="en-US" sz="1300" dirty="0">
                 <a:solidFill>
                   <a:srgbClr val="1A1A2A"/>
                 </a:solidFill>
@@ -6721,22 +6733,22 @@
                 <a:ea typeface="Calibri" pitchFamily="34" charset="-122"/>
                 <a:cs typeface="Calibri" pitchFamily="34" charset="-120"/>
               </a:rPr>
-              <a:t>GET /recent fetches last 24h earthquakes in real time — feeds the Streamlit map with zero extra setup</a:t>
-            </a:r>
-            <a:endParaRPr lang="en-US" sz="1000" dirty="0"/>
-          </a:p>
-        </p:txBody>
-      </p:sp>
-      <p:sp>
-        <p:nvSpPr>
-          <p:cNvPr id="29" name="Shape 27"/>
-          <p:cNvSpPr/>
-          <p:nvPr/>
-        </p:nvSpPr>
-        <p:spPr>
-          <a:xfrm>
-            <a:off x="6163056" y="2907792"/>
-            <a:ext cx="2743200" cy="1828800"/>
+              <a:t>GET /recent fetches last 24h earthquakes in real time for the map feed</a:t>
+            </a:r>
+            <a:endParaRPr lang="en-US" sz="1300" dirty="0"/>
+          </a:p>
+        </p:txBody>
+      </p:sp>
+      <p:sp>
+        <p:nvSpPr>
+          <p:cNvPr id="30" name="Shape 28"/>
+          <p:cNvSpPr/>
+          <p:nvPr/>
+        </p:nvSpPr>
+        <p:spPr>
+          <a:xfrm>
+            <a:off x="6181344" y="2944368"/>
+            <a:ext cx="2816352" cy="1828800"/>
           </a:xfrm>
           <a:prstGeom prst="rect">
             <a:avLst/>
@@ -6746,12 +6758,12 @@
           </a:solidFill>
           <a:ln w="12700">
             <a:solidFill>
-              <a:srgbClr val="E74C3C"/>
+              <a:srgbClr val="C0392B"/>
             </a:solidFill>
             <a:prstDash val="solid"/>
           </a:ln>
           <a:effectLst>
-            <a:outerShdw sx="100000" sy="100000" kx="0" ky="0" algn="bl" rotWithShape="0" blurRad="101600" dist="25400" dir="8100000">
+            <a:outerShdw sx="100000" sy="100000" kx="0" ky="0" algn="bl" rotWithShape="0" blurRad="127000" dist="38100" dir="8100000">
               <a:srgbClr val="000000">
                 <a:alpha val="10000"/>
               </a:srgbClr>
@@ -6761,24 +6773,24 @@
       </p:sp>
       <p:sp>
         <p:nvSpPr>
-          <p:cNvPr id="30" name="Shape 28"/>
-          <p:cNvSpPr/>
-          <p:nvPr/>
-        </p:nvSpPr>
-        <p:spPr>
-          <a:xfrm>
-            <a:off x="6163056" y="2907792"/>
-            <a:ext cx="2743200" cy="73152"/>
-          </a:xfrm>
-          <a:prstGeom prst="rect">
-            <a:avLst/>
-          </a:prstGeom>
-          <a:solidFill>
-            <a:srgbClr val="E74C3C"/>
+          <p:cNvPr id="31" name="Shape 29"/>
+          <p:cNvSpPr/>
+          <p:nvPr/>
+        </p:nvSpPr>
+        <p:spPr>
+          <a:xfrm>
+            <a:off x="6181344" y="2944368"/>
+            <a:ext cx="2816352" cy="82296"/>
+          </a:xfrm>
+          <a:prstGeom prst="rect">
+            <a:avLst/>
+          </a:prstGeom>
+          <a:solidFill>
+            <a:srgbClr val="C0392B"/>
           </a:solidFill>
           <a:ln w="12700">
             <a:solidFill>
-              <a:srgbClr val="E74C3C"/>
+              <a:srgbClr val="C0392B"/>
             </a:solidFill>
             <a:prstDash val="solid"/>
           </a:ln>
@@ -6786,14 +6798,14 @@
       </p:sp>
       <p:sp>
         <p:nvSpPr>
-          <p:cNvPr id="31" name="Text 29"/>
-          <p:cNvSpPr/>
-          <p:nvPr/>
-        </p:nvSpPr>
-        <p:spPr>
-          <a:xfrm>
-            <a:off x="6163056" y="3035808"/>
-            <a:ext cx="731520" cy="512064"/>
+          <p:cNvPr id="32" name="Text 30"/>
+          <p:cNvSpPr/>
+          <p:nvPr/>
+        </p:nvSpPr>
+        <p:spPr>
+          <a:xfrm>
+            <a:off x="6254496" y="3090672"/>
+            <a:ext cx="640080" cy="548640"/>
           </a:xfrm>
           <a:prstGeom prst="rect">
             <a:avLst/>
@@ -6809,27 +6821,27 @@
               <a:buNone/>
             </a:pPr>
             <a:r>
-              <a:rPr lang="en-US" sz="2200" dirty="0">
+              <a:rPr lang="en-US" sz="2400" dirty="0">
                 <a:solidFill>
                   <a:srgbClr val="000000"/>
                 </a:solidFill>
               </a:rPr>
               <a:t>🐳</a:t>
             </a:r>
-            <a:endParaRPr lang="en-US" sz="2200" dirty="0"/>
-          </a:p>
-        </p:txBody>
-      </p:sp>
-      <p:sp>
-        <p:nvSpPr>
-          <p:cNvPr id="32" name="Text 30"/>
-          <p:cNvSpPr/>
-          <p:nvPr/>
-        </p:nvSpPr>
-        <p:spPr>
-          <a:xfrm>
-            <a:off x="6876288" y="3035808"/>
-            <a:ext cx="1920240" cy="512064"/>
+            <a:endParaRPr lang="en-US" sz="2400" dirty="0"/>
+          </a:p>
+        </p:txBody>
+      </p:sp>
+      <p:sp>
+        <p:nvSpPr>
+          <p:cNvPr id="33" name="Text 31"/>
+          <p:cNvSpPr/>
+          <p:nvPr/>
+        </p:nvSpPr>
+        <p:spPr>
+          <a:xfrm>
+            <a:off x="6931152" y="3090672"/>
+            <a:ext cx="1956816" cy="548640"/>
           </a:xfrm>
           <a:prstGeom prst="rect">
             <a:avLst/>
@@ -6845,30 +6857,30 @@
               <a:buNone/>
             </a:pPr>
             <a:r>
-              <a:rPr lang="en-US" sz="1300" b="1" dirty="0">
-                <a:solidFill>
-                  <a:srgbClr val="E74C3C"/>
+              <a:rPr lang="en-US" sz="1500" b="1" dirty="0">
+                <a:solidFill>
+                  <a:srgbClr val="C0392B"/>
                 </a:solidFill>
                 <a:latin typeface="Trebuchet MS" pitchFamily="34" charset="0"/>
                 <a:ea typeface="Trebuchet MS" pitchFamily="34" charset="-122"/>
                 <a:cs typeface="Trebuchet MS" pitchFamily="34" charset="-120"/>
               </a:rPr>
-              <a:t>Containerised Deploy</a:t>
-            </a:r>
-            <a:endParaRPr lang="en-US" sz="1300" dirty="0"/>
-          </a:p>
-        </p:txBody>
-      </p:sp>
-      <p:sp>
-        <p:nvSpPr>
-          <p:cNvPr id="33" name="Text 31"/>
-          <p:cNvSpPr/>
-          <p:nvPr/>
-        </p:nvSpPr>
-        <p:spPr>
-          <a:xfrm>
-            <a:off x="6272784" y="3602736"/>
-            <a:ext cx="2514600" cy="1042416"/>
+              <a:t>Docker + Cloud Run</a:t>
+            </a:r>
+            <a:endParaRPr lang="en-US" sz="1500" dirty="0"/>
+          </a:p>
+        </p:txBody>
+      </p:sp>
+      <p:sp>
+        <p:nvSpPr>
+          <p:cNvPr id="34" name="Text 32"/>
+          <p:cNvSpPr/>
+          <p:nvPr/>
+        </p:nvSpPr>
+        <p:spPr>
+          <a:xfrm>
+            <a:off x="6309360" y="3694176"/>
+            <a:ext cx="2578608" cy="987552"/>
           </a:xfrm>
           <a:prstGeom prst="rect">
             <a:avLst/>
@@ -6884,7 +6896,7 @@
               <a:buNone/>
             </a:pPr>
             <a:r>
-              <a:rPr lang="en-US" sz="1000" dirty="0">
+              <a:rPr lang="en-US" sz="1300" dirty="0">
                 <a:solidFill>
                   <a:srgbClr val="1A1A2A"/>
                 </a:solidFill>
@@ -6892,9 +6904,9 @@
                 <a:ea typeface="Calibri" pitchFamily="34" charset="-122"/>
                 <a:cs typeface="Calibri" pitchFamily="34" charset="-120"/>
               </a:rPr>
-              <a:t>Docker + Google Cloud Run — scalable, serverless, stays live from June 2 to June 9 for grading</a:t>
-            </a:r>
-            <a:endParaRPr lang="en-US" sz="1000" dirty="0"/>
+              <a:t>Containerised, serverless deployment — app stays live June 2 to June 9</a:t>
+            </a:r>
+            <a:endParaRPr lang="en-US" sz="1300" dirty="0"/>
           </a:p>
         </p:txBody>
       </p:sp>
@@ -6912,7 +6924,7 @@
     <p:bg>
       <p:bgPr>
         <a:solidFill>
-          <a:srgbClr val="1E3A5F"/>
+          <a:srgbClr val="FFFFFF"/>
         </a:solidFill>
       </p:bgPr>
     </p:bg>
@@ -6939,17 +6951,17 @@
         <p:spPr>
           <a:xfrm>
             <a:off x="0" y="0"/>
-            <a:ext cx="201168" cy="5143500"/>
-          </a:xfrm>
-          <a:prstGeom prst="rect">
-            <a:avLst/>
-          </a:prstGeom>
-          <a:solidFill>
-            <a:srgbClr val="0D9488"/>
+            <a:ext cx="9144000" cy="777240"/>
+          </a:xfrm>
+          <a:prstGeom prst="rect">
+            <a:avLst/>
+          </a:prstGeom>
+          <a:solidFill>
+            <a:srgbClr val="1A5276"/>
           </a:solidFill>
           <a:ln w="12700">
             <a:solidFill>
-              <a:srgbClr val="0D9488"/>
+              <a:srgbClr val="1A5276"/>
             </a:solidFill>
             <a:prstDash val="solid"/>
           </a:ln>
@@ -6957,14 +6969,39 @@
       </p:sp>
       <p:sp>
         <p:nvSpPr>
-          <p:cNvPr id="3" name="Text 1"/>
-          <p:cNvSpPr/>
-          <p:nvPr/>
-        </p:nvSpPr>
-        <p:spPr>
-          <a:xfrm>
-            <a:off x="457200" y="256032"/>
-            <a:ext cx="8412480" cy="512064"/>
+          <p:cNvPr id="3" name="Shape 1"/>
+          <p:cNvSpPr/>
+          <p:nvPr/>
+        </p:nvSpPr>
+        <p:spPr>
+          <a:xfrm>
+            <a:off x="0" y="0"/>
+            <a:ext cx="164592" cy="777240"/>
+          </a:xfrm>
+          <a:prstGeom prst="rect">
+            <a:avLst/>
+          </a:prstGeom>
+          <a:solidFill>
+            <a:srgbClr val="0D9488"/>
+          </a:solidFill>
+          <a:ln w="12700">
+            <a:solidFill>
+              <a:srgbClr val="0D9488"/>
+            </a:solidFill>
+            <a:prstDash val="solid"/>
+          </a:ln>
+        </p:spPr>
+      </p:sp>
+      <p:sp>
+        <p:nvSpPr>
+          <p:cNvPr id="4" name="Text 2"/>
+          <p:cNvSpPr/>
+          <p:nvPr/>
+        </p:nvSpPr>
+        <p:spPr>
+          <a:xfrm>
+            <a:off x="320040" y="0"/>
+            <a:ext cx="8595360" cy="777240"/>
           </a:xfrm>
           <a:prstGeom prst="rect">
             <a:avLst/>
@@ -6980,7 +7017,7 @@
               <a:buNone/>
             </a:pPr>
             <a:r>
-              <a:rPr lang="en-US" sz="2600" b="1" dirty="0">
+              <a:rPr lang="en-US" sz="3000" b="1" dirty="0">
                 <a:solidFill>
                   <a:srgbClr val="FFFFFF"/>
                 </a:solidFill>
@@ -6990,30 +7027,30 @@
               </a:rPr>
               <a:t>Challenges, Learnings &amp; Future Work</a:t>
             </a:r>
-            <a:endParaRPr lang="en-US" sz="2600" dirty="0"/>
-          </a:p>
-        </p:txBody>
-      </p:sp>
-      <p:sp>
-        <p:nvSpPr>
-          <p:cNvPr id="4" name="Shape 2"/>
-          <p:cNvSpPr/>
-          <p:nvPr/>
-        </p:nvSpPr>
-        <p:spPr>
-          <a:xfrm>
-            <a:off x="438912" y="896112"/>
-            <a:ext cx="2697480" cy="512064"/>
-          </a:xfrm>
-          <a:prstGeom prst="rect">
-            <a:avLst/>
-          </a:prstGeom>
-          <a:solidFill>
-            <a:srgbClr val="E74C3C"/>
+            <a:endParaRPr lang="en-US" sz="3000" dirty="0"/>
+          </a:p>
+        </p:txBody>
+      </p:sp>
+      <p:sp>
+        <p:nvSpPr>
+          <p:cNvPr id="5" name="Shape 3"/>
+          <p:cNvSpPr/>
+          <p:nvPr/>
+        </p:nvSpPr>
+        <p:spPr>
+          <a:xfrm>
+            <a:off x="256032" y="914400"/>
+            <a:ext cx="2816352" cy="530352"/>
+          </a:xfrm>
+          <a:prstGeom prst="rect">
+            <a:avLst/>
+          </a:prstGeom>
+          <a:solidFill>
+            <a:srgbClr val="C0392B"/>
           </a:solidFill>
           <a:ln w="12700">
             <a:solidFill>
-              <a:srgbClr val="E74C3C"/>
+              <a:srgbClr val="C0392B"/>
             </a:solidFill>
             <a:prstDash val="solid"/>
           </a:ln>
@@ -7021,14 +7058,14 @@
       </p:sp>
       <p:sp>
         <p:nvSpPr>
-          <p:cNvPr id="5" name="Text 3"/>
-          <p:cNvSpPr/>
-          <p:nvPr/>
-        </p:nvSpPr>
-        <p:spPr>
-          <a:xfrm>
-            <a:off x="438912" y="896112"/>
-            <a:ext cx="2697480" cy="512064"/>
+          <p:cNvPr id="6" name="Text 4"/>
+          <p:cNvSpPr/>
+          <p:nvPr/>
+        </p:nvSpPr>
+        <p:spPr>
+          <a:xfrm>
+            <a:off x="256032" y="914400"/>
+            <a:ext cx="2816352" cy="530352"/>
           </a:xfrm>
           <a:prstGeom prst="rect">
             <a:avLst/>
@@ -7044,7 +7081,7 @@
               <a:buNone/>
             </a:pPr>
             <a:r>
-              <a:rPr lang="en-US" sz="1500" b="1" dirty="0">
+              <a:rPr lang="en-US" sz="1800" b="1" dirty="0">
                 <a:solidFill>
                   <a:srgbClr val="FFFFFF"/>
                 </a:solidFill>
@@ -7054,55 +7091,62 @@
               </a:rPr>
               <a:t>⚡  Challenges</a:t>
             </a:r>
-            <a:endParaRPr lang="en-US" sz="1500" dirty="0"/>
-          </a:p>
-        </p:txBody>
-      </p:sp>
-      <p:sp>
-        <p:nvSpPr>
-          <p:cNvPr id="6" name="Shape 4"/>
-          <p:cNvSpPr/>
-          <p:nvPr/>
-        </p:nvSpPr>
-        <p:spPr>
-          <a:xfrm>
-            <a:off x="438912" y="1554480"/>
-            <a:ext cx="2697480" cy="749808"/>
-          </a:xfrm>
-          <a:prstGeom prst="rect">
-            <a:avLst/>
-          </a:prstGeom>
-          <a:solidFill>
-            <a:srgbClr val="1E3A5F"/>
+            <a:endParaRPr lang="en-US" sz="1800" dirty="0"/>
+          </a:p>
+        </p:txBody>
+      </p:sp>
+      <p:sp>
+        <p:nvSpPr>
+          <p:cNvPr id="7" name="Shape 5"/>
+          <p:cNvSpPr/>
+          <p:nvPr/>
+        </p:nvSpPr>
+        <p:spPr>
+          <a:xfrm>
+            <a:off x="256032" y="1517904"/>
+            <a:ext cx="2816352" cy="713232"/>
+          </a:xfrm>
+          <a:prstGeom prst="rect">
+            <a:avLst/>
+          </a:prstGeom>
+          <a:solidFill>
+            <a:srgbClr val="FDEDEC"/>
           </a:solidFill>
           <a:ln w="12700">
             <a:solidFill>
-              <a:srgbClr val="E74C3C"/>
+              <a:srgbClr val="F5B7B1"/>
             </a:solidFill>
             <a:prstDash val="solid"/>
           </a:ln>
-        </p:spPr>
-      </p:sp>
-      <p:sp>
-        <p:nvSpPr>
-          <p:cNvPr id="7" name="Shape 5"/>
-          <p:cNvSpPr/>
-          <p:nvPr/>
-        </p:nvSpPr>
-        <p:spPr>
-          <a:xfrm>
-            <a:off x="438912" y="1554480"/>
-            <a:ext cx="64008" cy="749808"/>
-          </a:xfrm>
-          <a:prstGeom prst="rect">
-            <a:avLst/>
-          </a:prstGeom>
-          <a:solidFill>
-            <a:srgbClr val="E74C3C"/>
+          <a:effectLst>
+            <a:outerShdw sx="100000" sy="100000" kx="0" ky="0" algn="bl" rotWithShape="0" blurRad="127000" dist="38100" dir="8100000">
+              <a:srgbClr val="000000">
+                <a:alpha val="10000"/>
+              </a:srgbClr>
+            </a:outerShdw>
+          </a:effectLst>
+        </p:spPr>
+      </p:sp>
+      <p:sp>
+        <p:nvSpPr>
+          <p:cNvPr id="8" name="Shape 6"/>
+          <p:cNvSpPr/>
+          <p:nvPr/>
+        </p:nvSpPr>
+        <p:spPr>
+          <a:xfrm>
+            <a:off x="256032" y="1517904"/>
+            <a:ext cx="91440" cy="713232"/>
+          </a:xfrm>
+          <a:prstGeom prst="rect">
+            <a:avLst/>
+          </a:prstGeom>
+          <a:solidFill>
+            <a:srgbClr val="C0392B"/>
           </a:solidFill>
           <a:ln w="12700">
             <a:solidFill>
-              <a:srgbClr val="E74C3C"/>
+              <a:srgbClr val="C0392B"/>
             </a:solidFill>
             <a:prstDash val="solid"/>
           </a:ln>
@@ -7110,14 +7154,14 @@
       </p:sp>
       <p:sp>
         <p:nvSpPr>
-          <p:cNvPr id="8" name="Text 6"/>
-          <p:cNvSpPr/>
-          <p:nvPr/>
-        </p:nvSpPr>
-        <p:spPr>
-          <a:xfrm>
-            <a:off x="585216" y="1609344"/>
-            <a:ext cx="2468880" cy="640080"/>
+          <p:cNvPr id="9" name="Text 7"/>
+          <p:cNvSpPr/>
+          <p:nvPr/>
+        </p:nvSpPr>
+        <p:spPr>
+          <a:xfrm>
+            <a:off x="420624" y="1572768"/>
+            <a:ext cx="2560320" cy="603504"/>
           </a:xfrm>
           <a:prstGeom prst="rect">
             <a:avLst/>
@@ -7133,65 +7177,72 @@
               <a:buNone/>
             </a:pPr>
             <a:r>
-              <a:rPr lang="en-US" sz="950" dirty="0">
-                <a:solidFill>
-                  <a:srgbClr val="D6EAF8"/>
+              <a:rPr lang="en-US" sz="1200" dirty="0">
+                <a:solidFill>
+                  <a:srgbClr val="1A1A2A"/>
                 </a:solidFill>
                 <a:latin typeface="Calibri" pitchFamily="34" charset="0"/>
                 <a:ea typeface="Calibri" pitchFamily="34" charset="-122"/>
                 <a:cs typeface="Calibri" pitchFamily="34" charset="-120"/>
               </a:rPr>
-              <a:t>Severe class imbalance — only 7 High events in 2,000 records</a:t>
-            </a:r>
-            <a:endParaRPr lang="en-US" sz="950" dirty="0"/>
-          </a:p>
-        </p:txBody>
-      </p:sp>
-      <p:sp>
-        <p:nvSpPr>
-          <p:cNvPr id="9" name="Shape 7"/>
-          <p:cNvSpPr/>
-          <p:nvPr/>
-        </p:nvSpPr>
-        <p:spPr>
-          <a:xfrm>
-            <a:off x="438912" y="2377440"/>
-            <a:ext cx="2697480" cy="749808"/>
-          </a:xfrm>
-          <a:prstGeom prst="rect">
-            <a:avLst/>
-          </a:prstGeom>
-          <a:solidFill>
-            <a:srgbClr val="1E3A5F"/>
+              <a:t>Severe class imbalance — only 7 High-hazard events in 2,000 records</a:t>
+            </a:r>
+            <a:endParaRPr lang="en-US" sz="1200" dirty="0"/>
+          </a:p>
+        </p:txBody>
+      </p:sp>
+      <p:sp>
+        <p:nvSpPr>
+          <p:cNvPr id="10" name="Shape 8"/>
+          <p:cNvSpPr/>
+          <p:nvPr/>
+        </p:nvSpPr>
+        <p:spPr>
+          <a:xfrm>
+            <a:off x="256032" y="2322576"/>
+            <a:ext cx="2816352" cy="713232"/>
+          </a:xfrm>
+          <a:prstGeom prst="rect">
+            <a:avLst/>
+          </a:prstGeom>
+          <a:solidFill>
+            <a:srgbClr val="FDEDEC"/>
           </a:solidFill>
           <a:ln w="12700">
             <a:solidFill>
-              <a:srgbClr val="E74C3C"/>
+              <a:srgbClr val="F5B7B1"/>
             </a:solidFill>
             <a:prstDash val="solid"/>
           </a:ln>
-        </p:spPr>
-      </p:sp>
-      <p:sp>
-        <p:nvSpPr>
-          <p:cNvPr id="10" name="Shape 8"/>
-          <p:cNvSpPr/>
-          <p:nvPr/>
-        </p:nvSpPr>
-        <p:spPr>
-          <a:xfrm>
-            <a:off x="438912" y="2377440"/>
-            <a:ext cx="64008" cy="749808"/>
-          </a:xfrm>
-          <a:prstGeom prst="rect">
-            <a:avLst/>
-          </a:prstGeom>
-          <a:solidFill>
-            <a:srgbClr val="E74C3C"/>
+          <a:effectLst>
+            <a:outerShdw sx="100000" sy="100000" kx="0" ky="0" algn="bl" rotWithShape="0" blurRad="127000" dist="38100" dir="8100000">
+              <a:srgbClr val="000000">
+                <a:alpha val="10000"/>
+              </a:srgbClr>
+            </a:outerShdw>
+          </a:effectLst>
+        </p:spPr>
+      </p:sp>
+      <p:sp>
+        <p:nvSpPr>
+          <p:cNvPr id="11" name="Shape 9"/>
+          <p:cNvSpPr/>
+          <p:nvPr/>
+        </p:nvSpPr>
+        <p:spPr>
+          <a:xfrm>
+            <a:off x="256032" y="2322576"/>
+            <a:ext cx="91440" cy="713232"/>
+          </a:xfrm>
+          <a:prstGeom prst="rect">
+            <a:avLst/>
+          </a:prstGeom>
+          <a:solidFill>
+            <a:srgbClr val="C0392B"/>
           </a:solidFill>
           <a:ln w="12700">
             <a:solidFill>
-              <a:srgbClr val="E74C3C"/>
+              <a:srgbClr val="C0392B"/>
             </a:solidFill>
             <a:prstDash val="solid"/>
           </a:ln>
@@ -7199,14 +7250,14 @@
       </p:sp>
       <p:sp>
         <p:nvSpPr>
-          <p:cNvPr id="11" name="Text 9"/>
-          <p:cNvSpPr/>
-          <p:nvPr/>
-        </p:nvSpPr>
-        <p:spPr>
-          <a:xfrm>
-            <a:off x="585216" y="2432304"/>
-            <a:ext cx="2468880" cy="640080"/>
+          <p:cNvPr id="12" name="Text 10"/>
+          <p:cNvSpPr/>
+          <p:nvPr/>
+        </p:nvSpPr>
+        <p:spPr>
+          <a:xfrm>
+            <a:off x="420624" y="2377440"/>
+            <a:ext cx="2560320" cy="603504"/>
           </a:xfrm>
           <a:prstGeom prst="rect">
             <a:avLst/>
@@ -7222,65 +7273,72 @@
               <a:buNone/>
             </a:pPr>
             <a:r>
-              <a:rPr lang="en-US" sz="950" dirty="0">
-                <a:solidFill>
-                  <a:srgbClr val="D6EAF8"/>
+              <a:rPr lang="en-US" sz="1200" dirty="0">
+                <a:solidFill>
+                  <a:srgbClr val="1A1A2A"/>
                 </a:solidFill>
                 <a:latin typeface="Calibri" pitchFamily="34" charset="0"/>
                 <a:ea typeface="Calibri" pitchFamily="34" charset="-122"/>
                 <a:cs typeface="Calibri" pitchFamily="34" charset="-120"/>
               </a:rPr>
-              <a:t>macOS port 5000 blocked by AirPlay — migrated API to 5001</a:t>
-            </a:r>
-            <a:endParaRPr lang="en-US" sz="950" dirty="0"/>
-          </a:p>
-        </p:txBody>
-      </p:sp>
-      <p:sp>
-        <p:nvSpPr>
-          <p:cNvPr id="12" name="Shape 10"/>
-          <p:cNvSpPr/>
-          <p:nvPr/>
-        </p:nvSpPr>
-        <p:spPr>
-          <a:xfrm>
-            <a:off x="438912" y="3200400"/>
-            <a:ext cx="2697480" cy="749808"/>
-          </a:xfrm>
-          <a:prstGeom prst="rect">
-            <a:avLst/>
-          </a:prstGeom>
-          <a:solidFill>
-            <a:srgbClr val="1E3A5F"/>
+              <a:t>macOS port 5000 blocked by AirPlay — migrated Flask API to port 5001</a:t>
+            </a:r>
+            <a:endParaRPr lang="en-US" sz="1200" dirty="0"/>
+          </a:p>
+        </p:txBody>
+      </p:sp>
+      <p:sp>
+        <p:nvSpPr>
+          <p:cNvPr id="13" name="Shape 11"/>
+          <p:cNvSpPr/>
+          <p:nvPr/>
+        </p:nvSpPr>
+        <p:spPr>
+          <a:xfrm>
+            <a:off x="256032" y="3127248"/>
+            <a:ext cx="2816352" cy="713232"/>
+          </a:xfrm>
+          <a:prstGeom prst="rect">
+            <a:avLst/>
+          </a:prstGeom>
+          <a:solidFill>
+            <a:srgbClr val="FDEDEC"/>
           </a:solidFill>
           <a:ln w="12700">
             <a:solidFill>
-              <a:srgbClr val="E74C3C"/>
+              <a:srgbClr val="F5B7B1"/>
             </a:solidFill>
             <a:prstDash val="solid"/>
           </a:ln>
-        </p:spPr>
-      </p:sp>
-      <p:sp>
-        <p:nvSpPr>
-          <p:cNvPr id="13" name="Shape 11"/>
-          <p:cNvSpPr/>
-          <p:nvPr/>
-        </p:nvSpPr>
-        <p:spPr>
-          <a:xfrm>
-            <a:off x="438912" y="3200400"/>
-            <a:ext cx="64008" cy="749808"/>
-          </a:xfrm>
-          <a:prstGeom prst="rect">
-            <a:avLst/>
-          </a:prstGeom>
-          <a:solidFill>
-            <a:srgbClr val="E74C3C"/>
+          <a:effectLst>
+            <a:outerShdw sx="100000" sy="100000" kx="0" ky="0" algn="bl" rotWithShape="0" blurRad="127000" dist="38100" dir="8100000">
+              <a:srgbClr val="000000">
+                <a:alpha val="10000"/>
+              </a:srgbClr>
+            </a:outerShdw>
+          </a:effectLst>
+        </p:spPr>
+      </p:sp>
+      <p:sp>
+        <p:nvSpPr>
+          <p:cNvPr id="14" name="Shape 12"/>
+          <p:cNvSpPr/>
+          <p:nvPr/>
+        </p:nvSpPr>
+        <p:spPr>
+          <a:xfrm>
+            <a:off x="256032" y="3127248"/>
+            <a:ext cx="91440" cy="713232"/>
+          </a:xfrm>
+          <a:prstGeom prst="rect">
+            <a:avLst/>
+          </a:prstGeom>
+          <a:solidFill>
+            <a:srgbClr val="C0392B"/>
           </a:solidFill>
           <a:ln w="12700">
             <a:solidFill>
-              <a:srgbClr val="E74C3C"/>
+              <a:srgbClr val="C0392B"/>
             </a:solidFill>
             <a:prstDash val="solid"/>
           </a:ln>
@@ -7288,14 +7346,14 @@
       </p:sp>
       <p:sp>
         <p:nvSpPr>
-          <p:cNvPr id="14" name="Text 12"/>
-          <p:cNvSpPr/>
-          <p:nvPr/>
-        </p:nvSpPr>
-        <p:spPr>
-          <a:xfrm>
-            <a:off x="585216" y="3255264"/>
-            <a:ext cx="2468880" cy="640080"/>
+          <p:cNvPr id="15" name="Text 13"/>
+          <p:cNvSpPr/>
+          <p:nvPr/>
+        </p:nvSpPr>
+        <p:spPr>
+          <a:xfrm>
+            <a:off x="420624" y="3182112"/>
+            <a:ext cx="2560320" cy="603504"/>
           </a:xfrm>
           <a:prstGeom prst="rect">
             <a:avLst/>
@@ -7311,65 +7369,72 @@
               <a:buNone/>
             </a:pPr>
             <a:r>
-              <a:rPr lang="en-US" sz="950" dirty="0">
-                <a:solidFill>
-                  <a:srgbClr val="D6EAF8"/>
+              <a:rPr lang="en-US" sz="1200" dirty="0">
+                <a:solidFill>
+                  <a:srgbClr val="1A1A2A"/>
                 </a:solidFill>
                 <a:latin typeface="Calibri" pitchFamily="34" charset="0"/>
                 <a:ea typeface="Calibri" pitchFamily="34" charset="-122"/>
                 <a:cs typeface="Calibri" pitchFamily="34" charset="-120"/>
               </a:rPr>
-              <a:t>XGBoost OpenMP dependency on macOS required brew install libomp</a:t>
-            </a:r>
-            <a:endParaRPr lang="en-US" sz="950" dirty="0"/>
-          </a:p>
-        </p:txBody>
-      </p:sp>
-      <p:sp>
-        <p:nvSpPr>
-          <p:cNvPr id="15" name="Shape 13"/>
-          <p:cNvSpPr/>
-          <p:nvPr/>
-        </p:nvSpPr>
-        <p:spPr>
-          <a:xfrm>
-            <a:off x="438912" y="4023360"/>
-            <a:ext cx="2697480" cy="749808"/>
-          </a:xfrm>
-          <a:prstGeom prst="rect">
-            <a:avLst/>
-          </a:prstGeom>
-          <a:solidFill>
-            <a:srgbClr val="1E3A5F"/>
+              <a:t>XGBoost requires brew install libomp on macOS for OpenMP support</a:t>
+            </a:r>
+            <a:endParaRPr lang="en-US" sz="1200" dirty="0"/>
+          </a:p>
+        </p:txBody>
+      </p:sp>
+      <p:sp>
+        <p:nvSpPr>
+          <p:cNvPr id="16" name="Shape 14"/>
+          <p:cNvSpPr/>
+          <p:nvPr/>
+        </p:nvSpPr>
+        <p:spPr>
+          <a:xfrm>
+            <a:off x="256032" y="3931920"/>
+            <a:ext cx="2816352" cy="713232"/>
+          </a:xfrm>
+          <a:prstGeom prst="rect">
+            <a:avLst/>
+          </a:prstGeom>
+          <a:solidFill>
+            <a:srgbClr val="FDEDEC"/>
           </a:solidFill>
           <a:ln w="12700">
             <a:solidFill>
-              <a:srgbClr val="E74C3C"/>
+              <a:srgbClr val="F5B7B1"/>
             </a:solidFill>
             <a:prstDash val="solid"/>
           </a:ln>
-        </p:spPr>
-      </p:sp>
-      <p:sp>
-        <p:nvSpPr>
-          <p:cNvPr id="16" name="Shape 14"/>
-          <p:cNvSpPr/>
-          <p:nvPr/>
-        </p:nvSpPr>
-        <p:spPr>
-          <a:xfrm>
-            <a:off x="438912" y="4023360"/>
-            <a:ext cx="64008" cy="749808"/>
-          </a:xfrm>
-          <a:prstGeom prst="rect">
-            <a:avLst/>
-          </a:prstGeom>
-          <a:solidFill>
-            <a:srgbClr val="E74C3C"/>
+          <a:effectLst>
+            <a:outerShdw sx="100000" sy="100000" kx="0" ky="0" algn="bl" rotWithShape="0" blurRad="127000" dist="38100" dir="8100000">
+              <a:srgbClr val="000000">
+                <a:alpha val="10000"/>
+              </a:srgbClr>
+            </a:outerShdw>
+          </a:effectLst>
+        </p:spPr>
+      </p:sp>
+      <p:sp>
+        <p:nvSpPr>
+          <p:cNvPr id="17" name="Shape 15"/>
+          <p:cNvSpPr/>
+          <p:nvPr/>
+        </p:nvSpPr>
+        <p:spPr>
+          <a:xfrm>
+            <a:off x="256032" y="3931920"/>
+            <a:ext cx="91440" cy="713232"/>
+          </a:xfrm>
+          <a:prstGeom prst="rect">
+            <a:avLst/>
+          </a:prstGeom>
+          <a:solidFill>
+            <a:srgbClr val="C0392B"/>
           </a:solidFill>
           <a:ln w="12700">
             <a:solidFill>
-              <a:srgbClr val="E74C3C"/>
+              <a:srgbClr val="C0392B"/>
             </a:solidFill>
             <a:prstDash val="solid"/>
           </a:ln>
@@ -7377,14 +7442,14 @@
       </p:sp>
       <p:sp>
         <p:nvSpPr>
-          <p:cNvPr id="17" name="Text 15"/>
-          <p:cNvSpPr/>
-          <p:nvPr/>
-        </p:nvSpPr>
-        <p:spPr>
-          <a:xfrm>
-            <a:off x="585216" y="4078224"/>
-            <a:ext cx="2468880" cy="640080"/>
+          <p:cNvPr id="18" name="Text 16"/>
+          <p:cNvSpPr/>
+          <p:nvPr/>
+        </p:nvSpPr>
+        <p:spPr>
+          <a:xfrm>
+            <a:off x="420624" y="3986784"/>
+            <a:ext cx="2560320" cy="603504"/>
           </a:xfrm>
           <a:prstGeom prst="rect">
             <a:avLst/>
@@ -7400,9 +7465,9 @@
               <a:buNone/>
             </a:pPr>
             <a:r>
-              <a:rPr lang="en-US" sz="950" dirty="0">
-                <a:solidFill>
-                  <a:srgbClr val="D6EAF8"/>
+              <a:rPr lang="en-US" sz="1200" dirty="0">
+                <a:solidFill>
+                  <a:srgbClr val="1A1A2A"/>
                 </a:solidFill>
                 <a:latin typeface="Calibri" pitchFamily="34" charset="0"/>
                 <a:ea typeface="Calibri" pitchFamily="34" charset="-122"/>
@@ -7410,20 +7475,20 @@
               </a:rPr>
               <a:t>USGS 20k/request limit — solved with monthly chunk fetching</a:t>
             </a:r>
-            <a:endParaRPr lang="en-US" sz="950" dirty="0"/>
-          </a:p>
-        </p:txBody>
-      </p:sp>
-      <p:sp>
-        <p:nvSpPr>
-          <p:cNvPr id="18" name="Shape 16"/>
-          <p:cNvSpPr/>
-          <p:nvPr/>
-        </p:nvSpPr>
-        <p:spPr>
-          <a:xfrm>
-            <a:off x="3346704" y="896112"/>
-            <a:ext cx="2697480" cy="512064"/>
+            <a:endParaRPr lang="en-US" sz="1200" dirty="0"/>
+          </a:p>
+        </p:txBody>
+      </p:sp>
+      <p:sp>
+        <p:nvSpPr>
+          <p:cNvPr id="19" name="Shape 17"/>
+          <p:cNvSpPr/>
+          <p:nvPr/>
+        </p:nvSpPr>
+        <p:spPr>
+          <a:xfrm>
+            <a:off x="3218688" y="914400"/>
+            <a:ext cx="2816352" cy="530352"/>
           </a:xfrm>
           <a:prstGeom prst="rect">
             <a:avLst/>
@@ -7441,14 +7506,14 @@
       </p:sp>
       <p:sp>
         <p:nvSpPr>
-          <p:cNvPr id="19" name="Text 17"/>
-          <p:cNvSpPr/>
-          <p:nvPr/>
-        </p:nvSpPr>
-        <p:spPr>
-          <a:xfrm>
-            <a:off x="3346704" y="896112"/>
-            <a:ext cx="2697480" cy="512064"/>
+          <p:cNvPr id="20" name="Text 18"/>
+          <p:cNvSpPr/>
+          <p:nvPr/>
+        </p:nvSpPr>
+        <p:spPr>
+          <a:xfrm>
+            <a:off x="3218688" y="914400"/>
+            <a:ext cx="2816352" cy="530352"/>
           </a:xfrm>
           <a:prstGeom prst="rect">
             <a:avLst/>
@@ -7464,7 +7529,7 @@
               <a:buNone/>
             </a:pPr>
             <a:r>
-              <a:rPr lang="en-US" sz="1500" b="1" dirty="0">
+              <a:rPr lang="en-US" sz="1800" b="1" dirty="0">
                 <a:solidFill>
                   <a:srgbClr val="FFFFFF"/>
                 </a:solidFill>
@@ -7474,45 +7539,52 @@
               </a:rPr>
               <a:t>💡  Learnings</a:t>
             </a:r>
-            <a:endParaRPr lang="en-US" sz="1500" dirty="0"/>
-          </a:p>
-        </p:txBody>
-      </p:sp>
-      <p:sp>
-        <p:nvSpPr>
-          <p:cNvPr id="20" name="Shape 18"/>
-          <p:cNvSpPr/>
-          <p:nvPr/>
-        </p:nvSpPr>
-        <p:spPr>
-          <a:xfrm>
-            <a:off x="3346704" y="1554480"/>
-            <a:ext cx="2697480" cy="749808"/>
-          </a:xfrm>
-          <a:prstGeom prst="rect">
-            <a:avLst/>
-          </a:prstGeom>
-          <a:solidFill>
-            <a:srgbClr val="1E3A5F"/>
+            <a:endParaRPr lang="en-US" sz="1800" dirty="0"/>
+          </a:p>
+        </p:txBody>
+      </p:sp>
+      <p:sp>
+        <p:nvSpPr>
+          <p:cNvPr id="21" name="Shape 19"/>
+          <p:cNvSpPr/>
+          <p:nvPr/>
+        </p:nvSpPr>
+        <p:spPr>
+          <a:xfrm>
+            <a:off x="3218688" y="1517904"/>
+            <a:ext cx="2816352" cy="713232"/>
+          </a:xfrm>
+          <a:prstGeom prst="rect">
+            <a:avLst/>
+          </a:prstGeom>
+          <a:solidFill>
+            <a:srgbClr val="E0F5F2"/>
           </a:solidFill>
           <a:ln w="12700">
             <a:solidFill>
-              <a:srgbClr val="0D9488"/>
+              <a:srgbClr val="A2D9CE"/>
             </a:solidFill>
             <a:prstDash val="solid"/>
           </a:ln>
-        </p:spPr>
-      </p:sp>
-      <p:sp>
-        <p:nvSpPr>
-          <p:cNvPr id="21" name="Shape 19"/>
-          <p:cNvSpPr/>
-          <p:nvPr/>
-        </p:nvSpPr>
-        <p:spPr>
-          <a:xfrm>
-            <a:off x="3346704" y="1554480"/>
-            <a:ext cx="64008" cy="749808"/>
+          <a:effectLst>
+            <a:outerShdw sx="100000" sy="100000" kx="0" ky="0" algn="bl" rotWithShape="0" blurRad="127000" dist="38100" dir="8100000">
+              <a:srgbClr val="000000">
+                <a:alpha val="10000"/>
+              </a:srgbClr>
+            </a:outerShdw>
+          </a:effectLst>
+        </p:spPr>
+      </p:sp>
+      <p:sp>
+        <p:nvSpPr>
+          <p:cNvPr id="22" name="Shape 20"/>
+          <p:cNvSpPr/>
+          <p:nvPr/>
+        </p:nvSpPr>
+        <p:spPr>
+          <a:xfrm>
+            <a:off x="3218688" y="1517904"/>
+            <a:ext cx="91440" cy="713232"/>
           </a:xfrm>
           <a:prstGeom prst="rect">
             <a:avLst/>
@@ -7530,14 +7602,14 @@
       </p:sp>
       <p:sp>
         <p:nvSpPr>
-          <p:cNvPr id="22" name="Text 20"/>
-          <p:cNvSpPr/>
-          <p:nvPr/>
-        </p:nvSpPr>
-        <p:spPr>
-          <a:xfrm>
-            <a:off x="3493008" y="1609344"/>
-            <a:ext cx="2468880" cy="640080"/>
+          <p:cNvPr id="23" name="Text 21"/>
+          <p:cNvSpPr/>
+          <p:nvPr/>
+        </p:nvSpPr>
+        <p:spPr>
+          <a:xfrm>
+            <a:off x="3383280" y="1572768"/>
+            <a:ext cx="2560320" cy="603504"/>
           </a:xfrm>
           <a:prstGeom prst="rect">
             <a:avLst/>
@@ -7553,55 +7625,62 @@
               <a:buNone/>
             </a:pPr>
             <a:r>
-              <a:rPr lang="en-US" sz="950" dirty="0">
-                <a:solidFill>
-                  <a:srgbClr val="D6EAF8"/>
+              <a:rPr lang="en-US" sz="1200" dirty="0">
+                <a:solidFill>
+                  <a:srgbClr val="1A1A2A"/>
                 </a:solidFill>
                 <a:latin typeface="Calibri" pitchFamily="34" charset="0"/>
                 <a:ea typeface="Calibri" pitchFamily="34" charset="-122"/>
                 <a:cs typeface="Calibri" pitchFamily="34" charset="-120"/>
               </a:rPr>
-              <a:t>End-to-end MLOps: data → model → API → UI → cloud in one project</a:t>
-            </a:r>
-            <a:endParaRPr lang="en-US" sz="950" dirty="0"/>
-          </a:p>
-        </p:txBody>
-      </p:sp>
-      <p:sp>
-        <p:nvSpPr>
-          <p:cNvPr id="23" name="Shape 21"/>
-          <p:cNvSpPr/>
-          <p:nvPr/>
-        </p:nvSpPr>
-        <p:spPr>
-          <a:xfrm>
-            <a:off x="3346704" y="2377440"/>
-            <a:ext cx="2697480" cy="749808"/>
-          </a:xfrm>
-          <a:prstGeom prst="rect">
-            <a:avLst/>
-          </a:prstGeom>
-          <a:solidFill>
-            <a:srgbClr val="1E3A5F"/>
+              <a:t>Full MLOps pipeline in one project: collect → train → API → UI → cloud</a:t>
+            </a:r>
+            <a:endParaRPr lang="en-US" sz="1200" dirty="0"/>
+          </a:p>
+        </p:txBody>
+      </p:sp>
+      <p:sp>
+        <p:nvSpPr>
+          <p:cNvPr id="24" name="Shape 22"/>
+          <p:cNvSpPr/>
+          <p:nvPr/>
+        </p:nvSpPr>
+        <p:spPr>
+          <a:xfrm>
+            <a:off x="3218688" y="2322576"/>
+            <a:ext cx="2816352" cy="713232"/>
+          </a:xfrm>
+          <a:prstGeom prst="rect">
+            <a:avLst/>
+          </a:prstGeom>
+          <a:solidFill>
+            <a:srgbClr val="E0F5F2"/>
           </a:solidFill>
           <a:ln w="12700">
             <a:solidFill>
-              <a:srgbClr val="0D9488"/>
+              <a:srgbClr val="A2D9CE"/>
             </a:solidFill>
             <a:prstDash val="solid"/>
           </a:ln>
-        </p:spPr>
-      </p:sp>
-      <p:sp>
-        <p:nvSpPr>
-          <p:cNvPr id="24" name="Shape 22"/>
-          <p:cNvSpPr/>
-          <p:nvPr/>
-        </p:nvSpPr>
-        <p:spPr>
-          <a:xfrm>
-            <a:off x="3346704" y="2377440"/>
-            <a:ext cx="64008" cy="749808"/>
+          <a:effectLst>
+            <a:outerShdw sx="100000" sy="100000" kx="0" ky="0" algn="bl" rotWithShape="0" blurRad="127000" dist="38100" dir="8100000">
+              <a:srgbClr val="000000">
+                <a:alpha val="10000"/>
+              </a:srgbClr>
+            </a:outerShdw>
+          </a:effectLst>
+        </p:spPr>
+      </p:sp>
+      <p:sp>
+        <p:nvSpPr>
+          <p:cNvPr id="25" name="Shape 23"/>
+          <p:cNvSpPr/>
+          <p:nvPr/>
+        </p:nvSpPr>
+        <p:spPr>
+          <a:xfrm>
+            <a:off x="3218688" y="2322576"/>
+            <a:ext cx="91440" cy="713232"/>
           </a:xfrm>
           <a:prstGeom prst="rect">
             <a:avLst/>
@@ -7619,14 +7698,14 @@
       </p:sp>
       <p:sp>
         <p:nvSpPr>
-          <p:cNvPr id="25" name="Text 23"/>
-          <p:cNvSpPr/>
-          <p:nvPr/>
-        </p:nvSpPr>
-        <p:spPr>
-          <a:xfrm>
-            <a:off x="3493008" y="2432304"/>
-            <a:ext cx="2468880" cy="640080"/>
+          <p:cNvPr id="26" name="Text 24"/>
+          <p:cNvSpPr/>
+          <p:nvPr/>
+        </p:nvSpPr>
+        <p:spPr>
+          <a:xfrm>
+            <a:off x="3383280" y="2377440"/>
+            <a:ext cx="2560320" cy="603504"/>
           </a:xfrm>
           <a:prstGeom prst="rect">
             <a:avLst/>
@@ -7642,55 +7721,62 @@
               <a:buNone/>
             </a:pPr>
             <a:r>
-              <a:rPr lang="en-US" sz="950" dirty="0">
-                <a:solidFill>
-                  <a:srgbClr val="D6EAF8"/>
+              <a:rPr lang="en-US" sz="1200" dirty="0">
+                <a:solidFill>
+                  <a:srgbClr val="1A1A2A"/>
                 </a:solidFill>
                 <a:latin typeface="Calibri" pitchFamily="34" charset="0"/>
                 <a:ea typeface="Calibri" pitchFamily="34" charset="-122"/>
                 <a:cs typeface="Calibri" pitchFamily="34" charset="-120"/>
               </a:rPr>
-              <a:t>Flask-CORS + Streamlit cache_data for clean frontend/backend separation</a:t>
-            </a:r>
-            <a:endParaRPr lang="en-US" sz="950" dirty="0"/>
-          </a:p>
-        </p:txBody>
-      </p:sp>
-      <p:sp>
-        <p:nvSpPr>
-          <p:cNvPr id="26" name="Shape 24"/>
-          <p:cNvSpPr/>
-          <p:nvPr/>
-        </p:nvSpPr>
-        <p:spPr>
-          <a:xfrm>
-            <a:off x="3346704" y="3200400"/>
-            <a:ext cx="2697480" cy="749808"/>
-          </a:xfrm>
-          <a:prstGeom prst="rect">
-            <a:avLst/>
-          </a:prstGeom>
-          <a:solidFill>
-            <a:srgbClr val="1E3A5F"/>
+              <a:t>Macro F1 is the right metric for imbalanced multiclass, not accuracy</a:t>
+            </a:r>
+            <a:endParaRPr lang="en-US" sz="1200" dirty="0"/>
+          </a:p>
+        </p:txBody>
+      </p:sp>
+      <p:sp>
+        <p:nvSpPr>
+          <p:cNvPr id="27" name="Shape 25"/>
+          <p:cNvSpPr/>
+          <p:nvPr/>
+        </p:nvSpPr>
+        <p:spPr>
+          <a:xfrm>
+            <a:off x="3218688" y="3127248"/>
+            <a:ext cx="2816352" cy="713232"/>
+          </a:xfrm>
+          <a:prstGeom prst="rect">
+            <a:avLst/>
+          </a:prstGeom>
+          <a:solidFill>
+            <a:srgbClr val="E0F5F2"/>
           </a:solidFill>
           <a:ln w="12700">
             <a:solidFill>
-              <a:srgbClr val="0D9488"/>
+              <a:srgbClr val="A2D9CE"/>
             </a:solidFill>
             <a:prstDash val="solid"/>
           </a:ln>
-        </p:spPr>
-      </p:sp>
-      <p:sp>
-        <p:nvSpPr>
-          <p:cNvPr id="27" name="Shape 25"/>
-          <p:cNvSpPr/>
-          <p:nvPr/>
-        </p:nvSpPr>
-        <p:spPr>
-          <a:xfrm>
-            <a:off x="3346704" y="3200400"/>
-            <a:ext cx="64008" cy="749808"/>
+          <a:effectLst>
+            <a:outerShdw sx="100000" sy="100000" kx="0" ky="0" algn="bl" rotWithShape="0" blurRad="127000" dist="38100" dir="8100000">
+              <a:srgbClr val="000000">
+                <a:alpha val="10000"/>
+              </a:srgbClr>
+            </a:outerShdw>
+          </a:effectLst>
+        </p:spPr>
+      </p:sp>
+      <p:sp>
+        <p:nvSpPr>
+          <p:cNvPr id="28" name="Shape 26"/>
+          <p:cNvSpPr/>
+          <p:nvPr/>
+        </p:nvSpPr>
+        <p:spPr>
+          <a:xfrm>
+            <a:off x="3218688" y="3127248"/>
+            <a:ext cx="91440" cy="713232"/>
           </a:xfrm>
           <a:prstGeom prst="rect">
             <a:avLst/>
@@ -7708,14 +7794,14 @@
       </p:sp>
       <p:sp>
         <p:nvSpPr>
-          <p:cNvPr id="28" name="Text 26"/>
-          <p:cNvSpPr/>
-          <p:nvPr/>
-        </p:nvSpPr>
-        <p:spPr>
-          <a:xfrm>
-            <a:off x="3493008" y="3255264"/>
-            <a:ext cx="2468880" cy="640080"/>
+          <p:cNvPr id="29" name="Text 27"/>
+          <p:cNvSpPr/>
+          <p:nvPr/>
+        </p:nvSpPr>
+        <p:spPr>
+          <a:xfrm>
+            <a:off x="3383280" y="3182112"/>
+            <a:ext cx="2560320" cy="603504"/>
           </a:xfrm>
           <a:prstGeom prst="rect">
             <a:avLst/>
@@ -7731,55 +7817,62 @@
               <a:buNone/>
             </a:pPr>
             <a:r>
-              <a:rPr lang="en-US" sz="950" dirty="0">
-                <a:solidFill>
-                  <a:srgbClr val="D6EAF8"/>
+              <a:rPr lang="en-US" sz="1200" dirty="0">
+                <a:solidFill>
+                  <a:srgbClr val="1A1A2A"/>
                 </a:solidFill>
                 <a:latin typeface="Calibri" pitchFamily="34" charset="0"/>
                 <a:ea typeface="Calibri" pitchFamily="34" charset="-122"/>
                 <a:cs typeface="Calibri" pitchFamily="34" charset="-120"/>
               </a:rPr>
-              <a:t>Docker multi-service deployment with health check dependencies</a:t>
-            </a:r>
-            <a:endParaRPr lang="en-US" sz="950" dirty="0"/>
-          </a:p>
-        </p:txBody>
-      </p:sp>
-      <p:sp>
-        <p:nvSpPr>
-          <p:cNvPr id="29" name="Shape 27"/>
-          <p:cNvSpPr/>
-          <p:nvPr/>
-        </p:nvSpPr>
-        <p:spPr>
-          <a:xfrm>
-            <a:off x="3346704" y="4023360"/>
-            <a:ext cx="2697480" cy="749808"/>
-          </a:xfrm>
-          <a:prstGeom prst="rect">
-            <a:avLst/>
-          </a:prstGeom>
-          <a:solidFill>
-            <a:srgbClr val="1E3A5F"/>
+              <a:t>Docker health checks + depends_on for reliable multi-service startup</a:t>
+            </a:r>
+            <a:endParaRPr lang="en-US" sz="1200" dirty="0"/>
+          </a:p>
+        </p:txBody>
+      </p:sp>
+      <p:sp>
+        <p:nvSpPr>
+          <p:cNvPr id="30" name="Shape 28"/>
+          <p:cNvSpPr/>
+          <p:nvPr/>
+        </p:nvSpPr>
+        <p:spPr>
+          <a:xfrm>
+            <a:off x="3218688" y="3931920"/>
+            <a:ext cx="2816352" cy="713232"/>
+          </a:xfrm>
+          <a:prstGeom prst="rect">
+            <a:avLst/>
+          </a:prstGeom>
+          <a:solidFill>
+            <a:srgbClr val="E0F5F2"/>
           </a:solidFill>
           <a:ln w="12700">
             <a:solidFill>
-              <a:srgbClr val="0D9488"/>
+              <a:srgbClr val="A2D9CE"/>
             </a:solidFill>
             <a:prstDash val="solid"/>
           </a:ln>
-        </p:spPr>
-      </p:sp>
-      <p:sp>
-        <p:nvSpPr>
-          <p:cNvPr id="30" name="Shape 28"/>
-          <p:cNvSpPr/>
-          <p:nvPr/>
-        </p:nvSpPr>
-        <p:spPr>
-          <a:xfrm>
-            <a:off x="3346704" y="4023360"/>
-            <a:ext cx="64008" cy="749808"/>
+          <a:effectLst>
+            <a:outerShdw sx="100000" sy="100000" kx="0" ky="0" algn="bl" rotWithShape="0" blurRad="127000" dist="38100" dir="8100000">
+              <a:srgbClr val="000000">
+                <a:alpha val="10000"/>
+              </a:srgbClr>
+            </a:outerShdw>
+          </a:effectLst>
+        </p:spPr>
+      </p:sp>
+      <p:sp>
+        <p:nvSpPr>
+          <p:cNvPr id="31" name="Shape 29"/>
+          <p:cNvSpPr/>
+          <p:nvPr/>
+        </p:nvSpPr>
+        <p:spPr>
+          <a:xfrm>
+            <a:off x="3218688" y="3931920"/>
+            <a:ext cx="91440" cy="713232"/>
           </a:xfrm>
           <a:prstGeom prst="rect">
             <a:avLst/>
@@ -7797,14 +7890,14 @@
       </p:sp>
       <p:sp>
         <p:nvSpPr>
-          <p:cNvPr id="31" name="Text 29"/>
-          <p:cNvSpPr/>
-          <p:nvPr/>
-        </p:nvSpPr>
-        <p:spPr>
-          <a:xfrm>
-            <a:off x="3493008" y="4078224"/>
-            <a:ext cx="2468880" cy="640080"/>
+          <p:cNvPr id="32" name="Text 30"/>
+          <p:cNvSpPr/>
+          <p:nvPr/>
+        </p:nvSpPr>
+        <p:spPr>
+          <a:xfrm>
+            <a:off x="3383280" y="3986784"/>
+            <a:ext cx="2560320" cy="603504"/>
           </a:xfrm>
           <a:prstGeom prst="rect">
             <a:avLst/>
@@ -7820,40 +7913,40 @@
               <a:buNone/>
             </a:pPr>
             <a:r>
-              <a:rPr lang="en-US" sz="950" dirty="0">
-                <a:solidFill>
-                  <a:srgbClr val="D6EAF8"/>
+              <a:rPr lang="en-US" sz="1200" dirty="0">
+                <a:solidFill>
+                  <a:srgbClr val="1A1A2A"/>
                 </a:solidFill>
                 <a:latin typeface="Calibri" pitchFamily="34" charset="0"/>
                 <a:ea typeface="Calibri" pitchFamily="34" charset="-122"/>
                 <a:cs typeface="Calibri" pitchFamily="34" charset="-120"/>
               </a:rPr>
-              <a:t>XGBoost sample_weight is more robust than class_weight for multiclass imbalance</a:t>
-            </a:r>
-            <a:endParaRPr lang="en-US" sz="950" dirty="0"/>
-          </a:p>
-        </p:txBody>
-      </p:sp>
-      <p:sp>
-        <p:nvSpPr>
-          <p:cNvPr id="32" name="Shape 30"/>
-          <p:cNvSpPr/>
-          <p:nvPr/>
-        </p:nvSpPr>
-        <p:spPr>
-          <a:xfrm>
-            <a:off x="6254496" y="896112"/>
-            <a:ext cx="2697480" cy="512064"/>
-          </a:xfrm>
-          <a:prstGeom prst="rect">
-            <a:avLst/>
-          </a:prstGeom>
-          <a:solidFill>
-            <a:srgbClr val="E67E22"/>
+              <a:t>XGBoost sample_weight more robust than class_weight for rare classes</a:t>
+            </a:r>
+            <a:endParaRPr lang="en-US" sz="1200" dirty="0"/>
+          </a:p>
+        </p:txBody>
+      </p:sp>
+      <p:sp>
+        <p:nvSpPr>
+          <p:cNvPr id="33" name="Shape 31"/>
+          <p:cNvSpPr/>
+          <p:nvPr/>
+        </p:nvSpPr>
+        <p:spPr>
+          <a:xfrm>
+            <a:off x="6181344" y="914400"/>
+            <a:ext cx="2816352" cy="530352"/>
+          </a:xfrm>
+          <a:prstGeom prst="rect">
+            <a:avLst/>
+          </a:prstGeom>
+          <a:solidFill>
+            <a:srgbClr val="1A5276"/>
           </a:solidFill>
           <a:ln w="12700">
             <a:solidFill>
-              <a:srgbClr val="E67E22"/>
+              <a:srgbClr val="1A5276"/>
             </a:solidFill>
             <a:prstDash val="solid"/>
           </a:ln>
@@ -7861,14 +7954,14 @@
       </p:sp>
       <p:sp>
         <p:nvSpPr>
-          <p:cNvPr id="33" name="Text 31"/>
-          <p:cNvSpPr/>
-          <p:nvPr/>
-        </p:nvSpPr>
-        <p:spPr>
-          <a:xfrm>
-            <a:off x="6254496" y="896112"/>
-            <a:ext cx="2697480" cy="512064"/>
+          <p:cNvPr id="34" name="Text 32"/>
+          <p:cNvSpPr/>
+          <p:nvPr/>
+        </p:nvSpPr>
+        <p:spPr>
+          <a:xfrm>
+            <a:off x="6181344" y="914400"/>
+            <a:ext cx="2816352" cy="530352"/>
           </a:xfrm>
           <a:prstGeom prst="rect">
             <a:avLst/>
@@ -7884,7 +7977,7 @@
               <a:buNone/>
             </a:pPr>
             <a:r>
-              <a:rPr lang="en-US" sz="1500" b="1" dirty="0">
+              <a:rPr lang="en-US" sz="1800" b="1" dirty="0">
                 <a:solidFill>
                   <a:srgbClr val="FFFFFF"/>
                 </a:solidFill>
@@ -7894,55 +7987,62 @@
               </a:rPr>
               <a:t>🚀  Future Work</a:t>
             </a:r>
-            <a:endParaRPr lang="en-US" sz="1500" dirty="0"/>
-          </a:p>
-        </p:txBody>
-      </p:sp>
-      <p:sp>
-        <p:nvSpPr>
-          <p:cNvPr id="34" name="Shape 32"/>
-          <p:cNvSpPr/>
-          <p:nvPr/>
-        </p:nvSpPr>
-        <p:spPr>
-          <a:xfrm>
-            <a:off x="6254496" y="1554480"/>
-            <a:ext cx="2697480" cy="749808"/>
-          </a:xfrm>
-          <a:prstGeom prst="rect">
-            <a:avLst/>
-          </a:prstGeom>
-          <a:solidFill>
-            <a:srgbClr val="1E3A5F"/>
+            <a:endParaRPr lang="en-US" sz="1800" dirty="0"/>
+          </a:p>
+        </p:txBody>
+      </p:sp>
+      <p:sp>
+        <p:nvSpPr>
+          <p:cNvPr id="35" name="Shape 33"/>
+          <p:cNvSpPr/>
+          <p:nvPr/>
+        </p:nvSpPr>
+        <p:spPr>
+          <a:xfrm>
+            <a:off x="6181344" y="1517904"/>
+            <a:ext cx="2816352" cy="713232"/>
+          </a:xfrm>
+          <a:prstGeom prst="rect">
+            <a:avLst/>
+          </a:prstGeom>
+          <a:solidFill>
+            <a:srgbClr val="EAF4FB"/>
           </a:solidFill>
           <a:ln w="12700">
             <a:solidFill>
-              <a:srgbClr val="E67E22"/>
+              <a:srgbClr val="B2D8F0"/>
             </a:solidFill>
             <a:prstDash val="solid"/>
           </a:ln>
-        </p:spPr>
-      </p:sp>
-      <p:sp>
-        <p:nvSpPr>
-          <p:cNvPr id="35" name="Shape 33"/>
-          <p:cNvSpPr/>
-          <p:nvPr/>
-        </p:nvSpPr>
-        <p:spPr>
-          <a:xfrm>
-            <a:off x="6254496" y="1554480"/>
-            <a:ext cx="64008" cy="749808"/>
-          </a:xfrm>
-          <a:prstGeom prst="rect">
-            <a:avLst/>
-          </a:prstGeom>
-          <a:solidFill>
-            <a:srgbClr val="E67E22"/>
+          <a:effectLst>
+            <a:outerShdw sx="100000" sy="100000" kx="0" ky="0" algn="bl" rotWithShape="0" blurRad="127000" dist="38100" dir="8100000">
+              <a:srgbClr val="000000">
+                <a:alpha val="10000"/>
+              </a:srgbClr>
+            </a:outerShdw>
+          </a:effectLst>
+        </p:spPr>
+      </p:sp>
+      <p:sp>
+        <p:nvSpPr>
+          <p:cNvPr id="36" name="Shape 34"/>
+          <p:cNvSpPr/>
+          <p:nvPr/>
+        </p:nvSpPr>
+        <p:spPr>
+          <a:xfrm>
+            <a:off x="6181344" y="1517904"/>
+            <a:ext cx="91440" cy="713232"/>
+          </a:xfrm>
+          <a:prstGeom prst="rect">
+            <a:avLst/>
+          </a:prstGeom>
+          <a:solidFill>
+            <a:srgbClr val="1A5276"/>
           </a:solidFill>
           <a:ln w="12700">
             <a:solidFill>
-              <a:srgbClr val="E67E22"/>
+              <a:srgbClr val="1A5276"/>
             </a:solidFill>
             <a:prstDash val="solid"/>
           </a:ln>
@@ -7950,14 +8050,14 @@
       </p:sp>
       <p:sp>
         <p:nvSpPr>
-          <p:cNvPr id="36" name="Text 34"/>
-          <p:cNvSpPr/>
-          <p:nvPr/>
-        </p:nvSpPr>
-        <p:spPr>
-          <a:xfrm>
-            <a:off x="6400800" y="1609344"/>
-            <a:ext cx="2468880" cy="640080"/>
+          <p:cNvPr id="37" name="Text 35"/>
+          <p:cNvSpPr/>
+          <p:nvPr/>
+        </p:nvSpPr>
+        <p:spPr>
+          <a:xfrm>
+            <a:off x="6345936" y="1572768"/>
+            <a:ext cx="2560320" cy="603504"/>
           </a:xfrm>
           <a:prstGeom prst="rect">
             <a:avLst/>
@@ -7973,65 +8073,72 @@
               <a:buNone/>
             </a:pPr>
             <a:r>
-              <a:rPr lang="en-US" sz="950" dirty="0">
-                <a:solidFill>
-                  <a:srgbClr val="D6EAF8"/>
+              <a:rPr lang="en-US" sz="1200" dirty="0">
+                <a:solidFill>
+                  <a:srgbClr val="1A1A2A"/>
                 </a:solidFill>
                 <a:latin typeface="Calibri" pitchFamily="34" charset="0"/>
                 <a:ea typeface="Calibri" pitchFamily="34" charset="-122"/>
                 <a:cs typeface="Calibri" pitchFamily="34" charset="-120"/>
               </a:rPr>
-              <a:t>Add temporal features — aftershock sequences and time-since-last event</a:t>
-            </a:r>
-            <a:endParaRPr lang="en-US" sz="950" dirty="0"/>
-          </a:p>
-        </p:txBody>
-      </p:sp>
-      <p:sp>
-        <p:nvSpPr>
-          <p:cNvPr id="37" name="Shape 35"/>
-          <p:cNvSpPr/>
-          <p:nvPr/>
-        </p:nvSpPr>
-        <p:spPr>
-          <a:xfrm>
-            <a:off x="6254496" y="2377440"/>
-            <a:ext cx="2697480" cy="749808"/>
-          </a:xfrm>
-          <a:prstGeom prst="rect">
-            <a:avLst/>
-          </a:prstGeom>
-          <a:solidFill>
-            <a:srgbClr val="1E3A5F"/>
+              <a:t>Add temporal features — aftershock sequences, time since last event</a:t>
+            </a:r>
+            <a:endParaRPr lang="en-US" sz="1200" dirty="0"/>
+          </a:p>
+        </p:txBody>
+      </p:sp>
+      <p:sp>
+        <p:nvSpPr>
+          <p:cNvPr id="38" name="Shape 36"/>
+          <p:cNvSpPr/>
+          <p:nvPr/>
+        </p:nvSpPr>
+        <p:spPr>
+          <a:xfrm>
+            <a:off x="6181344" y="2322576"/>
+            <a:ext cx="2816352" cy="713232"/>
+          </a:xfrm>
+          <a:prstGeom prst="rect">
+            <a:avLst/>
+          </a:prstGeom>
+          <a:solidFill>
+            <a:srgbClr val="EAF4FB"/>
           </a:solidFill>
           <a:ln w="12700">
             <a:solidFill>
-              <a:srgbClr val="E67E22"/>
+              <a:srgbClr val="B2D8F0"/>
             </a:solidFill>
             <a:prstDash val="solid"/>
           </a:ln>
-        </p:spPr>
-      </p:sp>
-      <p:sp>
-        <p:nvSpPr>
-          <p:cNvPr id="38" name="Shape 36"/>
-          <p:cNvSpPr/>
-          <p:nvPr/>
-        </p:nvSpPr>
-        <p:spPr>
-          <a:xfrm>
-            <a:off x="6254496" y="2377440"/>
-            <a:ext cx="64008" cy="749808"/>
-          </a:xfrm>
-          <a:prstGeom prst="rect">
-            <a:avLst/>
-          </a:prstGeom>
-          <a:solidFill>
-            <a:srgbClr val="E67E22"/>
+          <a:effectLst>
+            <a:outerShdw sx="100000" sy="100000" kx="0" ky="0" algn="bl" rotWithShape="0" blurRad="127000" dist="38100" dir="8100000">
+              <a:srgbClr val="000000">
+                <a:alpha val="10000"/>
+              </a:srgbClr>
+            </a:outerShdw>
+          </a:effectLst>
+        </p:spPr>
+      </p:sp>
+      <p:sp>
+        <p:nvSpPr>
+          <p:cNvPr id="39" name="Shape 37"/>
+          <p:cNvSpPr/>
+          <p:nvPr/>
+        </p:nvSpPr>
+        <p:spPr>
+          <a:xfrm>
+            <a:off x="6181344" y="2322576"/>
+            <a:ext cx="91440" cy="713232"/>
+          </a:xfrm>
+          <a:prstGeom prst="rect">
+            <a:avLst/>
+          </a:prstGeom>
+          <a:solidFill>
+            <a:srgbClr val="1A5276"/>
           </a:solidFill>
           <a:ln w="12700">
             <a:solidFill>
-              <a:srgbClr val="E67E22"/>
+              <a:srgbClr val="1A5276"/>
             </a:solidFill>
             <a:prstDash val="solid"/>
           </a:ln>
@@ -8039,14 +8146,14 @@
       </p:sp>
       <p:sp>
         <p:nvSpPr>
-          <p:cNvPr id="39" name="Text 37"/>
-          <p:cNvSpPr/>
-          <p:nvPr/>
-        </p:nvSpPr>
-        <p:spPr>
-          <a:xfrm>
-            <a:off x="6400800" y="2432304"/>
-            <a:ext cx="2468880" cy="640080"/>
+          <p:cNvPr id="40" name="Text 38"/>
+          <p:cNvSpPr/>
+          <p:nvPr/>
+        </p:nvSpPr>
+        <p:spPr>
+          <a:xfrm>
+            <a:off x="6345936" y="2377440"/>
+            <a:ext cx="2560320" cy="603504"/>
           </a:xfrm>
           <a:prstGeom prst="rect">
             <a:avLst/>
@@ -8062,65 +8169,72 @@
               <a:buNone/>
             </a:pPr>
             <a:r>
-              <a:rPr lang="en-US" sz="950" dirty="0">
-                <a:solidFill>
-                  <a:srgbClr val="D6EAF8"/>
+              <a:rPr lang="en-US" sz="1200" dirty="0">
+                <a:solidFill>
+                  <a:srgbClr val="1A1A2A"/>
                 </a:solidFill>
                 <a:latin typeface="Calibri" pitchFamily="34" charset="0"/>
                 <a:ea typeface="Calibri" pitchFamily="34" charset="-122"/>
                 <a:cs typeface="Calibri" pitchFamily="34" charset="-120"/>
               </a:rPr>
-              <a:t>USGS real-time WebSocket feed for sub-second map updates</a:t>
-            </a:r>
-            <a:endParaRPr lang="en-US" sz="950" dirty="0"/>
-          </a:p>
-        </p:txBody>
-      </p:sp>
-      <p:sp>
-        <p:nvSpPr>
-          <p:cNvPr id="40" name="Shape 38"/>
-          <p:cNvSpPr/>
-          <p:nvPr/>
-        </p:nvSpPr>
-        <p:spPr>
-          <a:xfrm>
-            <a:off x="6254496" y="3200400"/>
-            <a:ext cx="2697480" cy="749808"/>
-          </a:xfrm>
-          <a:prstGeom prst="rect">
-            <a:avLst/>
-          </a:prstGeom>
-          <a:solidFill>
-            <a:srgbClr val="1E3A5F"/>
+              <a:t>USGS WebSocket feed for sub-second real-time map updates</a:t>
+            </a:r>
+            <a:endParaRPr lang="en-US" sz="1200" dirty="0"/>
+          </a:p>
+        </p:txBody>
+      </p:sp>
+      <p:sp>
+        <p:nvSpPr>
+          <p:cNvPr id="41" name="Shape 39"/>
+          <p:cNvSpPr/>
+          <p:nvPr/>
+        </p:nvSpPr>
+        <p:spPr>
+          <a:xfrm>
+            <a:off x="6181344" y="3127248"/>
+            <a:ext cx="2816352" cy="713232"/>
+          </a:xfrm>
+          <a:prstGeom prst="rect">
+            <a:avLst/>
+          </a:prstGeom>
+          <a:solidFill>
+            <a:srgbClr val="EAF4FB"/>
           </a:solidFill>
           <a:ln w="12700">
             <a:solidFill>
-              <a:srgbClr val="E67E22"/>
+              <a:srgbClr val="B2D8F0"/>
             </a:solidFill>
             <a:prstDash val="solid"/>
           </a:ln>
-        </p:spPr>
-      </p:sp>
-      <p:sp>
-        <p:nvSpPr>
-          <p:cNvPr id="41" name="Shape 39"/>
-          <p:cNvSpPr/>
-          <p:nvPr/>
-        </p:nvSpPr>
-        <p:spPr>
-          <a:xfrm>
-            <a:off x="6254496" y="3200400"/>
-            <a:ext cx="64008" cy="749808"/>
-          </a:xfrm>
-          <a:prstGeom prst="rect">
-            <a:avLst/>
-          </a:prstGeom>
-          <a:solidFill>
-            <a:srgbClr val="E67E22"/>
+          <a:effectLst>
+            <a:outerShdw sx="100000" sy="100000" kx="0" ky="0" algn="bl" rotWithShape="0" blurRad="127000" dist="38100" dir="8100000">
+              <a:srgbClr val="000000">
+                <a:alpha val="10000"/>
+              </a:srgbClr>
+            </a:outerShdw>
+          </a:effectLst>
+        </p:spPr>
+      </p:sp>
+      <p:sp>
+        <p:nvSpPr>
+          <p:cNvPr id="42" name="Shape 40"/>
+          <p:cNvSpPr/>
+          <p:nvPr/>
+        </p:nvSpPr>
+        <p:spPr>
+          <a:xfrm>
+            <a:off x="6181344" y="3127248"/>
+            <a:ext cx="91440" cy="713232"/>
+          </a:xfrm>
+          <a:prstGeom prst="rect">
+            <a:avLst/>
+          </a:prstGeom>
+          <a:solidFill>
+            <a:srgbClr val="1A5276"/>
           </a:solidFill>
           <a:ln w="12700">
             <a:solidFill>
-              <a:srgbClr val="E67E22"/>
+              <a:srgbClr val="1A5276"/>
             </a:solidFill>
             <a:prstDash val="solid"/>
           </a:ln>
@@ -8128,14 +8242,14 @@
       </p:sp>
       <p:sp>
         <p:nvSpPr>
-          <p:cNvPr id="42" name="Text 40"/>
-          <p:cNvSpPr/>
-          <p:nvPr/>
-        </p:nvSpPr>
-        <p:spPr>
-          <a:xfrm>
-            <a:off x="6400800" y="3255264"/>
-            <a:ext cx="2468880" cy="640080"/>
+          <p:cNvPr id="43" name="Text 41"/>
+          <p:cNvSpPr/>
+          <p:nvPr/>
+        </p:nvSpPr>
+        <p:spPr>
+          <a:xfrm>
+            <a:off x="6345936" y="3182112"/>
+            <a:ext cx="2560320" cy="603504"/>
           </a:xfrm>
           <a:prstGeom prst="rect">
             <a:avLst/>
@@ -8151,65 +8265,72 @@
               <a:buNone/>
             </a:pPr>
             <a:r>
-              <a:rPr lang="en-US" sz="950" dirty="0">
-                <a:solidFill>
-                  <a:srgbClr val="D6EAF8"/>
+              <a:rPr lang="en-US" sz="1200" dirty="0">
+                <a:solidFill>
+                  <a:srgbClr val="1A1A2A"/>
                 </a:solidFill>
                 <a:latin typeface="Calibri" pitchFamily="34" charset="0"/>
                 <a:ea typeface="Calibri" pitchFamily="34" charset="-122"/>
                 <a:cs typeface="Calibri" pitchFamily="34" charset="-120"/>
               </a:rPr>
-              <a:t>Expand to regression: predict magnitude from early signal features</a:t>
-            </a:r>
-            <a:endParaRPr lang="en-US" sz="950" dirty="0"/>
-          </a:p>
-        </p:txBody>
-      </p:sp>
-      <p:sp>
-        <p:nvSpPr>
-          <p:cNvPr id="43" name="Shape 41"/>
-          <p:cNvSpPr/>
-          <p:nvPr/>
-        </p:nvSpPr>
-        <p:spPr>
-          <a:xfrm>
-            <a:off x="6254496" y="4023360"/>
-            <a:ext cx="2697480" cy="749808"/>
-          </a:xfrm>
-          <a:prstGeom prst="rect">
-            <a:avLst/>
-          </a:prstGeom>
-          <a:solidFill>
-            <a:srgbClr val="1E3A5F"/>
+              <a:t>Expand to regression: predict magnitude from early seismic signals</a:t>
+            </a:r>
+            <a:endParaRPr lang="en-US" sz="1200" dirty="0"/>
+          </a:p>
+        </p:txBody>
+      </p:sp>
+      <p:sp>
+        <p:nvSpPr>
+          <p:cNvPr id="44" name="Shape 42"/>
+          <p:cNvSpPr/>
+          <p:nvPr/>
+        </p:nvSpPr>
+        <p:spPr>
+          <a:xfrm>
+            <a:off x="6181344" y="3931920"/>
+            <a:ext cx="2816352" cy="713232"/>
+          </a:xfrm>
+          <a:prstGeom prst="rect">
+            <a:avLst/>
+          </a:prstGeom>
+          <a:solidFill>
+            <a:srgbClr val="EAF4FB"/>
           </a:solidFill>
           <a:ln w="12700">
             <a:solidFill>
-              <a:srgbClr val="E67E22"/>
+              <a:srgbClr val="B2D8F0"/>
             </a:solidFill>
             <a:prstDash val="solid"/>
           </a:ln>
-        </p:spPr>
-      </p:sp>
-      <p:sp>
-        <p:nvSpPr>
-          <p:cNvPr id="44" name="Shape 42"/>
-          <p:cNvSpPr/>
-          <p:nvPr/>
-        </p:nvSpPr>
-        <p:spPr>
-          <a:xfrm>
-            <a:off x="6254496" y="4023360"/>
-            <a:ext cx="64008" cy="749808"/>
-          </a:xfrm>
-          <a:prstGeom prst="rect">
-            <a:avLst/>
-          </a:prstGeom>
-          <a:solidFill>
-            <a:srgbClr val="E67E22"/>
+          <a:effectLst>
+            <a:outerShdw sx="100000" sy="100000" kx="0" ky="0" algn="bl" rotWithShape="0" blurRad="127000" dist="38100" dir="8100000">
+              <a:srgbClr val="000000">
+                <a:alpha val="10000"/>
+              </a:srgbClr>
+            </a:outerShdw>
+          </a:effectLst>
+        </p:spPr>
+      </p:sp>
+      <p:sp>
+        <p:nvSpPr>
+          <p:cNvPr id="45" name="Shape 43"/>
+          <p:cNvSpPr/>
+          <p:nvPr/>
+        </p:nvSpPr>
+        <p:spPr>
+          <a:xfrm>
+            <a:off x="6181344" y="3931920"/>
+            <a:ext cx="91440" cy="713232"/>
+          </a:xfrm>
+          <a:prstGeom prst="rect">
+            <a:avLst/>
+          </a:prstGeom>
+          <a:solidFill>
+            <a:srgbClr val="1A5276"/>
           </a:solidFill>
           <a:ln w="12700">
             <a:solidFill>
-              <a:srgbClr val="E67E22"/>
+              <a:srgbClr val="1A5276"/>
             </a:solidFill>
             <a:prstDash val="solid"/>
           </a:ln>
@@ -8217,14 +8338,14 @@
       </p:sp>
       <p:sp>
         <p:nvSpPr>
-          <p:cNvPr id="45" name="Text 43"/>
-          <p:cNvSpPr/>
-          <p:nvPr/>
-        </p:nvSpPr>
-        <p:spPr>
-          <a:xfrm>
-            <a:off x="6400800" y="4078224"/>
-            <a:ext cx="2468880" cy="640080"/>
+          <p:cNvPr id="46" name="Text 44"/>
+          <p:cNvSpPr/>
+          <p:nvPr/>
+        </p:nvSpPr>
+        <p:spPr>
+          <a:xfrm>
+            <a:off x="6345936" y="3986784"/>
+            <a:ext cx="2560320" cy="603504"/>
           </a:xfrm>
           <a:prstGeom prst="rect">
             <a:avLst/>
@@ -8240,30 +8361,30 @@
               <a:buNone/>
             </a:pPr>
             <a:r>
-              <a:rPr lang="en-US" sz="950" dirty="0">
-                <a:solidFill>
-                  <a:srgbClr val="D6EAF8"/>
+              <a:rPr lang="en-US" sz="1200" dirty="0">
+                <a:solidFill>
+                  <a:srgbClr val="1A1A2A"/>
                 </a:solidFill>
                 <a:latin typeface="Calibri" pitchFamily="34" charset="0"/>
                 <a:ea typeface="Calibri" pitchFamily="34" charset="-122"/>
                 <a:cs typeface="Calibri" pitchFamily="34" charset="-120"/>
               </a:rPr>
-              <a:t>Add geospatial clustering — fault line proximity as a feature</a:t>
-            </a:r>
-            <a:endParaRPr lang="en-US" sz="950" dirty="0"/>
-          </a:p>
-        </p:txBody>
-      </p:sp>
-      <p:sp>
-        <p:nvSpPr>
-          <p:cNvPr id="46" name="Text 44"/>
-          <p:cNvSpPr/>
-          <p:nvPr/>
-        </p:nvSpPr>
-        <p:spPr>
-          <a:xfrm>
-            <a:off x="457200" y="4754880"/>
-            <a:ext cx="8412480" cy="274320"/>
+              <a:t>Geospatial clustering — fault line proximity as an engineered feature</a:t>
+            </a:r>
+            <a:endParaRPr lang="en-US" sz="1200" dirty="0"/>
+          </a:p>
+        </p:txBody>
+      </p:sp>
+      <p:sp>
+        <p:nvSpPr>
+          <p:cNvPr id="47" name="Text 45"/>
+          <p:cNvSpPr/>
+          <p:nvPr/>
+        </p:nvSpPr>
+        <p:spPr>
+          <a:xfrm>
+            <a:off x="365760" y="4919472"/>
+            <a:ext cx="8412480" cy="182880"/>
           </a:xfrm>
           <a:prstGeom prst="rect">
             <a:avLst/>
@@ -8279,9 +8400,9 @@
               <a:buNone/>
             </a:pPr>
             <a:r>
-              <a:rPr lang="en-US" sz="1000" dirty="0">
-                <a:solidFill>
-                  <a:srgbClr val="4A6FA5"/>
+              <a:rPr lang="en-US" sz="1100" dirty="0">
+                <a:solidFill>
+                  <a:srgbClr val="4A6274"/>
                 </a:solidFill>
                 <a:latin typeface="Calibri" pitchFamily="34" charset="0"/>
                 <a:ea typeface="Calibri" pitchFamily="34" charset="-122"/>
@@ -8289,7 +8410,7 @@
               </a:rPr>
               <a:t>EarthSafe  ·  STAT 418  ·  Yutong Ma  ·  UCLA Spring 2026</a:t>
             </a:r>
-            <a:endParaRPr lang="en-US" sz="1000" dirty="0"/>
+            <a:endParaRPr lang="en-US" sz="1100" dirty="0"/>
           </a:p>
         </p:txBody>
       </p:sp>

--- a/EarthSafe_Final_Presentation.pptx
+++ b/EarthSafe_Final_Presentation.pptx
@@ -7104,7 +7104,7 @@
         <p:spPr>
           <a:xfrm>
             <a:off x="256032" y="1517904"/>
-            <a:ext cx="2816352" cy="713232"/>
+            <a:ext cx="2816352" cy="1024128"/>
           </a:xfrm>
           <a:prstGeom prst="rect">
             <a:avLst/>
@@ -7136,7 +7136,7 @@
         <p:spPr>
           <a:xfrm>
             <a:off x="256032" y="1517904"/>
-            <a:ext cx="91440" cy="713232"/>
+            <a:ext cx="91440" cy="1024128"/>
           </a:xfrm>
           <a:prstGeom prst="rect">
             <a:avLst/>
@@ -7160,8 +7160,8 @@
         </p:nvSpPr>
         <p:spPr>
           <a:xfrm>
-            <a:off x="420624" y="1572768"/>
-            <a:ext cx="2560320" cy="603504"/>
+            <a:off x="420624" y="1591056"/>
+            <a:ext cx="2560320" cy="877824"/>
           </a:xfrm>
           <a:prstGeom prst="rect">
             <a:avLst/>
@@ -7177,7 +7177,7 @@
               <a:buNone/>
             </a:pPr>
             <a:r>
-              <a:rPr lang="en-US" sz="1200" dirty="0">
+              <a:rPr lang="en-US" sz="1400" dirty="0">
                 <a:solidFill>
                   <a:srgbClr val="1A1A2A"/>
                 </a:solidFill>
@@ -7185,9 +7185,9 @@
                 <a:ea typeface="Calibri" pitchFamily="34" charset="-122"/>
                 <a:cs typeface="Calibri" pitchFamily="34" charset="-120"/>
               </a:rPr>
-              <a:t>Severe class imbalance — only 7 High-hazard events in 2,000 records</a:t>
-            </a:r>
-            <a:endParaRPr lang="en-US" sz="1200" dirty="0"/>
+              <a:t>Class imbalance — 7 High events / 2,000 records</a:t>
+            </a:r>
+            <a:endParaRPr lang="en-US" sz="1400" dirty="0"/>
           </a:p>
         </p:txBody>
       </p:sp>
@@ -7199,8 +7199,8 @@
         </p:nvSpPr>
         <p:spPr>
           <a:xfrm>
-            <a:off x="256032" y="2322576"/>
-            <a:ext cx="2816352" cy="713232"/>
+            <a:off x="256032" y="2615184"/>
+            <a:ext cx="2816352" cy="1024128"/>
           </a:xfrm>
           <a:prstGeom prst="rect">
             <a:avLst/>
@@ -7231,8 +7231,8 @@
         </p:nvSpPr>
         <p:spPr>
           <a:xfrm>
-            <a:off x="256032" y="2322576"/>
-            <a:ext cx="91440" cy="713232"/>
+            <a:off x="256032" y="2615184"/>
+            <a:ext cx="91440" cy="1024128"/>
           </a:xfrm>
           <a:prstGeom prst="rect">
             <a:avLst/>
@@ -7256,8 +7256,8 @@
         </p:nvSpPr>
         <p:spPr>
           <a:xfrm>
-            <a:off x="420624" y="2377440"/>
-            <a:ext cx="2560320" cy="603504"/>
+            <a:off x="420624" y="2688336"/>
+            <a:ext cx="2560320" cy="877824"/>
           </a:xfrm>
           <a:prstGeom prst="rect">
             <a:avLst/>
@@ -7273,7 +7273,7 @@
               <a:buNone/>
             </a:pPr>
             <a:r>
-              <a:rPr lang="en-US" sz="1200" dirty="0">
+              <a:rPr lang="en-US" sz="1400" dirty="0">
                 <a:solidFill>
                   <a:srgbClr val="1A1A2A"/>
                 </a:solidFill>
@@ -7281,9 +7281,9 @@
                 <a:ea typeface="Calibri" pitchFamily="34" charset="-122"/>
                 <a:cs typeface="Calibri" pitchFamily="34" charset="-120"/>
               </a:rPr>
-              <a:t>macOS port 5000 blocked by AirPlay — migrated Flask API to port 5001</a:t>
-            </a:r>
-            <a:endParaRPr lang="en-US" sz="1200" dirty="0"/>
+              <a:t>Port 5000 blocked → Flask moved to 5001</a:t>
+            </a:r>
+            <a:endParaRPr lang="en-US" sz="1400" dirty="0"/>
           </a:p>
         </p:txBody>
       </p:sp>
@@ -7295,8 +7295,8 @@
         </p:nvSpPr>
         <p:spPr>
           <a:xfrm>
-            <a:off x="256032" y="3127248"/>
-            <a:ext cx="2816352" cy="713232"/>
+            <a:off x="256032" y="3712464"/>
+            <a:ext cx="2816352" cy="1024128"/>
           </a:xfrm>
           <a:prstGeom prst="rect">
             <a:avLst/>
@@ -7327,8 +7327,8 @@
         </p:nvSpPr>
         <p:spPr>
           <a:xfrm>
-            <a:off x="256032" y="3127248"/>
-            <a:ext cx="91440" cy="713232"/>
+            <a:off x="256032" y="3712464"/>
+            <a:ext cx="91440" cy="1024128"/>
           </a:xfrm>
           <a:prstGeom prst="rect">
             <a:avLst/>
@@ -7352,8 +7352,8 @@
         </p:nvSpPr>
         <p:spPr>
           <a:xfrm>
-            <a:off x="420624" y="3182112"/>
-            <a:ext cx="2560320" cy="603504"/>
+            <a:off x="420624" y="3785616"/>
+            <a:ext cx="2560320" cy="877824"/>
           </a:xfrm>
           <a:prstGeom prst="rect">
             <a:avLst/>
@@ -7369,7 +7369,7 @@
               <a:buNone/>
             </a:pPr>
             <a:r>
-              <a:rPr lang="en-US" sz="1200" dirty="0">
+              <a:rPr lang="en-US" sz="1400" dirty="0">
                 <a:solidFill>
                   <a:srgbClr val="1A1A2A"/>
                 </a:solidFill>
@@ -7377,111 +7377,15 @@
                 <a:ea typeface="Calibri" pitchFamily="34" charset="-122"/>
                 <a:cs typeface="Calibri" pitchFamily="34" charset="-120"/>
               </a:rPr>
-              <a:t>XGBoost requires brew install libomp on macOS for OpenMP support</a:t>
-            </a:r>
-            <a:endParaRPr lang="en-US" sz="1200" dirty="0"/>
+              <a:t>XGBoost on Mac — brew install libomp</a:t>
+            </a:r>
+            <a:endParaRPr lang="en-US" sz="1400" dirty="0"/>
           </a:p>
         </p:txBody>
       </p:sp>
       <p:sp>
         <p:nvSpPr>
           <p:cNvPr id="16" name="Shape 14"/>
-          <p:cNvSpPr/>
-          <p:nvPr/>
-        </p:nvSpPr>
-        <p:spPr>
-          <a:xfrm>
-            <a:off x="256032" y="3931920"/>
-            <a:ext cx="2816352" cy="713232"/>
-          </a:xfrm>
-          <a:prstGeom prst="rect">
-            <a:avLst/>
-          </a:prstGeom>
-          <a:solidFill>
-            <a:srgbClr val="FDEDEC"/>
-          </a:solidFill>
-          <a:ln w="12700">
-            <a:solidFill>
-              <a:srgbClr val="F5B7B1"/>
-            </a:solidFill>
-            <a:prstDash val="solid"/>
-          </a:ln>
-          <a:effectLst>
-            <a:outerShdw sx="100000" sy="100000" kx="0" ky="0" algn="bl" rotWithShape="0" blurRad="127000" dist="38100" dir="8100000">
-              <a:srgbClr val="000000">
-                <a:alpha val="10000"/>
-              </a:srgbClr>
-            </a:outerShdw>
-          </a:effectLst>
-        </p:spPr>
-      </p:sp>
-      <p:sp>
-        <p:nvSpPr>
-          <p:cNvPr id="17" name="Shape 15"/>
-          <p:cNvSpPr/>
-          <p:nvPr/>
-        </p:nvSpPr>
-        <p:spPr>
-          <a:xfrm>
-            <a:off x="256032" y="3931920"/>
-            <a:ext cx="91440" cy="713232"/>
-          </a:xfrm>
-          <a:prstGeom prst="rect">
-            <a:avLst/>
-          </a:prstGeom>
-          <a:solidFill>
-            <a:srgbClr val="C0392B"/>
-          </a:solidFill>
-          <a:ln w="12700">
-            <a:solidFill>
-              <a:srgbClr val="C0392B"/>
-            </a:solidFill>
-            <a:prstDash val="solid"/>
-          </a:ln>
-        </p:spPr>
-      </p:sp>
-      <p:sp>
-        <p:nvSpPr>
-          <p:cNvPr id="18" name="Text 16"/>
-          <p:cNvSpPr/>
-          <p:nvPr/>
-        </p:nvSpPr>
-        <p:spPr>
-          <a:xfrm>
-            <a:off x="420624" y="3986784"/>
-            <a:ext cx="2560320" cy="603504"/>
-          </a:xfrm>
-          <a:prstGeom prst="rect">
-            <a:avLst/>
-          </a:prstGeom>
-          <a:noFill/>
-          <a:ln/>
-        </p:spPr>
-        <p:txBody>
-          <a:bodyPr wrap="square" rtlCol="0" anchor="ctr"/>
-          <a:lstStyle/>
-          <a:p>
-            <a:pPr indent="0" marL="0">
-              <a:buNone/>
-            </a:pPr>
-            <a:r>
-              <a:rPr lang="en-US" sz="1200" dirty="0">
-                <a:solidFill>
-                  <a:srgbClr val="1A1A2A"/>
-                </a:solidFill>
-                <a:latin typeface="Calibri" pitchFamily="34" charset="0"/>
-                <a:ea typeface="Calibri" pitchFamily="34" charset="-122"/>
-                <a:cs typeface="Calibri" pitchFamily="34" charset="-120"/>
-              </a:rPr>
-              <a:t>USGS 20k/request limit — solved with monthly chunk fetching</a:t>
-            </a:r>
-            <a:endParaRPr lang="en-US" sz="1200" dirty="0"/>
-          </a:p>
-        </p:txBody>
-      </p:sp>
-      <p:sp>
-        <p:nvSpPr>
-          <p:cNvPr id="19" name="Shape 17"/>
           <p:cNvSpPr/>
           <p:nvPr/>
         </p:nvSpPr>
@@ -7506,7 +7410,7 @@
       </p:sp>
       <p:sp>
         <p:nvSpPr>
-          <p:cNvPr id="20" name="Text 18"/>
+          <p:cNvPr id="17" name="Text 15"/>
           <p:cNvSpPr/>
           <p:nvPr/>
         </p:nvSpPr>
@@ -7545,14 +7449,14 @@
       </p:sp>
       <p:sp>
         <p:nvSpPr>
-          <p:cNvPr id="21" name="Shape 19"/>
+          <p:cNvPr id="18" name="Shape 16"/>
           <p:cNvSpPr/>
           <p:nvPr/>
         </p:nvSpPr>
         <p:spPr>
           <a:xfrm>
             <a:off x="3218688" y="1517904"/>
-            <a:ext cx="2816352" cy="713232"/>
+            <a:ext cx="2816352" cy="1024128"/>
           </a:xfrm>
           <a:prstGeom prst="rect">
             <a:avLst/>
@@ -7577,14 +7481,14 @@
       </p:sp>
       <p:sp>
         <p:nvSpPr>
-          <p:cNvPr id="22" name="Shape 20"/>
+          <p:cNvPr id="19" name="Shape 17"/>
           <p:cNvSpPr/>
           <p:nvPr/>
         </p:nvSpPr>
         <p:spPr>
           <a:xfrm>
             <a:off x="3218688" y="1517904"/>
-            <a:ext cx="91440" cy="713232"/>
+            <a:ext cx="91440" cy="1024128"/>
           </a:xfrm>
           <a:prstGeom prst="rect">
             <a:avLst/>
@@ -7602,14 +7506,14 @@
       </p:sp>
       <p:sp>
         <p:nvSpPr>
-          <p:cNvPr id="23" name="Text 21"/>
-          <p:cNvSpPr/>
-          <p:nvPr/>
-        </p:nvSpPr>
-        <p:spPr>
-          <a:xfrm>
-            <a:off x="3383280" y="1572768"/>
-            <a:ext cx="2560320" cy="603504"/>
+          <p:cNvPr id="20" name="Text 18"/>
+          <p:cNvSpPr/>
+          <p:nvPr/>
+        </p:nvSpPr>
+        <p:spPr>
+          <a:xfrm>
+            <a:off x="3383280" y="1591056"/>
+            <a:ext cx="2560320" cy="877824"/>
           </a:xfrm>
           <a:prstGeom prst="rect">
             <a:avLst/>
@@ -7625,7 +7529,7 @@
               <a:buNone/>
             </a:pPr>
             <a:r>
-              <a:rPr lang="en-US" sz="1200" dirty="0">
+              <a:rPr lang="en-US" sz="1400" dirty="0">
                 <a:solidFill>
                   <a:srgbClr val="1A1A2A"/>
                 </a:solidFill>
@@ -7633,22 +7537,22 @@
                 <a:ea typeface="Calibri" pitchFamily="34" charset="-122"/>
                 <a:cs typeface="Calibri" pitchFamily="34" charset="-120"/>
               </a:rPr>
-              <a:t>Full MLOps pipeline in one project: collect → train → API → UI → cloud</a:t>
-            </a:r>
-            <a:endParaRPr lang="en-US" sz="1200" dirty="0"/>
-          </a:p>
-        </p:txBody>
-      </p:sp>
-      <p:sp>
-        <p:nvSpPr>
-          <p:cNvPr id="24" name="Shape 22"/>
-          <p:cNvSpPr/>
-          <p:nvPr/>
-        </p:nvSpPr>
-        <p:spPr>
-          <a:xfrm>
-            <a:off x="3218688" y="2322576"/>
-            <a:ext cx="2816352" cy="713232"/>
+              <a:t>Full MLOps: data → model → API → UI → cloud</a:t>
+            </a:r>
+            <a:endParaRPr lang="en-US" sz="1400" dirty="0"/>
+          </a:p>
+        </p:txBody>
+      </p:sp>
+      <p:sp>
+        <p:nvSpPr>
+          <p:cNvPr id="21" name="Shape 19"/>
+          <p:cNvSpPr/>
+          <p:nvPr/>
+        </p:nvSpPr>
+        <p:spPr>
+          <a:xfrm>
+            <a:off x="3218688" y="2615184"/>
+            <a:ext cx="2816352" cy="1024128"/>
           </a:xfrm>
           <a:prstGeom prst="rect">
             <a:avLst/>
@@ -7673,14 +7577,14 @@
       </p:sp>
       <p:sp>
         <p:nvSpPr>
-          <p:cNvPr id="25" name="Shape 23"/>
-          <p:cNvSpPr/>
-          <p:nvPr/>
-        </p:nvSpPr>
-        <p:spPr>
-          <a:xfrm>
-            <a:off x="3218688" y="2322576"/>
-            <a:ext cx="91440" cy="713232"/>
+          <p:cNvPr id="22" name="Shape 20"/>
+          <p:cNvSpPr/>
+          <p:nvPr/>
+        </p:nvSpPr>
+        <p:spPr>
+          <a:xfrm>
+            <a:off x="3218688" y="2615184"/>
+            <a:ext cx="91440" cy="1024128"/>
           </a:xfrm>
           <a:prstGeom prst="rect">
             <a:avLst/>
@@ -7698,14 +7602,14 @@
       </p:sp>
       <p:sp>
         <p:nvSpPr>
-          <p:cNvPr id="26" name="Text 24"/>
-          <p:cNvSpPr/>
-          <p:nvPr/>
-        </p:nvSpPr>
-        <p:spPr>
-          <a:xfrm>
-            <a:off x="3383280" y="2377440"/>
-            <a:ext cx="2560320" cy="603504"/>
+          <p:cNvPr id="23" name="Text 21"/>
+          <p:cNvSpPr/>
+          <p:nvPr/>
+        </p:nvSpPr>
+        <p:spPr>
+          <a:xfrm>
+            <a:off x="3383280" y="2688336"/>
+            <a:ext cx="2560320" cy="877824"/>
           </a:xfrm>
           <a:prstGeom prst="rect">
             <a:avLst/>
@@ -7721,7 +7625,7 @@
               <a:buNone/>
             </a:pPr>
             <a:r>
-              <a:rPr lang="en-US" sz="1200" dirty="0">
+              <a:rPr lang="en-US" sz="1400" dirty="0">
                 <a:solidFill>
                   <a:srgbClr val="1A1A2A"/>
                 </a:solidFill>
@@ -7729,22 +7633,22 @@
                 <a:ea typeface="Calibri" pitchFamily="34" charset="-122"/>
                 <a:cs typeface="Calibri" pitchFamily="34" charset="-120"/>
               </a:rPr>
-              <a:t>Macro F1 is the right metric for imbalanced multiclass, not accuracy</a:t>
-            </a:r>
-            <a:endParaRPr lang="en-US" sz="1200" dirty="0"/>
-          </a:p>
-        </p:txBody>
-      </p:sp>
-      <p:sp>
-        <p:nvSpPr>
-          <p:cNvPr id="27" name="Shape 25"/>
-          <p:cNvSpPr/>
-          <p:nvPr/>
-        </p:nvSpPr>
-        <p:spPr>
-          <a:xfrm>
-            <a:off x="3218688" y="3127248"/>
-            <a:ext cx="2816352" cy="713232"/>
+              <a:t>Macro F1 &gt; accuracy on imbalanced data</a:t>
+            </a:r>
+            <a:endParaRPr lang="en-US" sz="1400" dirty="0"/>
+          </a:p>
+        </p:txBody>
+      </p:sp>
+      <p:sp>
+        <p:nvSpPr>
+          <p:cNvPr id="24" name="Shape 22"/>
+          <p:cNvSpPr/>
+          <p:nvPr/>
+        </p:nvSpPr>
+        <p:spPr>
+          <a:xfrm>
+            <a:off x="3218688" y="3712464"/>
+            <a:ext cx="2816352" cy="1024128"/>
           </a:xfrm>
           <a:prstGeom prst="rect">
             <a:avLst/>
@@ -7769,14 +7673,14 @@
       </p:sp>
       <p:sp>
         <p:nvSpPr>
-          <p:cNvPr id="28" name="Shape 26"/>
-          <p:cNvSpPr/>
-          <p:nvPr/>
-        </p:nvSpPr>
-        <p:spPr>
-          <a:xfrm>
-            <a:off x="3218688" y="3127248"/>
-            <a:ext cx="91440" cy="713232"/>
+          <p:cNvPr id="25" name="Shape 23"/>
+          <p:cNvSpPr/>
+          <p:nvPr/>
+        </p:nvSpPr>
+        <p:spPr>
+          <a:xfrm>
+            <a:off x="3218688" y="3712464"/>
+            <a:ext cx="91440" cy="1024128"/>
           </a:xfrm>
           <a:prstGeom prst="rect">
             <a:avLst/>
@@ -7794,14 +7698,14 @@
       </p:sp>
       <p:sp>
         <p:nvSpPr>
-          <p:cNvPr id="29" name="Text 27"/>
-          <p:cNvSpPr/>
-          <p:nvPr/>
-        </p:nvSpPr>
-        <p:spPr>
-          <a:xfrm>
-            <a:off x="3383280" y="3182112"/>
-            <a:ext cx="2560320" cy="603504"/>
+          <p:cNvPr id="26" name="Text 24"/>
+          <p:cNvSpPr/>
+          <p:nvPr/>
+        </p:nvSpPr>
+        <p:spPr>
+          <a:xfrm>
+            <a:off x="3383280" y="3785616"/>
+            <a:ext cx="2560320" cy="877824"/>
           </a:xfrm>
           <a:prstGeom prst="rect">
             <a:avLst/>
@@ -7817,7 +7721,7 @@
               <a:buNone/>
             </a:pPr>
             <a:r>
-              <a:rPr lang="en-US" sz="1200" dirty="0">
+              <a:rPr lang="en-US" sz="1400" dirty="0">
                 <a:solidFill>
                   <a:srgbClr val="1A1A2A"/>
                 </a:solidFill>
@@ -7825,111 +7729,15 @@
                 <a:ea typeface="Calibri" pitchFamily="34" charset="-122"/>
                 <a:cs typeface="Calibri" pitchFamily="34" charset="-120"/>
               </a:rPr>
-              <a:t>Docker health checks + depends_on for reliable multi-service startup</a:t>
-            </a:r>
-            <a:endParaRPr lang="en-US" sz="1200" dirty="0"/>
-          </a:p>
-        </p:txBody>
-      </p:sp>
-      <p:sp>
-        <p:nvSpPr>
-          <p:cNvPr id="30" name="Shape 28"/>
-          <p:cNvSpPr/>
-          <p:nvPr/>
-        </p:nvSpPr>
-        <p:spPr>
-          <a:xfrm>
-            <a:off x="3218688" y="3931920"/>
-            <a:ext cx="2816352" cy="713232"/>
-          </a:xfrm>
-          <a:prstGeom prst="rect">
-            <a:avLst/>
-          </a:prstGeom>
-          <a:solidFill>
-            <a:srgbClr val="E0F5F2"/>
-          </a:solidFill>
-          <a:ln w="12700">
-            <a:solidFill>
-              <a:srgbClr val="A2D9CE"/>
-            </a:solidFill>
-            <a:prstDash val="solid"/>
-          </a:ln>
-          <a:effectLst>
-            <a:outerShdw sx="100000" sy="100000" kx="0" ky="0" algn="bl" rotWithShape="0" blurRad="127000" dist="38100" dir="8100000">
-              <a:srgbClr val="000000">
-                <a:alpha val="10000"/>
-              </a:srgbClr>
-            </a:outerShdw>
-          </a:effectLst>
-        </p:spPr>
-      </p:sp>
-      <p:sp>
-        <p:nvSpPr>
-          <p:cNvPr id="31" name="Shape 29"/>
-          <p:cNvSpPr/>
-          <p:nvPr/>
-        </p:nvSpPr>
-        <p:spPr>
-          <a:xfrm>
-            <a:off x="3218688" y="3931920"/>
-            <a:ext cx="91440" cy="713232"/>
-          </a:xfrm>
-          <a:prstGeom prst="rect">
-            <a:avLst/>
-          </a:prstGeom>
-          <a:solidFill>
-            <a:srgbClr val="0D9488"/>
-          </a:solidFill>
-          <a:ln w="12700">
-            <a:solidFill>
-              <a:srgbClr val="0D9488"/>
-            </a:solidFill>
-            <a:prstDash val="solid"/>
-          </a:ln>
-        </p:spPr>
-      </p:sp>
-      <p:sp>
-        <p:nvSpPr>
-          <p:cNvPr id="32" name="Text 30"/>
-          <p:cNvSpPr/>
-          <p:nvPr/>
-        </p:nvSpPr>
-        <p:spPr>
-          <a:xfrm>
-            <a:off x="3383280" y="3986784"/>
-            <a:ext cx="2560320" cy="603504"/>
-          </a:xfrm>
-          <a:prstGeom prst="rect">
-            <a:avLst/>
-          </a:prstGeom>
-          <a:noFill/>
-          <a:ln/>
-        </p:spPr>
-        <p:txBody>
-          <a:bodyPr wrap="square" rtlCol="0" anchor="ctr"/>
-          <a:lstStyle/>
-          <a:p>
-            <a:pPr indent="0" marL="0">
-              <a:buNone/>
-            </a:pPr>
-            <a:r>
-              <a:rPr lang="en-US" sz="1200" dirty="0">
-                <a:solidFill>
-                  <a:srgbClr val="1A1A2A"/>
-                </a:solidFill>
-                <a:latin typeface="Calibri" pitchFamily="34" charset="0"/>
-                <a:ea typeface="Calibri" pitchFamily="34" charset="-122"/>
-                <a:cs typeface="Calibri" pitchFamily="34" charset="-120"/>
-              </a:rPr>
-              <a:t>XGBoost sample_weight more robust than class_weight for rare classes</a:t>
-            </a:r>
-            <a:endParaRPr lang="en-US" sz="1200" dirty="0"/>
-          </a:p>
-        </p:txBody>
-      </p:sp>
-      <p:sp>
-        <p:nvSpPr>
-          <p:cNvPr id="33" name="Shape 31"/>
+              <a:t>Claude AI: code, debug &amp; deploy at every layer</a:t>
+            </a:r>
+            <a:endParaRPr lang="en-US" sz="1400" dirty="0"/>
+          </a:p>
+        </p:txBody>
+      </p:sp>
+      <p:sp>
+        <p:nvSpPr>
+          <p:cNvPr id="27" name="Shape 25"/>
           <p:cNvSpPr/>
           <p:nvPr/>
         </p:nvSpPr>
@@ -7954,7 +7762,7 @@
       </p:sp>
       <p:sp>
         <p:nvSpPr>
-          <p:cNvPr id="34" name="Text 32"/>
+          <p:cNvPr id="28" name="Text 26"/>
           <p:cNvSpPr/>
           <p:nvPr/>
         </p:nvSpPr>
@@ -7993,14 +7801,14 @@
       </p:sp>
       <p:sp>
         <p:nvSpPr>
-          <p:cNvPr id="35" name="Shape 33"/>
+          <p:cNvPr id="29" name="Shape 27"/>
           <p:cNvSpPr/>
           <p:nvPr/>
         </p:nvSpPr>
         <p:spPr>
           <a:xfrm>
             <a:off x="6181344" y="1517904"/>
-            <a:ext cx="2816352" cy="713232"/>
+            <a:ext cx="2816352" cy="1024128"/>
           </a:xfrm>
           <a:prstGeom prst="rect">
             <a:avLst/>
@@ -8025,14 +7833,14 @@
       </p:sp>
       <p:sp>
         <p:nvSpPr>
-          <p:cNvPr id="36" name="Shape 34"/>
+          <p:cNvPr id="30" name="Shape 28"/>
           <p:cNvSpPr/>
           <p:nvPr/>
         </p:nvSpPr>
         <p:spPr>
           <a:xfrm>
             <a:off x="6181344" y="1517904"/>
-            <a:ext cx="91440" cy="713232"/>
+            <a:ext cx="91440" cy="1024128"/>
           </a:xfrm>
           <a:prstGeom prst="rect">
             <a:avLst/>
@@ -8050,14 +7858,14 @@
       </p:sp>
       <p:sp>
         <p:nvSpPr>
-          <p:cNvPr id="37" name="Text 35"/>
-          <p:cNvSpPr/>
-          <p:nvPr/>
-        </p:nvSpPr>
-        <p:spPr>
-          <a:xfrm>
-            <a:off x="6345936" y="1572768"/>
-            <a:ext cx="2560320" cy="603504"/>
+          <p:cNvPr id="31" name="Text 29"/>
+          <p:cNvSpPr/>
+          <p:nvPr/>
+        </p:nvSpPr>
+        <p:spPr>
+          <a:xfrm>
+            <a:off x="6345936" y="1591056"/>
+            <a:ext cx="2560320" cy="877824"/>
           </a:xfrm>
           <a:prstGeom prst="rect">
             <a:avLst/>
@@ -8073,7 +7881,7 @@
               <a:buNone/>
             </a:pPr>
             <a:r>
-              <a:rPr lang="en-US" sz="1200" dirty="0">
+              <a:rPr lang="en-US" sz="1400" dirty="0">
                 <a:solidFill>
                   <a:srgbClr val="1A1A2A"/>
                 </a:solidFill>
@@ -8081,22 +7889,22 @@
                 <a:ea typeface="Calibri" pitchFamily="34" charset="-122"/>
                 <a:cs typeface="Calibri" pitchFamily="34" charset="-120"/>
               </a:rPr>
-              <a:t>Add temporal features — aftershock sequences, time since last event</a:t>
-            </a:r>
-            <a:endParaRPr lang="en-US" sz="1200" dirty="0"/>
-          </a:p>
-        </p:txBody>
-      </p:sp>
-      <p:sp>
-        <p:nvSpPr>
-          <p:cNvPr id="38" name="Shape 36"/>
-          <p:cNvSpPr/>
-          <p:nvPr/>
-        </p:nvSpPr>
-        <p:spPr>
-          <a:xfrm>
-            <a:off x="6181344" y="2322576"/>
-            <a:ext cx="2816352" cy="713232"/>
+              <a:t>Temporal features — aftershock sequences</a:t>
+            </a:r>
+            <a:endParaRPr lang="en-US" sz="1400" dirty="0"/>
+          </a:p>
+        </p:txBody>
+      </p:sp>
+      <p:sp>
+        <p:nvSpPr>
+          <p:cNvPr id="32" name="Shape 30"/>
+          <p:cNvSpPr/>
+          <p:nvPr/>
+        </p:nvSpPr>
+        <p:spPr>
+          <a:xfrm>
+            <a:off x="6181344" y="2615184"/>
+            <a:ext cx="2816352" cy="1024128"/>
           </a:xfrm>
           <a:prstGeom prst="rect">
             <a:avLst/>
@@ -8121,14 +7929,14 @@
       </p:sp>
       <p:sp>
         <p:nvSpPr>
-          <p:cNvPr id="39" name="Shape 37"/>
-          <p:cNvSpPr/>
-          <p:nvPr/>
-        </p:nvSpPr>
-        <p:spPr>
-          <a:xfrm>
-            <a:off x="6181344" y="2322576"/>
-            <a:ext cx="91440" cy="713232"/>
+          <p:cNvPr id="33" name="Shape 31"/>
+          <p:cNvSpPr/>
+          <p:nvPr/>
+        </p:nvSpPr>
+        <p:spPr>
+          <a:xfrm>
+            <a:off x="6181344" y="2615184"/>
+            <a:ext cx="91440" cy="1024128"/>
           </a:xfrm>
           <a:prstGeom prst="rect">
             <a:avLst/>
@@ -8146,14 +7954,14 @@
       </p:sp>
       <p:sp>
         <p:nvSpPr>
-          <p:cNvPr id="40" name="Text 38"/>
-          <p:cNvSpPr/>
-          <p:nvPr/>
-        </p:nvSpPr>
-        <p:spPr>
-          <a:xfrm>
-            <a:off x="6345936" y="2377440"/>
-            <a:ext cx="2560320" cy="603504"/>
+          <p:cNvPr id="34" name="Text 32"/>
+          <p:cNvSpPr/>
+          <p:nvPr/>
+        </p:nvSpPr>
+        <p:spPr>
+          <a:xfrm>
+            <a:off x="6345936" y="2688336"/>
+            <a:ext cx="2560320" cy="877824"/>
           </a:xfrm>
           <a:prstGeom prst="rect">
             <a:avLst/>
@@ -8169,7 +7977,7 @@
               <a:buNone/>
             </a:pPr>
             <a:r>
-              <a:rPr lang="en-US" sz="1200" dirty="0">
+              <a:rPr lang="en-US" sz="1400" dirty="0">
                 <a:solidFill>
                   <a:srgbClr val="1A1A2A"/>
                 </a:solidFill>
@@ -8177,22 +7985,22 @@
                 <a:ea typeface="Calibri" pitchFamily="34" charset="-122"/>
                 <a:cs typeface="Calibri" pitchFamily="34" charset="-120"/>
               </a:rPr>
-              <a:t>USGS WebSocket feed for sub-second real-time map updates</a:t>
-            </a:r>
-            <a:endParaRPr lang="en-US" sz="1200" dirty="0"/>
-          </a:p>
-        </p:txBody>
-      </p:sp>
-      <p:sp>
-        <p:nvSpPr>
-          <p:cNvPr id="41" name="Shape 39"/>
-          <p:cNvSpPr/>
-          <p:nvPr/>
-        </p:nvSpPr>
-        <p:spPr>
-          <a:xfrm>
-            <a:off x="6181344" y="3127248"/>
-            <a:ext cx="2816352" cy="713232"/>
+              <a:t>USGS WebSocket — sub-second map updates</a:t>
+            </a:r>
+            <a:endParaRPr lang="en-US" sz="1400" dirty="0"/>
+          </a:p>
+        </p:txBody>
+      </p:sp>
+      <p:sp>
+        <p:nvSpPr>
+          <p:cNvPr id="35" name="Shape 33"/>
+          <p:cNvSpPr/>
+          <p:nvPr/>
+        </p:nvSpPr>
+        <p:spPr>
+          <a:xfrm>
+            <a:off x="6181344" y="3712464"/>
+            <a:ext cx="2816352" cy="1024128"/>
           </a:xfrm>
           <a:prstGeom prst="rect">
             <a:avLst/>
@@ -8217,14 +8025,14 @@
       </p:sp>
       <p:sp>
         <p:nvSpPr>
-          <p:cNvPr id="42" name="Shape 40"/>
-          <p:cNvSpPr/>
-          <p:nvPr/>
-        </p:nvSpPr>
-        <p:spPr>
-          <a:xfrm>
-            <a:off x="6181344" y="3127248"/>
-            <a:ext cx="91440" cy="713232"/>
+          <p:cNvPr id="36" name="Shape 34"/>
+          <p:cNvSpPr/>
+          <p:nvPr/>
+        </p:nvSpPr>
+        <p:spPr>
+          <a:xfrm>
+            <a:off x="6181344" y="3712464"/>
+            <a:ext cx="91440" cy="1024128"/>
           </a:xfrm>
           <a:prstGeom prst="rect">
             <a:avLst/>
@@ -8242,14 +8050,14 @@
       </p:sp>
       <p:sp>
         <p:nvSpPr>
-          <p:cNvPr id="43" name="Text 41"/>
-          <p:cNvSpPr/>
-          <p:nvPr/>
-        </p:nvSpPr>
-        <p:spPr>
-          <a:xfrm>
-            <a:off x="6345936" y="3182112"/>
-            <a:ext cx="2560320" cy="603504"/>
+          <p:cNvPr id="37" name="Text 35"/>
+          <p:cNvSpPr/>
+          <p:nvPr/>
+        </p:nvSpPr>
+        <p:spPr>
+          <a:xfrm>
+            <a:off x="6345936" y="3785616"/>
+            <a:ext cx="2560320" cy="877824"/>
           </a:xfrm>
           <a:prstGeom prst="rect">
             <a:avLst/>
@@ -8265,7 +8073,7 @@
               <a:buNone/>
             </a:pPr>
             <a:r>
-              <a:rPr lang="en-US" sz="1200" dirty="0">
+              <a:rPr lang="en-US" sz="1400" dirty="0">
                 <a:solidFill>
                   <a:srgbClr val="1A1A2A"/>
                 </a:solidFill>
@@ -8273,111 +8081,15 @@
                 <a:ea typeface="Calibri" pitchFamily="34" charset="-122"/>
                 <a:cs typeface="Calibri" pitchFamily="34" charset="-120"/>
               </a:rPr>
-              <a:t>Expand to regression: predict magnitude from early seismic signals</a:t>
-            </a:r>
-            <a:endParaRPr lang="en-US" sz="1200" dirty="0"/>
-          </a:p>
-        </p:txBody>
-      </p:sp>
-      <p:sp>
-        <p:nvSpPr>
-          <p:cNvPr id="44" name="Shape 42"/>
-          <p:cNvSpPr/>
-          <p:nvPr/>
-        </p:nvSpPr>
-        <p:spPr>
-          <a:xfrm>
-            <a:off x="6181344" y="3931920"/>
-            <a:ext cx="2816352" cy="713232"/>
-          </a:xfrm>
-          <a:prstGeom prst="rect">
-            <a:avLst/>
-          </a:prstGeom>
-          <a:solidFill>
-            <a:srgbClr val="EAF4FB"/>
-          </a:solidFill>
-          <a:ln w="12700">
-            <a:solidFill>
-              <a:srgbClr val="B2D8F0"/>
-            </a:solidFill>
-            <a:prstDash val="solid"/>
-          </a:ln>
-          <a:effectLst>
-            <a:outerShdw sx="100000" sy="100000" kx="0" ky="0" algn="bl" rotWithShape="0" blurRad="127000" dist="38100" dir="8100000">
-              <a:srgbClr val="000000">
-                <a:alpha val="10000"/>
-              </a:srgbClr>
-            </a:outerShdw>
-          </a:effectLst>
-        </p:spPr>
-      </p:sp>
-      <p:sp>
-        <p:nvSpPr>
-          <p:cNvPr id="45" name="Shape 43"/>
-          <p:cNvSpPr/>
-          <p:nvPr/>
-        </p:nvSpPr>
-        <p:spPr>
-          <a:xfrm>
-            <a:off x="6181344" y="3931920"/>
-            <a:ext cx="91440" cy="713232"/>
-          </a:xfrm>
-          <a:prstGeom prst="rect">
-            <a:avLst/>
-          </a:prstGeom>
-          <a:solidFill>
-            <a:srgbClr val="1A5276"/>
-          </a:solidFill>
-          <a:ln w="12700">
-            <a:solidFill>
-              <a:srgbClr val="1A5276"/>
-            </a:solidFill>
-            <a:prstDash val="solid"/>
-          </a:ln>
-        </p:spPr>
-      </p:sp>
-      <p:sp>
-        <p:nvSpPr>
-          <p:cNvPr id="46" name="Text 44"/>
-          <p:cNvSpPr/>
-          <p:nvPr/>
-        </p:nvSpPr>
-        <p:spPr>
-          <a:xfrm>
-            <a:off x="6345936" y="3986784"/>
-            <a:ext cx="2560320" cy="603504"/>
-          </a:xfrm>
-          <a:prstGeom prst="rect">
-            <a:avLst/>
-          </a:prstGeom>
-          <a:noFill/>
-          <a:ln/>
-        </p:spPr>
-        <p:txBody>
-          <a:bodyPr wrap="square" rtlCol="0" anchor="ctr"/>
-          <a:lstStyle/>
-          <a:p>
-            <a:pPr indent="0" marL="0">
-              <a:buNone/>
-            </a:pPr>
-            <a:r>
-              <a:rPr lang="en-US" sz="1200" dirty="0">
-                <a:solidFill>
-                  <a:srgbClr val="1A1A2A"/>
-                </a:solidFill>
-                <a:latin typeface="Calibri" pitchFamily="34" charset="0"/>
-                <a:ea typeface="Calibri" pitchFamily="34" charset="-122"/>
-                <a:cs typeface="Calibri" pitchFamily="34" charset="-120"/>
-              </a:rPr>
-              <a:t>Geospatial clustering — fault line proximity as an engineered feature</a:t>
-            </a:r>
-            <a:endParaRPr lang="en-US" sz="1200" dirty="0"/>
-          </a:p>
-        </p:txBody>
-      </p:sp>
-      <p:sp>
-        <p:nvSpPr>
-          <p:cNvPr id="47" name="Text 45"/>
+              <a:t>Magnitude regression — early warning</a:t>
+            </a:r>
+            <a:endParaRPr lang="en-US" sz="1400" dirty="0"/>
+          </a:p>
+        </p:txBody>
+      </p:sp>
+      <p:sp>
+        <p:nvSpPr>
+          <p:cNvPr id="38" name="Text 36"/>
           <p:cNvSpPr/>
           <p:nvPr/>
         </p:nvSpPr>
